--- a/docs/営業改革_部長会共有資料_会議運用編.pptx
+++ b/docs/営業改革_部長会共有資料_会議運用編.pptx
@@ -13,7 +13,6 @@
     <p:sldId id="261" r:id="rId12"/>
     <p:sldId id="262" r:id="rId13"/>
     <p:sldId id="263" r:id="rId14"/>
-    <p:sldId id="264" r:id="rId15"/>
   </p:sldIdLst>
   <p:sldSz cx="12191695" cy="6858000" type="screen4x3"/>
   <p:notesSz cx="6858000" cy="9144000"/>
@@ -3148,7 +3147,7 @@
         </p:nvSpPr>
         <p:spPr>
           <a:xfrm>
-            <a:off x="822960" y="1051560"/>
+            <a:off x="822960" y="1188720"/>
             <a:ext cx="2011680" cy="38100"/>
           </a:xfrm>
           <a:prstGeom prst="rect">
@@ -3192,7 +3191,7 @@
         </p:nvSpPr>
         <p:spPr>
           <a:xfrm>
-            <a:off x="822960" y="1325880"/>
+            <a:off x="822960" y="1463040"/>
             <a:ext cx="10515600" cy="365760"/>
           </a:xfrm>
           <a:prstGeom prst="rect">
@@ -3212,7 +3211,7 @@
               </a:spcAft>
             </a:pPr>
             <a:r>
-              <a:rPr sz="1300" b="1" i="0">
+              <a:rPr sz="1400" b="1" i="0">
                 <a:solidFill>
                   <a:srgbClr val="5F5F6E"/>
                 </a:solidFill>
@@ -3220,7 +3219,7 @@
                 <a:ea typeface="Yu Gothic"/>
                 <a:cs typeface="Yu Gothic"/>
               </a:rPr>
-              <a:t>部長会（30分）</a:t>
+              <a:t>部長会・30分</a:t>
             </a:r>
           </a:p>
         </p:txBody>
@@ -3233,8 +3232,8 @@
         </p:nvSpPr>
         <p:spPr>
           <a:xfrm>
-            <a:off x="822960" y="1965960"/>
-            <a:ext cx="10789920" cy="2011680"/>
+            <a:off x="822960" y="2194560"/>
+            <a:ext cx="10789920" cy="2194560"/>
           </a:xfrm>
           <a:prstGeom prst="rect">
             <a:avLst/>
@@ -3249,11 +3248,11 @@
           <a:p>
             <a:pPr algn="l">
               <a:spcAft>
-                <a:spcPts val="1000"/>
-              </a:spcAft>
-            </a:pPr>
-            <a:r>
-              <a:rPr sz="3000" b="1" i="0">
+                <a:spcPts val="200"/>
+              </a:spcAft>
+            </a:pPr>
+            <a:r>
+              <a:rPr sz="3400" b="1" i="0">
                 <a:solidFill>
                   <a:srgbClr val="262630"/>
                 </a:solidFill>
@@ -3261,17 +3260,35 @@
                 <a:ea typeface="Yu Gothic"/>
                 <a:cs typeface="Yu Gothic"/>
               </a:rPr>
-              <a:t>構造改革の「新しい会議の仕組み」が始まります</a:t>
+              <a:t>新しい会議の仕組みを</a:t>
             </a:r>
           </a:p>
           <a:p>
             <a:pPr algn="l">
               <a:spcAft>
-                <a:spcPts val="600"/>
-              </a:spcAft>
-            </a:pPr>
-            <a:r>
-              <a:rPr sz="1700" b="1" i="0">
+                <a:spcPts val="1600"/>
+              </a:spcAft>
+            </a:pPr>
+            <a:r>
+              <a:rPr sz="3400" b="1" i="0">
+                <a:solidFill>
+                  <a:srgbClr val="262630"/>
+                </a:solidFill>
+                <a:latin typeface="Yu Gothic"/>
+                <a:ea typeface="Yu Gothic"/>
+                <a:cs typeface="Yu Gothic"/>
+              </a:rPr>
+              <a:t>3つの絵で説明します</a:t>
+            </a:r>
+          </a:p>
+          <a:p>
+            <a:pPr algn="l">
+              <a:spcAft>
+                <a:spcPts val="400"/>
+              </a:spcAft>
+            </a:pPr>
+            <a:r>
+              <a:rPr sz="1500" b="1" i="0">
                 <a:solidFill>
                   <a:srgbClr val="7823DC"/>
                 </a:solidFill>
@@ -3279,25 +3296,7 @@
                 <a:ea typeface="Yu Gothic"/>
                 <a:cs typeface="Yu Gothic"/>
               </a:rPr>
-              <a:t>——検討と実行を前に進めるための、4つの会議とその回し方</a:t>
-            </a:r>
-          </a:p>
-          <a:p>
-            <a:pPr algn="l">
-              <a:spcAft>
-                <a:spcPts val="400"/>
-              </a:spcAft>
-            </a:pPr>
-            <a:r>
-              <a:rPr sz="1300" b="1" i="0">
-                <a:solidFill>
-                  <a:srgbClr val="3A106E"/>
-                </a:solidFill>
-                <a:latin typeface="Yu Gothic"/>
-                <a:ea typeface="Yu Gothic"/>
-                <a:cs typeface="Yu Gothic"/>
-              </a:rPr>
-              <a:t>今日お伝えすること：①どんな会議ができるのか　②皆さんの部門にどう関係するのか　③いまある会議はどうなるのか</a:t>
+              <a:t>① 会議は4つ　　② 2週間で1周する　　③ 決めてほしいことが上がり、決まったことが降りてくる</a:t>
             </a:r>
           </a:p>
         </p:txBody>
@@ -3310,8 +3309,8 @@
         </p:nvSpPr>
         <p:spPr>
           <a:xfrm>
-            <a:off x="822960" y="4572000"/>
-            <a:ext cx="10515600" cy="1280160"/>
+            <a:off x="822960" y="4937760"/>
+            <a:ext cx="10515600" cy="914400"/>
           </a:xfrm>
           <a:prstGeom prst="rect">
             <a:avLst/>
@@ -3326,29 +3325,29 @@
           <a:p>
             <a:pPr algn="l">
               <a:spcAft>
+                <a:spcPts val="300"/>
+              </a:spcAft>
+            </a:pPr>
+            <a:r>
+              <a:rPr sz="1200" b="1" i="0">
+                <a:solidFill>
+                  <a:srgbClr val="262630"/>
+                </a:solidFill>
+                <a:latin typeface="Yu Gothic"/>
+                <a:ea typeface="Yu Gothic"/>
+                <a:cs typeface="Yu Gothic"/>
+              </a:rPr>
+              <a:t>円谷プロダクション　専務執行役員　新谷 隼人</a:t>
+            </a:r>
+          </a:p>
+          <a:p>
+            <a:pPr algn="l">
+              <a:spcAft>
                 <a:spcPts val="400"/>
               </a:spcAft>
             </a:pPr>
             <a:r>
-              <a:rPr sz="1200" b="1" i="0">
-                <a:solidFill>
-                  <a:srgbClr val="262630"/>
-                </a:solidFill>
-                <a:latin typeface="Yu Gothic"/>
-                <a:ea typeface="Yu Gothic"/>
-                <a:cs typeface="Yu Gothic"/>
-              </a:rPr>
-              <a:t>円谷プロダクション　専務執行役員　新谷 隼人</a:t>
-            </a:r>
-          </a:p>
-          <a:p>
-            <a:pPr algn="l">
-              <a:spcAft>
-                <a:spcPts val="400"/>
-              </a:spcAft>
-            </a:pPr>
-            <a:r>
-              <a:rPr sz="1050" b="0" i="0">
+              <a:rPr sz="1100" b="0" i="0">
                 <a:solidFill>
                   <a:srgbClr val="5F5F6E"/>
                 </a:solidFill>
@@ -3356,7 +3355,7 @@
                 <a:ea typeface="Yu Gothic"/>
                 <a:cs typeface="Yu Gothic"/>
               </a:rPr>
-              <a:t>本日30分：説明 18分 ／ 質疑 10分 ／ 締め 2分　※外部専門家（カーニー社）の支援を受けて設計中の内容です</a:t>
+              <a:t>説明15分＋質疑15分</a:t>
             </a:r>
           </a:p>
         </p:txBody>
@@ -3387,8 +3386,8 @@
         </p:nvSpPr>
         <p:spPr>
           <a:xfrm>
-            <a:off x="502920" y="256032"/>
-            <a:ext cx="11155680" cy="256032"/>
+            <a:off x="502920" y="320040"/>
+            <a:ext cx="11155680" cy="274320"/>
           </a:xfrm>
           <a:prstGeom prst="rect">
             <a:avLst/>
@@ -3407,7 +3406,7 @@
               </a:spcAft>
             </a:pPr>
             <a:r>
-              <a:rPr sz="1000" b="1" i="0">
+              <a:rPr sz="1100" b="1" i="0">
                 <a:solidFill>
                   <a:srgbClr val="7823DC"/>
                 </a:solidFill>
@@ -3415,7 +3414,7 @@
                 <a:ea typeface="Yu Gothic"/>
                 <a:cs typeface="Yu Gothic"/>
               </a:rPr>
-              <a:t>なぜ会議を変えるのか（3分）</a:t>
+              <a:t>はじめに</a:t>
             </a:r>
           </a:p>
         </p:txBody>
@@ -3428,8 +3427,8 @@
         </p:nvSpPr>
         <p:spPr>
           <a:xfrm>
-            <a:off x="502920" y="512064"/>
-            <a:ext cx="11155680" cy="868680"/>
+            <a:off x="502920" y="621792"/>
+            <a:ext cx="11155680" cy="685800"/>
           </a:xfrm>
           <a:prstGeom prst="rect">
             <a:avLst/>
@@ -3444,11 +3443,11 @@
           <a:p>
             <a:pPr algn="l">
               <a:spcAft>
-                <a:spcPts val="0"/>
-              </a:spcAft>
-            </a:pPr>
-            <a:r>
-              <a:rPr sz="1900" b="1" i="0">
+                <a:spcPts val="400"/>
+              </a:spcAft>
+            </a:pPr>
+            <a:r>
+              <a:rPr sz="2400" b="1" i="0">
                 <a:solidFill>
                   <a:srgbClr val="262630"/>
                 </a:solidFill>
@@ -3456,7 +3455,7 @@
                 <a:ea typeface="Yu Gothic"/>
                 <a:cs typeface="Yu Gothic"/>
               </a:rPr>
-              <a:t>改革は「会議で決まる」——報告だけで終わる会議では、改革は前に進まない</a:t>
+              <a:t>一言でいうと：「決まらない会議」をなくす仕組みです</a:t>
             </a:r>
           </a:p>
         </p:txBody>
@@ -3469,8 +3468,8 @@
         </p:nvSpPr>
         <p:spPr>
           <a:xfrm>
-            <a:off x="502920" y="1389888"/>
-            <a:ext cx="1463040" cy="33020"/>
+            <a:off x="502920" y="1371600"/>
+            <a:ext cx="1645920" cy="38100"/>
           </a:xfrm>
           <a:prstGeom prst="rect">
             <a:avLst/>
@@ -3513,8 +3512,8 @@
         </p:nvSpPr>
         <p:spPr>
           <a:xfrm>
-            <a:off x="502920" y="1517904"/>
-            <a:ext cx="11155680" cy="310896"/>
+            <a:off x="502920" y="2011680"/>
+            <a:ext cx="11155680" cy="3291840"/>
           </a:xfrm>
           <a:prstGeom prst="rect">
             <a:avLst/>
@@ -3529,182 +3528,105 @@
           <a:p>
             <a:pPr algn="l">
               <a:spcAft>
+                <a:spcPts val="1000"/>
+              </a:spcAft>
+            </a:pPr>
+            <a:r>
+              <a:rPr sz="1700" b="0" i="0">
+                <a:solidFill>
+                  <a:srgbClr val="262630"/>
+                </a:solidFill>
+                <a:latin typeface="Yu Gothic"/>
+                <a:ea typeface="Yu Gothic"/>
+                <a:cs typeface="Yu Gothic"/>
+              </a:rPr>
+              <a:t>改革では、検討することと決めることが大量に発生します。</a:t>
+            </a:r>
+          </a:p>
+          <a:p>
+            <a:pPr algn="l">
+              <a:spcAft>
+                <a:spcPts val="600"/>
+              </a:spcAft>
+            </a:pPr>
+            <a:r>
+              <a:rPr sz="1700" b="0" i="0">
+                <a:solidFill>
+                  <a:srgbClr val="262630"/>
+                </a:solidFill>
+                <a:latin typeface="Yu Gothic"/>
+                <a:ea typeface="Yu Gothic"/>
+                <a:cs typeface="Yu Gothic"/>
+              </a:rPr>
+              <a:t>いまの会議のままだと——</a:t>
+            </a:r>
+          </a:p>
+          <a:p>
+            <a:pPr algn="l">
+              <a:spcAft>
+                <a:spcPts val="1600"/>
+              </a:spcAft>
+            </a:pPr>
+            <a:r>
+              <a:rPr sz="1700" b="1" i="0">
+                <a:solidFill>
+                  <a:srgbClr val="3A106E"/>
+                </a:solidFill>
+                <a:latin typeface="Yu Gothic"/>
+                <a:ea typeface="Yu Gothic"/>
+                <a:cs typeface="Yu Gothic"/>
+              </a:rPr>
+              <a:t>報告だけで時間が終わる。決められる人まで話が届かない。決まったことを誰も追いかけない。</a:t>
+            </a:r>
+          </a:p>
+          <a:p>
+            <a:pPr algn="l">
+              <a:spcAft>
+                <a:spcPts val="600"/>
+              </a:spcAft>
+            </a:pPr>
+            <a:r>
+              <a:rPr sz="1700" b="0" i="0">
+                <a:solidFill>
+                  <a:srgbClr val="262630"/>
+                </a:solidFill>
+                <a:latin typeface="Yu Gothic"/>
+                <a:ea typeface="Yu Gothic"/>
+                <a:cs typeface="Yu Gothic"/>
+              </a:rPr>
+              <a:t>だから、役割の違う4つの会議を作り、</a:t>
+            </a:r>
+          </a:p>
+          <a:p>
+            <a:pPr algn="l">
+              <a:spcAft>
                 <a:spcPts val="400"/>
               </a:spcAft>
             </a:pPr>
             <a:r>
-              <a:rPr sz="1150" b="1" i="0">
-                <a:solidFill>
-                  <a:srgbClr val="3A106E"/>
-                </a:solidFill>
-                <a:latin typeface="Yu Gothic"/>
-                <a:ea typeface="Yu Gothic"/>
-                <a:cs typeface="Yu Gothic"/>
-              </a:rPr>
-              <a:t>構造改革では検討することと決めることが大量に発生します。それを流す専用の“道路”が必要です</a:t>
-            </a:r>
-          </a:p>
-        </p:txBody>
-      </p:sp>
-      <p:sp>
-        <p:nvSpPr>
-          <p:cNvPr id="6" name="TextBox 5"/>
-          <p:cNvSpPr txBox="1"/>
-          <p:nvPr/>
-        </p:nvSpPr>
-        <p:spPr>
-          <a:xfrm>
-            <a:off x="502920" y="1865376"/>
-            <a:ext cx="11155680" cy="3931920"/>
-          </a:xfrm>
-          <a:prstGeom prst="rect">
-            <a:avLst/>
-          </a:prstGeom>
-          <a:noFill/>
-        </p:spPr>
-        <p:txBody>
-          <a:bodyPr wrap="square" lIns="0" rIns="0" tIns="0" bIns="0">
-            <a:spAutoFit/>
-          </a:bodyPr>
-          <a:lstStyle/>
-          <a:p>
-            <a:pPr algn="l">
-              <a:spcAft>
-                <a:spcPts val="300"/>
-              </a:spcAft>
-            </a:pPr>
-            <a:r>
-              <a:rPr sz="1200" b="1" i="0">
-                <a:solidFill>
-                  <a:srgbClr val="3A106E"/>
-                </a:solidFill>
-                <a:latin typeface="Yu Gothic"/>
-                <a:ea typeface="Yu Gothic"/>
-                <a:cs typeface="Yu Gothic"/>
-              </a:rPr>
-              <a:t>これまでの会議の課題（見立て）</a:t>
-            </a:r>
-          </a:p>
-          <a:p>
-            <a:pPr algn="l">
-              <a:spcAft>
-                <a:spcPts val="600"/>
-              </a:spcAft>
-            </a:pPr>
-            <a:r>
-              <a:rPr sz="1150" b="0" i="0">
-                <a:solidFill>
-                  <a:srgbClr val="262630"/>
-                </a:solidFill>
-                <a:latin typeface="Yu Gothic"/>
-                <a:ea typeface="Yu Gothic"/>
-                <a:cs typeface="Yu Gothic"/>
-              </a:rPr>
-              <a:t>■ 報告と共有で時間が尽き、「何を決めたのか」が残らない／決めるべきことが、決められる人のところまで上がっていかない／決まったことのその後を、誰も追いかけていない</a:t>
-            </a:r>
-          </a:p>
-          <a:p>
-            <a:pPr algn="l">
-              <a:spcAft>
-                <a:spcPts val="300"/>
-              </a:spcAft>
-            </a:pPr>
-            <a:r>
-              <a:rPr sz="1200" b="1" i="0">
-                <a:solidFill>
-                  <a:srgbClr val="3A106E"/>
-                </a:solidFill>
-                <a:latin typeface="Yu Gothic"/>
-                <a:ea typeface="Yu Gothic"/>
-                <a:cs typeface="Yu Gothic"/>
-              </a:rPr>
-              <a:t>新しい仕組みの考え方は3つ</a:t>
-            </a:r>
-          </a:p>
-          <a:p>
-            <a:pPr algn="l">
-              <a:spcAft>
-                <a:spcPts val="600"/>
-              </a:spcAft>
-            </a:pPr>
-            <a:r>
-              <a:rPr sz="1150" b="0" i="0">
-                <a:solidFill>
-                  <a:srgbClr val="262630"/>
-                </a:solidFill>
-                <a:latin typeface="Yu Gothic"/>
-                <a:ea typeface="Yu Gothic"/>
-                <a:cs typeface="Yu Gothic"/>
-              </a:rPr>
-              <a:t>■ ① 検討する場・決める場・点検する場を分ける——実務の議論と経営の判断を同じ会議に混ぜない</a:t>
-            </a:r>
-          </a:p>
-          <a:p>
-            <a:pPr algn="l">
-              <a:spcAft>
-                <a:spcPts val="600"/>
-              </a:spcAft>
-            </a:pPr>
-            <a:r>
-              <a:rPr sz="1150" b="0" i="0">
-                <a:solidFill>
-                  <a:srgbClr val="262630"/>
-                </a:solidFill>
-                <a:latin typeface="Yu Gothic"/>
-                <a:ea typeface="Yu Gothic"/>
-                <a:cs typeface="Yu Gothic"/>
-              </a:rPr>
-              <a:t>■ ② 決められる人のところに、決めるべきことだけを上げる——細かい論点は現場で決め切り、経営判断が必要なものだけを絞って上げる</a:t>
-            </a:r>
-          </a:p>
-          <a:p>
-            <a:pPr algn="l">
-              <a:spcAft>
-                <a:spcPts val="600"/>
-              </a:spcAft>
-            </a:pPr>
-            <a:r>
-              <a:rPr sz="1150" b="0" i="0">
-                <a:solidFill>
-                  <a:srgbClr val="262630"/>
-                </a:solidFill>
-                <a:latin typeface="Yu Gothic"/>
-                <a:ea typeface="Yu Gothic"/>
-                <a:cs typeface="Yu Gothic"/>
-              </a:rPr>
-              <a:t>■ ③ 決めたことは台帳に記録し、次の会議で必ず「やったか」を確認する——言いっぱなし・聞きっぱなしをなくす</a:t>
-            </a:r>
-          </a:p>
-          <a:p>
-            <a:pPr algn="l">
-              <a:spcAft>
-                <a:spcPts val="300"/>
-              </a:spcAft>
-            </a:pPr>
-            <a:r>
-              <a:rPr sz="1000" b="0" i="0">
-                <a:solidFill>
-                  <a:srgbClr val="8A8A99"/>
-                </a:solidFill>
-                <a:latin typeface="Yu Gothic"/>
-                <a:ea typeface="Yu Gothic"/>
-                <a:cs typeface="Yu Gothic"/>
-              </a:rPr>
-              <a:t>※ 資料の作り込みは原則禁止（Wordのメモで運営）。会議のための資料作成に時間を使わないことも、この仕組みの柱です</a:t>
-            </a:r>
-          </a:p>
-        </p:txBody>
-      </p:sp>
-      <p:sp>
-        <p:nvSpPr>
-          <p:cNvPr id="7" name="Rectangle 6"/>
+              <a:rPr sz="2000" b="1" i="0">
+                <a:solidFill>
+                  <a:srgbClr val="7823DC"/>
+                </a:solidFill>
+                <a:latin typeface="Yu Gothic"/>
+                <a:ea typeface="Yu Gothic"/>
+                <a:cs typeface="Yu Gothic"/>
+              </a:rPr>
+              <a:t>「検討する場」「決める場」「点検する場」をはっきり分けます。</a:t>
+            </a:r>
+          </a:p>
+        </p:txBody>
+      </p:sp>
+      <p:sp>
+        <p:nvSpPr>
+          <p:cNvPr id="6" name="Rectangle 5"/>
           <p:cNvSpPr/>
           <p:nvPr/>
         </p:nvSpPr>
         <p:spPr>
           <a:xfrm>
-            <a:off x="502920" y="5870448"/>
-            <a:ext cx="11183112" cy="566928"/>
+            <a:off x="502920" y="5577840"/>
+            <a:ext cx="11183112" cy="640080"/>
           </a:xfrm>
           <a:prstGeom prst="rect">
             <a:avLst/>
@@ -3741,14 +3663,14 @@
       </p:sp>
       <p:sp>
         <p:nvSpPr>
-          <p:cNvPr id="8" name="Rectangle 7"/>
+          <p:cNvPr id="7" name="Rectangle 6"/>
           <p:cNvSpPr/>
           <p:nvPr/>
         </p:nvSpPr>
         <p:spPr>
           <a:xfrm>
-            <a:off x="502920" y="5870448"/>
-            <a:ext cx="38100" cy="566928"/>
+            <a:off x="502920" y="5577840"/>
+            <a:ext cx="38100" cy="640080"/>
           </a:xfrm>
           <a:prstGeom prst="rect">
             <a:avLst/>
@@ -3785,14 +3707,14 @@
       </p:sp>
       <p:sp>
         <p:nvSpPr>
-          <p:cNvPr id="9" name="TextBox 8"/>
+          <p:cNvPr id="8" name="TextBox 7"/>
           <p:cNvSpPr txBox="1"/>
           <p:nvPr/>
         </p:nvSpPr>
         <p:spPr>
           <a:xfrm>
-            <a:off x="685800" y="5934456"/>
-            <a:ext cx="10881360" cy="457200"/>
+            <a:off x="731520" y="5577840"/>
+            <a:ext cx="10789920" cy="640080"/>
           </a:xfrm>
           <a:prstGeom prst="rect">
             <a:avLst/>
@@ -3807,22 +3729,11 @@
           <a:p>
             <a:pPr algn="l">
               <a:spcAft>
-                <a:spcPts val="400"/>
-              </a:spcAft>
-            </a:pPr>
-            <a:r>
-              <a:rPr sz="1000" b="1" i="0">
-                <a:solidFill>
-                  <a:srgbClr val="7823DC"/>
-                </a:solidFill>
-                <a:latin typeface="Yu Gothic"/>
-                <a:ea typeface="Yu Gothic"/>
-                <a:cs typeface="Yu Gothic"/>
-              </a:rPr>
-              <a:t>ここだけ覚えて帰ってください　</a:t>
-            </a:r>
-            <a:r>
-              <a:rPr sz="1000" b="0" i="0">
+                <a:spcPts val="200"/>
+              </a:spcAft>
+            </a:pPr>
+            <a:r>
+              <a:rPr sz="1200" b="1" i="0">
                 <a:solidFill>
                   <a:srgbClr val="262630"/>
                 </a:solidFill>
@@ -3830,58 +3741,14 @@
                 <a:ea typeface="Yu Gothic"/>
                 <a:cs typeface="Yu Gothic"/>
               </a:rPr>
-              <a:t>新しい会議は「報告の場」ではなく「決める場」。この一点がすべての土台です</a:t>
-            </a:r>
-          </a:p>
-        </p:txBody>
-      </p:sp>
-      <p:sp>
-        <p:nvSpPr>
-          <p:cNvPr id="10" name="Rectangle 9"/>
-          <p:cNvSpPr/>
-          <p:nvPr/>
-        </p:nvSpPr>
-        <p:spPr>
-          <a:xfrm>
-            <a:off x="502920" y="6510528"/>
-            <a:ext cx="11183112" cy="15240"/>
-          </a:xfrm>
-          <a:prstGeom prst="rect">
-            <a:avLst/>
-          </a:prstGeom>
-          <a:solidFill>
-            <a:srgbClr val="D9D9E0"/>
-          </a:solidFill>
-          <a:ln>
-            <a:noFill/>
-          </a:ln>
-          <a:effectLst/>
-        </p:spPr>
-        <p:style>
-          <a:lnRef idx="1">
-            <a:schemeClr val="accent1"/>
-          </a:lnRef>
-          <a:fillRef idx="3">
-            <a:schemeClr val="accent1"/>
-          </a:fillRef>
-          <a:effectRef idx="2">
-            <a:schemeClr val="accent1"/>
-          </a:effectRef>
-          <a:fontRef idx="minor">
-            <a:schemeClr val="lt1"/>
-          </a:fontRef>
-        </p:style>
-        <p:txBody>
-          <a:bodyPr rtlCol="0" anchor="ctr"/>
-          <a:lstStyle/>
-          <a:p>
-            <a:pPr algn="ctr"/>
-          </a:p>
-        </p:txBody>
-      </p:sp>
-      <p:sp>
-        <p:nvSpPr>
-          <p:cNvPr id="11" name="TextBox 10"/>
+              <a:t>先に約束：会議は増やしません。重なる会議は統合します（最後のページで説明）</a:t>
+            </a:r>
+          </a:p>
+        </p:txBody>
+      </p:sp>
+      <p:sp>
+        <p:nvSpPr>
+          <p:cNvPr id="9" name="TextBox 8"/>
           <p:cNvSpPr txBox="1"/>
           <p:nvPr/>
         </p:nvSpPr>
@@ -3915,14 +3782,14 @@
                 <a:ea typeface="Yu Gothic"/>
                 <a:cs typeface="Yu Gothic"/>
               </a:rPr>
-              <a:t>円谷プロダクション｜構造改革の新しい会議の仕組み 部長会共有資料（社外秘）</a:t>
-            </a:r>
-          </a:p>
-        </p:txBody>
-      </p:sp>
-      <p:sp>
-        <p:nvSpPr>
-          <p:cNvPr id="12" name="TextBox 11"/>
+              <a:t>円谷プロダクション｜新しい会議の仕組み（部長会・社外秘）</a:t>
+            </a:r>
+          </a:p>
+        </p:txBody>
+      </p:sp>
+      <p:sp>
+        <p:nvSpPr>
+          <p:cNvPr id="10" name="TextBox 9"/>
           <p:cNvSpPr txBox="1"/>
           <p:nvPr/>
         </p:nvSpPr>
@@ -3987,8 +3854,8 @@
         </p:nvSpPr>
         <p:spPr>
           <a:xfrm>
-            <a:off x="502920" y="256032"/>
-            <a:ext cx="11155680" cy="256032"/>
+            <a:off x="502920" y="320040"/>
+            <a:ext cx="11155680" cy="274320"/>
           </a:xfrm>
           <a:prstGeom prst="rect">
             <a:avLst/>
@@ -4007,7 +3874,7 @@
               </a:spcAft>
             </a:pPr>
             <a:r>
-              <a:rPr sz="1000" b="1" i="0">
+              <a:rPr sz="1100" b="1" i="0">
                 <a:solidFill>
                   <a:srgbClr val="7823DC"/>
                 </a:solidFill>
@@ -4015,7 +3882,7 @@
                 <a:ea typeface="Yu Gothic"/>
                 <a:cs typeface="Yu Gothic"/>
               </a:rPr>
-              <a:t>全体像（4分）</a:t>
+              <a:t>絵①</a:t>
             </a:r>
           </a:p>
         </p:txBody>
@@ -4028,8 +3895,8 @@
         </p:nvSpPr>
         <p:spPr>
           <a:xfrm>
-            <a:off x="502920" y="512064"/>
-            <a:ext cx="11155680" cy="868680"/>
+            <a:off x="502920" y="621792"/>
+            <a:ext cx="11155680" cy="685800"/>
           </a:xfrm>
           <a:prstGeom prst="rect">
             <a:avLst/>
@@ -4044,11 +3911,11 @@
           <a:p>
             <a:pPr algn="l">
               <a:spcAft>
-                <a:spcPts val="0"/>
-              </a:spcAft>
-            </a:pPr>
-            <a:r>
-              <a:rPr sz="1900" b="1" i="0">
+                <a:spcPts val="400"/>
+              </a:spcAft>
+            </a:pPr>
+            <a:r>
+              <a:rPr sz="2400" b="1" i="0">
                 <a:solidFill>
                   <a:srgbClr val="262630"/>
                 </a:solidFill>
@@ -4056,7 +3923,7 @@
                 <a:ea typeface="Yu Gothic"/>
                 <a:cs typeface="Yu Gothic"/>
               </a:rPr>
-              <a:t>会議は4種類——毎日の事務局会議から、会長が判断する点検会議まで</a:t>
+              <a:t>会議は4つ——下で検討し、上で決める</a:t>
             </a:r>
           </a:p>
         </p:txBody>
@@ -4069,8 +3936,8 @@
         </p:nvSpPr>
         <p:spPr>
           <a:xfrm>
-            <a:off x="502920" y="1389888"/>
-            <a:ext cx="1463040" cy="33020"/>
+            <a:off x="502920" y="1371600"/>
+            <a:ext cx="1645920" cy="38100"/>
           </a:xfrm>
           <a:prstGeom prst="rect">
             <a:avLst/>
@@ -4107,14 +3974,58 @@
       </p:sp>
       <p:sp>
         <p:nvSpPr>
-          <p:cNvPr id="5" name="TextBox 4"/>
+          <p:cNvPr id="5" name="Rounded Rectangle 4"/>
+          <p:cNvSpPr/>
+          <p:nvPr/>
+        </p:nvSpPr>
+        <p:spPr>
+          <a:xfrm>
+            <a:off x="1920240" y="1783080"/>
+            <a:ext cx="6949440" cy="914400"/>
+          </a:xfrm>
+          <a:prstGeom prst="roundRect">
+            <a:avLst/>
+          </a:prstGeom>
+          <a:solidFill>
+            <a:srgbClr val="3A106E"/>
+          </a:solidFill>
+          <a:ln>
+            <a:noFill/>
+          </a:ln>
+          <a:effectLst/>
+        </p:spPr>
+        <p:style>
+          <a:lnRef idx="1">
+            <a:schemeClr val="accent1"/>
+          </a:lnRef>
+          <a:fillRef idx="3">
+            <a:schemeClr val="accent1"/>
+          </a:fillRef>
+          <a:effectRef idx="2">
+            <a:schemeClr val="accent1"/>
+          </a:effectRef>
+          <a:fontRef idx="minor">
+            <a:schemeClr val="lt1"/>
+          </a:fontRef>
+        </p:style>
+        <p:txBody>
+          <a:bodyPr rtlCol="0" anchor="ctr"/>
+          <a:lstStyle/>
+          <a:p>
+            <a:pPr algn="ctr"/>
+          </a:p>
+        </p:txBody>
+      </p:sp>
+      <p:sp>
+        <p:nvSpPr>
+          <p:cNvPr id="6" name="TextBox 5"/>
           <p:cNvSpPr txBox="1"/>
           <p:nvPr/>
         </p:nvSpPr>
         <p:spPr>
           <a:xfrm>
-            <a:off x="502920" y="1517904"/>
-            <a:ext cx="11155680" cy="310896"/>
+            <a:off x="1920240" y="1783080"/>
+            <a:ext cx="6949440" cy="914400"/>
           </a:xfrm>
           <a:prstGeom prst="rect">
             <a:avLst/>
@@ -4122,804 +4033,102 @@
           <a:noFill/>
         </p:spPr>
         <p:txBody>
-          <a:bodyPr wrap="square" lIns="0" rIns="0" tIns="0" bIns="0">
+          <a:bodyPr wrap="square" lIns="0" rIns="0" tIns="0" bIns="0" anchor="ctr">
             <a:spAutoFit/>
           </a:bodyPr>
           <a:lstStyle/>
           <a:p>
-            <a:pPr algn="l">
-              <a:spcAft>
-                <a:spcPts val="400"/>
-              </a:spcAft>
-            </a:pPr>
-            <a:r>
-              <a:rPr sz="1150" b="1" i="0">
-                <a:solidFill>
-                  <a:srgbClr val="3A106E"/>
-                </a:solidFill>
-                <a:latin typeface="Yu Gothic"/>
-                <a:ea typeface="Yu Gothic"/>
-                <a:cs typeface="Yu Gothic"/>
-              </a:rPr>
-              <a:t>流れ：分科会（週次）を2回 → 戦略会議（隔週）→ 点検会議（隔週）。この1周を2週間で回します</a:t>
-            </a:r>
-          </a:p>
-        </p:txBody>
-      </p:sp>
-      <p:graphicFrame>
-        <p:nvGraphicFramePr>
-          <p:cNvPr id="6" name="Table 5"/>
-          <p:cNvGraphicFramePr>
-            <a:graphicFrameLocks noGrp="1"/>
-          </p:cNvGraphicFramePr>
-          <p:nvPr/>
-        </p:nvGraphicFramePr>
-        <p:xfrm>
-          <a:off x="502920" y="1901952"/>
-          <a:ext cx="11183109" cy="2834640"/>
-        </p:xfrm>
-        <a:graphic>
-          <a:graphicData uri="http://schemas.openxmlformats.org/drawingml/2006/table">
-            <a:tbl>
-              <a:tblPr firstRow="1" bandRow="1">
-                <a:tableStyleId>{5C22544A-7EE6-4342-B048-85BDC9FD1C3A}</a:tableStyleId>
-              </a:tblPr>
-              <a:tblGrid>
-                <a:gridCol w="1837225"/>
-                <a:gridCol w="3674451"/>
-                <a:gridCol w="1038431"/>
-                <a:gridCol w="2556139"/>
-                <a:gridCol w="2076863"/>
-              </a:tblGrid>
-              <a:tr h="566928">
-                <a:tc>
-                  <a:txBody>
-                    <a:bodyPr wrap="square"/>
-                    <a:lstStyle/>
-                    <a:p>
-                      <a:pPr algn="l">
-                        <a:spcAft>
-                          <a:spcPts val="0"/>
-                        </a:spcAft>
-                      </a:pPr>
-                      <a:r>
-                        <a:rPr sz="950" b="1" i="0">
-                          <a:solidFill>
-                            <a:srgbClr val="FFFFFF"/>
-                          </a:solidFill>
-                          <a:latin typeface="Yu Gothic"/>
-                          <a:ea typeface="Yu Gothic"/>
-                          <a:cs typeface="Yu Gothic"/>
-                        </a:rPr>
-                        <a:t>会議の名前</a:t>
-                      </a:r>
-                    </a:p>
-                  </a:txBody>
-                  <a:tcPr marL="54864" marR="54864" marT="18288" marB="18288" anchor="ctr">
-                    <a:solidFill>
-                      <a:srgbClr val="3A106E"/>
-                    </a:solidFill>
-                  </a:tcPr>
-                </a:tc>
-                <a:tc>
-                  <a:txBody>
-                    <a:bodyPr wrap="square"/>
-                    <a:lstStyle/>
-                    <a:p>
-                      <a:pPr algn="l">
-                        <a:spcAft>
-                          <a:spcPts val="0"/>
-                        </a:spcAft>
-                      </a:pPr>
-                      <a:r>
-                        <a:rPr sz="950" b="1" i="0">
-                          <a:solidFill>
-                            <a:srgbClr val="FFFFFF"/>
-                          </a:solidFill>
-                          <a:latin typeface="Yu Gothic"/>
-                          <a:ea typeface="Yu Gothic"/>
-                          <a:cs typeface="Yu Gothic"/>
-                        </a:rPr>
-                        <a:t>ひとことで言うと</a:t>
-                      </a:r>
-                    </a:p>
-                  </a:txBody>
-                  <a:tcPr marL="54864" marR="54864" marT="18288" marB="18288" anchor="ctr">
-                    <a:solidFill>
-                      <a:srgbClr val="3A106E"/>
-                    </a:solidFill>
-                  </a:tcPr>
-                </a:tc>
-                <a:tc>
-                  <a:txBody>
-                    <a:bodyPr wrap="square"/>
-                    <a:lstStyle/>
-                    <a:p>
-                      <a:pPr algn="l">
-                        <a:spcAft>
-                          <a:spcPts val="0"/>
-                        </a:spcAft>
-                      </a:pPr>
-                      <a:r>
-                        <a:rPr sz="950" b="1" i="0">
-                          <a:solidFill>
-                            <a:srgbClr val="FFFFFF"/>
-                          </a:solidFill>
-                          <a:latin typeface="Yu Gothic"/>
-                          <a:ea typeface="Yu Gothic"/>
-                          <a:cs typeface="Yu Gothic"/>
-                        </a:rPr>
-                        <a:t>頻度</a:t>
-                      </a:r>
-                    </a:p>
-                  </a:txBody>
-                  <a:tcPr marL="54864" marR="54864" marT="18288" marB="18288" anchor="ctr">
-                    <a:solidFill>
-                      <a:srgbClr val="3A106E"/>
-                    </a:solidFill>
-                  </a:tcPr>
-                </a:tc>
-                <a:tc>
-                  <a:txBody>
-                    <a:bodyPr wrap="square"/>
-                    <a:lstStyle/>
-                    <a:p>
-                      <a:pPr algn="l">
-                        <a:spcAft>
-                          <a:spcPts val="0"/>
-                        </a:spcAft>
-                      </a:pPr>
-                      <a:r>
-                        <a:rPr sz="950" b="1" i="0">
-                          <a:solidFill>
-                            <a:srgbClr val="FFFFFF"/>
-                          </a:solidFill>
-                          <a:latin typeface="Yu Gothic"/>
-                          <a:ea typeface="Yu Gothic"/>
-                          <a:cs typeface="Yu Gothic"/>
-                        </a:rPr>
-                        <a:t>主な出席者</a:t>
-                      </a:r>
-                    </a:p>
-                  </a:txBody>
-                  <a:tcPr marL="54864" marR="54864" marT="18288" marB="18288" anchor="ctr">
-                    <a:solidFill>
-                      <a:srgbClr val="3A106E"/>
-                    </a:solidFill>
-                  </a:tcPr>
-                </a:tc>
-                <a:tc>
-                  <a:txBody>
-                    <a:bodyPr wrap="square"/>
-                    <a:lstStyle/>
-                    <a:p>
-                      <a:pPr algn="l">
-                        <a:spcAft>
-                          <a:spcPts val="0"/>
-                        </a:spcAft>
-                      </a:pPr>
-                      <a:r>
-                        <a:rPr sz="950" b="1" i="0">
-                          <a:solidFill>
-                            <a:srgbClr val="FFFFFF"/>
-                          </a:solidFill>
-                          <a:latin typeface="Yu Gothic"/>
-                          <a:ea typeface="Yu Gothic"/>
-                          <a:cs typeface="Yu Gothic"/>
-                        </a:rPr>
-                        <a:t>決めることの大きさ</a:t>
-                      </a:r>
-                    </a:p>
-                  </a:txBody>
-                  <a:tcPr marL="54864" marR="54864" marT="18288" marB="18288" anchor="ctr">
-                    <a:solidFill>
-                      <a:srgbClr val="3A106E"/>
-                    </a:solidFill>
-                  </a:tcPr>
-                </a:tc>
-              </a:tr>
-              <a:tr h="566928">
-                <a:tc>
-                  <a:txBody>
-                    <a:bodyPr wrap="square"/>
-                    <a:lstStyle/>
-                    <a:p>
-                      <a:pPr algn="l">
-                        <a:spcAft>
-                          <a:spcPts val="100"/>
-                        </a:spcAft>
-                      </a:pPr>
-                      <a:r>
-                        <a:rPr sz="900" b="1" i="0">
-                          <a:solidFill>
-                            <a:srgbClr val="3A106E"/>
-                          </a:solidFill>
-                          <a:latin typeface="Yu Gothic"/>
-                          <a:ea typeface="Yu Gothic"/>
-                          <a:cs typeface="Yu Gothic"/>
-                        </a:rPr>
-                        <a:t>分科会（3つ）</a:t>
-                      </a:r>
-                    </a:p>
-                  </a:txBody>
-                  <a:tcPr marL="54864" marR="54864" marT="18288" marB="18288" anchor="ctr">
-                    <a:solidFill>
-                      <a:srgbClr val="FFFFFF"/>
-                    </a:solidFill>
-                  </a:tcPr>
-                </a:tc>
-                <a:tc>
-                  <a:txBody>
-                    <a:bodyPr wrap="square"/>
-                    <a:lstStyle/>
-                    <a:p>
-                      <a:pPr algn="l">
-                        <a:spcAft>
-                          <a:spcPts val="100"/>
-                        </a:spcAft>
-                      </a:pPr>
-                      <a:r>
-                        <a:rPr sz="900" b="0" i="0">
-                          <a:solidFill>
-                            <a:srgbClr val="262630"/>
-                          </a:solidFill>
-                          <a:latin typeface="Yu Gothic"/>
-                          <a:ea typeface="Yu Gothic"/>
-                          <a:cs typeface="Yu Gothic"/>
-                        </a:rPr>
-                        <a:t>テーマごとに「何をやるか・どう実行するか」を具体的に検討する場</a:t>
-                      </a:r>
-                    </a:p>
-                  </a:txBody>
-                  <a:tcPr marL="54864" marR="54864" marT="18288" marB="18288" anchor="ctr">
-                    <a:solidFill>
-                      <a:srgbClr val="FFFFFF"/>
-                    </a:solidFill>
-                  </a:tcPr>
-                </a:tc>
-                <a:tc>
-                  <a:txBody>
-                    <a:bodyPr wrap="square"/>
-                    <a:lstStyle/>
-                    <a:p>
-                      <a:pPr algn="l">
-                        <a:spcAft>
-                          <a:spcPts val="100"/>
-                        </a:spcAft>
-                      </a:pPr>
-                      <a:r>
-                        <a:rPr sz="900" b="0" i="0">
-                          <a:solidFill>
-                            <a:srgbClr val="262630"/>
-                          </a:solidFill>
-                          <a:latin typeface="Yu Gothic"/>
-                          <a:ea typeface="Yu Gothic"/>
-                          <a:cs typeface="Yu Gothic"/>
-                        </a:rPr>
-                        <a:t>週1回</a:t>
-                      </a:r>
-                    </a:p>
-                  </a:txBody>
-                  <a:tcPr marL="54864" marR="54864" marT="18288" marB="18288" anchor="ctr">
-                    <a:solidFill>
-                      <a:srgbClr val="FFFFFF"/>
-                    </a:solidFill>
-                  </a:tcPr>
-                </a:tc>
-                <a:tc>
-                  <a:txBody>
-                    <a:bodyPr wrap="square"/>
-                    <a:lstStyle/>
-                    <a:p>
-                      <a:pPr algn="l">
-                        <a:spcAft>
-                          <a:spcPts val="100"/>
-                        </a:spcAft>
-                      </a:pPr>
-                      <a:r>
-                        <a:rPr sz="900" b="0" i="0">
-                          <a:solidFill>
-                            <a:srgbClr val="262630"/>
-                          </a:solidFill>
-                          <a:latin typeface="Yu Gothic"/>
-                          <a:ea typeface="Yu Gothic"/>
-                          <a:cs typeface="Yu Gothic"/>
-                        </a:rPr>
-                        <a:t>分科会リーダー＋関係する部長＋担当メンバー＋事務局</a:t>
-                      </a:r>
-                    </a:p>
-                  </a:txBody>
-                  <a:tcPr marL="54864" marR="54864" marT="18288" marB="18288" anchor="ctr">
-                    <a:solidFill>
-                      <a:srgbClr val="FFFFFF"/>
-                    </a:solidFill>
-                  </a:tcPr>
-                </a:tc>
-                <a:tc>
-                  <a:txBody>
-                    <a:bodyPr wrap="square"/>
-                    <a:lstStyle/>
-                    <a:p>
-                      <a:pPr algn="l">
-                        <a:spcAft>
-                          <a:spcPts val="100"/>
-                        </a:spcAft>
-                      </a:pPr>
-                      <a:r>
-                        <a:rPr sz="900" b="0" i="0">
-                          <a:solidFill>
-                            <a:srgbClr val="262630"/>
-                          </a:solidFill>
-                          <a:latin typeface="Yu Gothic"/>
-                          <a:ea typeface="Yu Gothic"/>
-                          <a:cs typeface="Yu Gothic"/>
-                        </a:rPr>
-                        <a:t>実務レベル（現場で決め切る）</a:t>
-                      </a:r>
-                    </a:p>
-                  </a:txBody>
-                  <a:tcPr marL="54864" marR="54864" marT="18288" marB="18288" anchor="ctr">
-                    <a:solidFill>
-                      <a:srgbClr val="FFFFFF"/>
-                    </a:solidFill>
-                  </a:tcPr>
-                </a:tc>
-              </a:tr>
-              <a:tr h="566928">
-                <a:tc>
-                  <a:txBody>
-                    <a:bodyPr wrap="square"/>
-                    <a:lstStyle/>
-                    <a:p>
-                      <a:pPr algn="l">
-                        <a:spcAft>
-                          <a:spcPts val="100"/>
-                        </a:spcAft>
-                      </a:pPr>
-                      <a:r>
-                        <a:rPr sz="900" b="1" i="0">
-                          <a:solidFill>
-                            <a:srgbClr val="3A106E"/>
-                          </a:solidFill>
-                          <a:latin typeface="Yu Gothic"/>
-                          <a:ea typeface="Yu Gothic"/>
-                          <a:cs typeface="Yu Gothic"/>
-                        </a:rPr>
-                        <a:t>戦略会議</a:t>
-                      </a:r>
-                    </a:p>
-                  </a:txBody>
-                  <a:tcPr marL="54864" marR="54864" marT="18288" marB="18288" anchor="ctr">
-                    <a:solidFill>
-                      <a:srgbClr val="F7F7F9"/>
-                    </a:solidFill>
-                  </a:tcPr>
-                </a:tc>
-                <a:tc>
-                  <a:txBody>
-                    <a:bodyPr wrap="square"/>
-                    <a:lstStyle/>
-                    <a:p>
-                      <a:pPr algn="l">
-                        <a:spcAft>
-                          <a:spcPts val="100"/>
-                        </a:spcAft>
-                      </a:pPr>
-                      <a:r>
-                        <a:rPr sz="900" b="0" i="0">
-                          <a:solidFill>
-                            <a:srgbClr val="262630"/>
-                          </a:solidFill>
-                          <a:latin typeface="Yu Gothic"/>
-                          <a:ea typeface="Yu Gothic"/>
-                          <a:cs typeface="Yu Gothic"/>
-                        </a:rPr>
-                        <a:t>全体が計画どおり進んでいるかを確かめ、人や時間の配分を決める場</a:t>
-                      </a:r>
-                    </a:p>
-                  </a:txBody>
-                  <a:tcPr marL="54864" marR="54864" marT="18288" marB="18288" anchor="ctr">
-                    <a:solidFill>
-                      <a:srgbClr val="F7F7F9"/>
-                    </a:solidFill>
-                  </a:tcPr>
-                </a:tc>
-                <a:tc>
-                  <a:txBody>
-                    <a:bodyPr wrap="square"/>
-                    <a:lstStyle/>
-                    <a:p>
-                      <a:pPr algn="l">
-                        <a:spcAft>
-                          <a:spcPts val="100"/>
-                        </a:spcAft>
-                      </a:pPr>
-                      <a:r>
-                        <a:rPr sz="900" b="0" i="0">
-                          <a:solidFill>
-                            <a:srgbClr val="262630"/>
-                          </a:solidFill>
-                          <a:latin typeface="Yu Gothic"/>
-                          <a:ea typeface="Yu Gothic"/>
-                          <a:cs typeface="Yu Gothic"/>
-                        </a:rPr>
-                        <a:t>2週に1回</a:t>
-                      </a:r>
-                    </a:p>
-                  </a:txBody>
-                  <a:tcPr marL="54864" marR="54864" marT="18288" marB="18288" anchor="ctr">
-                    <a:solidFill>
-                      <a:srgbClr val="F7F7F9"/>
-                    </a:solidFill>
-                  </a:tcPr>
-                </a:tc>
-                <a:tc>
-                  <a:txBody>
-                    <a:bodyPr wrap="square"/>
-                    <a:lstStyle/>
-                    <a:p>
-                      <a:pPr algn="l">
-                        <a:spcAft>
-                          <a:spcPts val="100"/>
-                        </a:spcAft>
-                      </a:pPr>
-                      <a:r>
-                        <a:rPr sz="900" b="0" i="0">
-                          <a:solidFill>
-                            <a:srgbClr val="262630"/>
-                          </a:solidFill>
-                          <a:latin typeface="Yu Gothic"/>
-                          <a:ea typeface="Yu Gothic"/>
-                          <a:cs typeface="Yu Gothic"/>
-                        </a:rPr>
-                        <a:t>永竹社長＋分科会リーダー＋事務局</a:t>
-                      </a:r>
-                    </a:p>
-                  </a:txBody>
-                  <a:tcPr marL="54864" marR="54864" marT="18288" marB="18288" anchor="ctr">
-                    <a:solidFill>
-                      <a:srgbClr val="F7F7F9"/>
-                    </a:solidFill>
-                  </a:tcPr>
-                </a:tc>
-                <a:tc>
-                  <a:txBody>
-                    <a:bodyPr wrap="square"/>
-                    <a:lstStyle/>
-                    <a:p>
-                      <a:pPr algn="l">
-                        <a:spcAft>
-                          <a:spcPts val="100"/>
-                        </a:spcAft>
-                      </a:pPr>
-                      <a:r>
-                        <a:rPr sz="900" b="0" i="0">
-                          <a:solidFill>
-                            <a:srgbClr val="262630"/>
-                          </a:solidFill>
-                          <a:latin typeface="Yu Gothic"/>
-                          <a:ea typeface="Yu Gothic"/>
-                          <a:cs typeface="Yu Gothic"/>
-                        </a:rPr>
-                        <a:t>経営の実務レベル（社長が決める）</a:t>
-                      </a:r>
-                    </a:p>
-                  </a:txBody>
-                  <a:tcPr marL="54864" marR="54864" marT="18288" marB="18288" anchor="ctr">
-                    <a:solidFill>
-                      <a:srgbClr val="F7F7F9"/>
-                    </a:solidFill>
-                  </a:tcPr>
-                </a:tc>
-              </a:tr>
-              <a:tr h="566928">
-                <a:tc>
-                  <a:txBody>
-                    <a:bodyPr wrap="square"/>
-                    <a:lstStyle/>
-                    <a:p>
-                      <a:pPr algn="l">
-                        <a:spcAft>
-                          <a:spcPts val="100"/>
-                        </a:spcAft>
-                      </a:pPr>
-                      <a:r>
-                        <a:rPr sz="900" b="1" i="0">
-                          <a:solidFill>
-                            <a:srgbClr val="3A106E"/>
-                          </a:solidFill>
-                          <a:latin typeface="Yu Gothic"/>
-                          <a:ea typeface="Yu Gothic"/>
-                          <a:cs typeface="Yu Gothic"/>
-                        </a:rPr>
-                        <a:t>点検会議</a:t>
-                      </a:r>
-                    </a:p>
-                  </a:txBody>
-                  <a:tcPr marL="54864" marR="54864" marT="18288" marB="18288" anchor="ctr">
-                    <a:solidFill>
-                      <a:srgbClr val="FFFFFF"/>
-                    </a:solidFill>
-                  </a:tcPr>
-                </a:tc>
-                <a:tc>
-                  <a:txBody>
-                    <a:bodyPr wrap="square"/>
-                    <a:lstStyle/>
-                    <a:p>
-                      <a:pPr algn="l">
-                        <a:spcAft>
-                          <a:spcPts val="100"/>
-                        </a:spcAft>
-                      </a:pPr>
-                      <a:r>
-                        <a:rPr sz="900" b="0" i="0">
-                          <a:solidFill>
-                            <a:srgbClr val="262630"/>
-                          </a:solidFill>
-                          <a:latin typeface="Yu Gothic"/>
-                          <a:ea typeface="Yu Gothic"/>
-                          <a:cs typeface="Yu Gothic"/>
-                        </a:rPr>
-                        <a:t>会長が改革の進み具合を点検し、重要なことを決める場</a:t>
-                      </a:r>
-                    </a:p>
-                  </a:txBody>
-                  <a:tcPr marL="54864" marR="54864" marT="18288" marB="18288" anchor="ctr">
-                    <a:solidFill>
-                      <a:srgbClr val="FFFFFF"/>
-                    </a:solidFill>
-                  </a:tcPr>
-                </a:tc>
-                <a:tc>
-                  <a:txBody>
-                    <a:bodyPr wrap="square"/>
-                    <a:lstStyle/>
-                    <a:p>
-                      <a:pPr algn="l">
-                        <a:spcAft>
-                          <a:spcPts val="100"/>
-                        </a:spcAft>
-                      </a:pPr>
-                      <a:r>
-                        <a:rPr sz="900" b="0" i="0">
-                          <a:solidFill>
-                            <a:srgbClr val="262630"/>
-                          </a:solidFill>
-                          <a:latin typeface="Yu Gothic"/>
-                          <a:ea typeface="Yu Gothic"/>
-                          <a:cs typeface="Yu Gothic"/>
-                        </a:rPr>
-                        <a:t>2週に1回</a:t>
-                      </a:r>
-                    </a:p>
-                  </a:txBody>
-                  <a:tcPr marL="54864" marR="54864" marT="18288" marB="18288" anchor="ctr">
-                    <a:solidFill>
-                      <a:srgbClr val="FFFFFF"/>
-                    </a:solidFill>
-                  </a:tcPr>
-                </a:tc>
-                <a:tc>
-                  <a:txBody>
-                    <a:bodyPr wrap="square"/>
-                    <a:lstStyle/>
-                    <a:p>
-                      <a:pPr algn="l">
-                        <a:spcAft>
-                          <a:spcPts val="100"/>
-                        </a:spcAft>
-                      </a:pPr>
-                      <a:r>
-                        <a:rPr sz="900" b="0" i="0">
-                          <a:solidFill>
-                            <a:srgbClr val="262630"/>
-                          </a:solidFill>
-                          <a:latin typeface="Yu Gothic"/>
-                          <a:ea typeface="Yu Gothic"/>
-                          <a:cs typeface="Yu Gothic"/>
-                        </a:rPr>
-                        <a:t>会長＋永竹社長＋分科会リーダー＋事務局</a:t>
-                      </a:r>
-                    </a:p>
-                  </a:txBody>
-                  <a:tcPr marL="54864" marR="54864" marT="18288" marB="18288" anchor="ctr">
-                    <a:solidFill>
-                      <a:srgbClr val="FFFFFF"/>
-                    </a:solidFill>
-                  </a:tcPr>
-                </a:tc>
-                <a:tc>
-                  <a:txBody>
-                    <a:bodyPr wrap="square"/>
-                    <a:lstStyle/>
-                    <a:p>
-                      <a:pPr algn="l">
-                        <a:spcAft>
-                          <a:spcPts val="100"/>
-                        </a:spcAft>
-                      </a:pPr>
-                      <a:r>
-                        <a:rPr sz="900" b="0" i="0">
-                          <a:solidFill>
-                            <a:srgbClr val="262630"/>
-                          </a:solidFill>
-                          <a:latin typeface="Yu Gothic"/>
-                          <a:ea typeface="Yu Gothic"/>
-                          <a:cs typeface="Yu Gothic"/>
-                        </a:rPr>
-                        <a:t>経営判断レベル（会長が決める）</a:t>
-                      </a:r>
-                    </a:p>
-                  </a:txBody>
-                  <a:tcPr marL="54864" marR="54864" marT="18288" marB="18288" anchor="ctr">
-                    <a:solidFill>
-                      <a:srgbClr val="FFFFFF"/>
-                    </a:solidFill>
-                  </a:tcPr>
-                </a:tc>
-              </a:tr>
-              <a:tr h="566928">
-                <a:tc>
-                  <a:txBody>
-                    <a:bodyPr wrap="square"/>
-                    <a:lstStyle/>
-                    <a:p>
-                      <a:pPr algn="l">
-                        <a:spcAft>
-                          <a:spcPts val="100"/>
-                        </a:spcAft>
-                      </a:pPr>
-                      <a:r>
-                        <a:rPr sz="900" b="1" i="0">
-                          <a:solidFill>
-                            <a:srgbClr val="3A106E"/>
-                          </a:solidFill>
-                          <a:latin typeface="Yu Gothic"/>
-                          <a:ea typeface="Yu Gothic"/>
-                          <a:cs typeface="Yu Gothic"/>
-                        </a:rPr>
-                        <a:t>事務局会議（PMO会議）</a:t>
-                      </a:r>
-                    </a:p>
-                  </a:txBody>
-                  <a:tcPr marL="54864" marR="54864" marT="18288" marB="18288" anchor="ctr">
-                    <a:solidFill>
-                      <a:srgbClr val="F7F7F9"/>
-                    </a:solidFill>
-                  </a:tcPr>
-                </a:tc>
-                <a:tc>
-                  <a:txBody>
-                    <a:bodyPr wrap="square"/>
-                    <a:lstStyle/>
-                    <a:p>
-                      <a:pPr algn="l">
-                        <a:spcAft>
-                          <a:spcPts val="100"/>
-                        </a:spcAft>
-                      </a:pPr>
-                      <a:r>
-                        <a:rPr sz="900" b="0" i="0">
-                          <a:solidFill>
-                            <a:srgbClr val="262630"/>
-                          </a:solidFill>
-                          <a:latin typeface="Yu Gothic"/>
-                          <a:ea typeface="Yu Gothic"/>
-                          <a:cs typeface="Yu Gothic"/>
-                        </a:rPr>
-                        <a:t>事務局チーム（PMO）が毎朝、進捗の確認と各会議の準備をする場</a:t>
-                      </a:r>
-                    </a:p>
-                  </a:txBody>
-                  <a:tcPr marL="54864" marR="54864" marT="18288" marB="18288" anchor="ctr">
-                    <a:solidFill>
-                      <a:srgbClr val="F7F7F9"/>
-                    </a:solidFill>
-                  </a:tcPr>
-                </a:tc>
-                <a:tc>
-                  <a:txBody>
-                    <a:bodyPr wrap="square"/>
-                    <a:lstStyle/>
-                    <a:p>
-                      <a:pPr algn="l">
-                        <a:spcAft>
-                          <a:spcPts val="100"/>
-                        </a:spcAft>
-                      </a:pPr>
-                      <a:r>
-                        <a:rPr sz="900" b="0" i="0">
-                          <a:solidFill>
-                            <a:srgbClr val="262630"/>
-                          </a:solidFill>
-                          <a:latin typeface="Yu Gothic"/>
-                          <a:ea typeface="Yu Gothic"/>
-                          <a:cs typeface="Yu Gothic"/>
-                        </a:rPr>
-                        <a:t>毎日30分</a:t>
-                      </a:r>
-                    </a:p>
-                  </a:txBody>
-                  <a:tcPr marL="54864" marR="54864" marT="18288" marB="18288" anchor="ctr">
-                    <a:solidFill>
-                      <a:srgbClr val="F7F7F9"/>
-                    </a:solidFill>
-                  </a:tcPr>
-                </a:tc>
-                <a:tc>
-                  <a:txBody>
-                    <a:bodyPr wrap="square"/>
-                    <a:lstStyle/>
-                    <a:p>
-                      <a:pPr algn="l">
-                        <a:spcAft>
-                          <a:spcPts val="100"/>
-                        </a:spcAft>
-                      </a:pPr>
-                      <a:r>
-                        <a:rPr sz="900" b="0" i="0">
-                          <a:solidFill>
-                            <a:srgbClr val="262630"/>
-                          </a:solidFill>
-                          <a:latin typeface="Yu Gothic"/>
-                          <a:ea typeface="Yu Gothic"/>
-                          <a:cs typeface="Yu Gothic"/>
-                        </a:rPr>
-                        <a:t>事務局チームのみ</a:t>
-                      </a:r>
-                    </a:p>
-                  </a:txBody>
-                  <a:tcPr marL="54864" marR="54864" marT="18288" marB="18288" anchor="ctr">
-                    <a:solidFill>
-                      <a:srgbClr val="F7F7F9"/>
-                    </a:solidFill>
-                  </a:tcPr>
-                </a:tc>
-                <a:tc>
-                  <a:txBody>
-                    <a:bodyPr wrap="square"/>
-                    <a:lstStyle/>
-                    <a:p>
-                      <a:pPr algn="l">
-                        <a:spcAft>
-                          <a:spcPts val="100"/>
-                        </a:spcAft>
-                      </a:pPr>
-                      <a:r>
-                        <a:rPr sz="900" b="0" i="0">
-                          <a:solidFill>
-                            <a:srgbClr val="262630"/>
-                          </a:solidFill>
-                          <a:latin typeface="Yu Gothic"/>
-                          <a:ea typeface="Yu Gothic"/>
-                          <a:cs typeface="Yu Gothic"/>
-                        </a:rPr>
-                        <a:t>運営レベル</a:t>
-                      </a:r>
-                    </a:p>
-                  </a:txBody>
-                  <a:tcPr marL="54864" marR="54864" marT="18288" marB="18288" anchor="ctr">
-                    <a:solidFill>
-                      <a:srgbClr val="F7F7F9"/>
-                    </a:solidFill>
-                  </a:tcPr>
-                </a:tc>
-              </a:tr>
-            </a:tbl>
-          </a:graphicData>
-        </a:graphic>
-      </p:graphicFrame>
-      <p:sp>
-        <p:nvSpPr>
-          <p:cNvPr id="7" name="TextBox 6"/>
+            <a:pPr algn="ctr">
+              <a:spcAft>
+                <a:spcPts val="200"/>
+              </a:spcAft>
+            </a:pPr>
+            <a:r>
+              <a:rPr sz="1700" b="1" i="0">
+                <a:solidFill>
+                  <a:srgbClr val="FFFFFF"/>
+                </a:solidFill>
+                <a:latin typeface="Yu Gothic"/>
+                <a:ea typeface="Yu Gothic"/>
+                <a:cs typeface="Yu Gothic"/>
+              </a:rPr>
+              <a:t>点検会議（会長）</a:t>
+            </a:r>
+          </a:p>
+          <a:p>
+            <a:pPr algn="ctr">
+              <a:spcAft>
+                <a:spcPts val="200"/>
+              </a:spcAft>
+            </a:pPr>
+            <a:r>
+              <a:rPr sz="1150" b="0" i="0">
+                <a:solidFill>
+                  <a:srgbClr val="FFFFFF"/>
+                </a:solidFill>
+                <a:latin typeface="Yu Gothic"/>
+                <a:ea typeface="Yu Gothic"/>
+                <a:cs typeface="Yu Gothic"/>
+              </a:rPr>
+              <a:t>会社として大事なことを決める　◇ 2週に1回・60分</a:t>
+            </a:r>
+          </a:p>
+        </p:txBody>
+      </p:sp>
+      <p:sp>
+        <p:nvSpPr>
+          <p:cNvPr id="7" name="Rounded Rectangle 6"/>
+          <p:cNvSpPr/>
+          <p:nvPr/>
+        </p:nvSpPr>
+        <p:spPr>
+          <a:xfrm>
+            <a:off x="1920240" y="2880360"/>
+            <a:ext cx="6949440" cy="914400"/>
+          </a:xfrm>
+          <a:prstGeom prst="roundRect">
+            <a:avLst/>
+          </a:prstGeom>
+          <a:solidFill>
+            <a:srgbClr val="7823DC"/>
+          </a:solidFill>
+          <a:ln>
+            <a:noFill/>
+          </a:ln>
+          <a:effectLst/>
+        </p:spPr>
+        <p:style>
+          <a:lnRef idx="1">
+            <a:schemeClr val="accent1"/>
+          </a:lnRef>
+          <a:fillRef idx="3">
+            <a:schemeClr val="accent1"/>
+          </a:fillRef>
+          <a:effectRef idx="2">
+            <a:schemeClr val="accent1"/>
+          </a:effectRef>
+          <a:fontRef idx="minor">
+            <a:schemeClr val="lt1"/>
+          </a:fontRef>
+        </p:style>
+        <p:txBody>
+          <a:bodyPr rtlCol="0" anchor="ctr"/>
+          <a:lstStyle/>
+          <a:p>
+            <a:pPr algn="ctr"/>
+          </a:p>
+        </p:txBody>
+      </p:sp>
+      <p:sp>
+        <p:nvSpPr>
+          <p:cNvPr id="8" name="TextBox 7"/>
           <p:cNvSpPr txBox="1"/>
           <p:nvPr/>
         </p:nvSpPr>
         <p:spPr>
           <a:xfrm>
-            <a:off x="502920" y="4617720"/>
-            <a:ext cx="11155680" cy="1097280"/>
+            <a:off x="1920240" y="2880360"/>
+            <a:ext cx="6949440" cy="914400"/>
           </a:xfrm>
           <a:prstGeom prst="rect">
             <a:avLst/>
@@ -4927,60 +4136,60 @@
           <a:noFill/>
         </p:spPr>
         <p:txBody>
-          <a:bodyPr wrap="square" lIns="0" rIns="0" tIns="0" bIns="0">
+          <a:bodyPr wrap="square" lIns="0" rIns="0" tIns="0" bIns="0" anchor="ctr">
             <a:spAutoFit/>
           </a:bodyPr>
           <a:lstStyle/>
           <a:p>
-            <a:pPr algn="l">
-              <a:spcAft>
-                <a:spcPts val="400"/>
-              </a:spcAft>
-            </a:pPr>
-            <a:r>
-              <a:rPr sz="1200" b="1" i="0">
-                <a:solidFill>
-                  <a:srgbClr val="3A106E"/>
-                </a:solidFill>
-                <a:latin typeface="Yu Gothic"/>
-                <a:ea typeface="Yu Gothic"/>
-                <a:cs typeface="Yu Gothic"/>
-              </a:rPr>
-              <a:t>2週間の基本サイクル</a:t>
-            </a:r>
-          </a:p>
-          <a:p>
-            <a:pPr algn="l">
-              <a:spcAft>
-                <a:spcPts val="400"/>
-              </a:spcAft>
-            </a:pPr>
-            <a:r>
-              <a:rPr sz="1100" b="0" i="0">
-                <a:solidFill>
-                  <a:srgbClr val="262630"/>
-                </a:solidFill>
-                <a:latin typeface="Yu Gothic"/>
-                <a:ea typeface="Yu Gothic"/>
-                <a:cs typeface="Yu Gothic"/>
-              </a:rPr>
-              <a:t>毎朝：事務局会議　→　毎週：3つの分科会　→　隔週：戦略会議　→　その翌週：点検会議　→（決まったことが分科会に戻り、次の2週間へ）</a:t>
-            </a:r>
-          </a:p>
-        </p:txBody>
-      </p:sp>
-      <p:sp>
-        <p:nvSpPr>
-          <p:cNvPr id="8" name="Rectangle 7"/>
+            <a:pPr algn="ctr">
+              <a:spcAft>
+                <a:spcPts val="200"/>
+              </a:spcAft>
+            </a:pPr>
+            <a:r>
+              <a:rPr sz="1700" b="1" i="0">
+                <a:solidFill>
+                  <a:srgbClr val="FFFFFF"/>
+                </a:solidFill>
+                <a:latin typeface="Yu Gothic"/>
+                <a:ea typeface="Yu Gothic"/>
+                <a:cs typeface="Yu Gothic"/>
+              </a:rPr>
+              <a:t>戦略会議（永竹社長）</a:t>
+            </a:r>
+          </a:p>
+          <a:p>
+            <a:pPr algn="ctr">
+              <a:spcAft>
+                <a:spcPts val="200"/>
+              </a:spcAft>
+            </a:pPr>
+            <a:r>
+              <a:rPr sz="1150" b="0" i="0">
+                <a:solidFill>
+                  <a:srgbClr val="FFFFFF"/>
+                </a:solidFill>
+                <a:latin typeface="Yu Gothic"/>
+                <a:ea typeface="Yu Gothic"/>
+                <a:cs typeface="Yu Gothic"/>
+              </a:rPr>
+              <a:t>進み具合を確かめ、人と時間の配分を決める　◇ 2週に1回</a:t>
+            </a:r>
+          </a:p>
+        </p:txBody>
+      </p:sp>
+      <p:sp>
+        <p:nvSpPr>
+          <p:cNvPr id="9" name="Rounded Rectangle 8"/>
           <p:cNvSpPr/>
           <p:nvPr/>
         </p:nvSpPr>
         <p:spPr>
           <a:xfrm>
-            <a:off x="502920" y="5870448"/>
-            <a:ext cx="11183112" cy="566928"/>
-          </a:xfrm>
-          <a:prstGeom prst="rect">
+            <a:off x="1920240" y="3977639"/>
+            <a:ext cx="6949440" cy="1600200"/>
+          </a:xfrm>
+          <a:prstGeom prst="roundRect">
             <a:avLst/>
           </a:prstGeom>
           <a:solidFill>
@@ -5015,23 +4224,66 @@
       </p:sp>
       <p:sp>
         <p:nvSpPr>
-          <p:cNvPr id="9" name="Rectangle 8"/>
+          <p:cNvPr id="10" name="TextBox 9"/>
+          <p:cNvSpPr txBox="1"/>
+          <p:nvPr/>
+        </p:nvSpPr>
+        <p:spPr>
+          <a:xfrm>
+            <a:off x="1920240" y="4041648"/>
+            <a:ext cx="6949440" cy="411480"/>
+          </a:xfrm>
+          <a:prstGeom prst="rect">
+            <a:avLst/>
+          </a:prstGeom>
+          <a:noFill/>
+        </p:spPr>
+        <p:txBody>
+          <a:bodyPr wrap="square" lIns="0" rIns="0" tIns="0" bIns="0" anchor="ctr">
+            <a:spAutoFit/>
+          </a:bodyPr>
+          <a:lstStyle/>
+          <a:p>
+            <a:pPr algn="ctr">
+              <a:spcAft>
+                <a:spcPts val="200"/>
+              </a:spcAft>
+            </a:pPr>
+            <a:r>
+              <a:rPr sz="1350" b="1" i="0">
+                <a:solidFill>
+                  <a:srgbClr val="3A106E"/>
+                </a:solidFill>
+                <a:latin typeface="Yu Gothic"/>
+                <a:ea typeface="Yu Gothic"/>
+                <a:cs typeface="Yu Gothic"/>
+              </a:rPr>
+              <a:t>3つの分科会（部長・現場）　テーマごとに検討し、実行する　◇ 毎週</a:t>
+            </a:r>
+          </a:p>
+        </p:txBody>
+      </p:sp>
+      <p:sp>
+        <p:nvSpPr>
+          <p:cNvPr id="11" name="Rounded Rectangle 10"/>
           <p:cNvSpPr/>
           <p:nvPr/>
         </p:nvSpPr>
         <p:spPr>
           <a:xfrm>
-            <a:off x="502920" y="5870448"/>
-            <a:ext cx="38100" cy="566928"/>
-          </a:xfrm>
-          <a:prstGeom prst="rect">
+            <a:off x="2057400" y="4526280"/>
+            <a:ext cx="2133600" cy="868680"/>
+          </a:xfrm>
+          <a:prstGeom prst="roundRect">
             <a:avLst/>
           </a:prstGeom>
           <a:solidFill>
-            <a:srgbClr val="7823DC"/>
+            <a:srgbClr val="FFFFFF"/>
           </a:solidFill>
-          <a:ln>
-            <a:noFill/>
+          <a:ln w="12700">
+            <a:solidFill>
+              <a:srgbClr val="7823DC"/>
+            </a:solidFill>
           </a:ln>
           <a:effectLst/>
         </p:spPr>
@@ -5059,14 +4311,14 @@
       </p:sp>
       <p:sp>
         <p:nvSpPr>
-          <p:cNvPr id="10" name="TextBox 9"/>
+          <p:cNvPr id="12" name="TextBox 11"/>
           <p:cNvSpPr txBox="1"/>
           <p:nvPr/>
         </p:nvSpPr>
         <p:spPr>
           <a:xfrm>
-            <a:off x="685800" y="5934456"/>
-            <a:ext cx="10881360" cy="457200"/>
+            <a:off x="2057400" y="4526280"/>
+            <a:ext cx="2133600" cy="868680"/>
           </a:xfrm>
           <a:prstGeom prst="rect">
             <a:avLst/>
@@ -5079,55 +4331,64 @@
           </a:bodyPr>
           <a:lstStyle/>
           <a:p>
-            <a:pPr algn="l">
-              <a:spcAft>
-                <a:spcPts val="400"/>
-              </a:spcAft>
-            </a:pPr>
-            <a:r>
-              <a:rPr sz="1000" b="1" i="0">
-                <a:solidFill>
-                  <a:srgbClr val="7823DC"/>
-                </a:solidFill>
-                <a:latin typeface="Yu Gothic"/>
-                <a:ea typeface="Yu Gothic"/>
-                <a:cs typeface="Yu Gothic"/>
-              </a:rPr>
-              <a:t>ここだけ覚えて帰ってください　</a:t>
-            </a:r>
+            <a:pPr algn="ctr">
+              <a:spcAft>
+                <a:spcPts val="200"/>
+              </a:spcAft>
+            </a:pPr>
+            <a:r>
+              <a:rPr sz="1250" b="1" i="0">
+                <a:solidFill>
+                  <a:srgbClr val="3A106E"/>
+                </a:solidFill>
+                <a:latin typeface="Yu Gothic"/>
+                <a:ea typeface="Yu Gothic"/>
+                <a:cs typeface="Yu Gothic"/>
+              </a:rPr>
+              <a:t>接点づくり</a:t>
+            </a:r>
+          </a:p>
+          <a:p>
+            <a:pPr algn="ctr">
+              <a:spcAft>
+                <a:spcPts val="200"/>
+              </a:spcAft>
+            </a:pPr>
             <a:r>
               <a:rPr sz="1000" b="0" i="0">
                 <a:solidFill>
-                  <a:srgbClr val="262630"/>
-                </a:solidFill>
-                <a:latin typeface="Yu Gothic"/>
-                <a:ea typeface="Yu Gothic"/>
-                <a:cs typeface="Yu Gothic"/>
-              </a:rPr>
-              <a:t>下から上に「論点」が上がり、上から下に「決定」が降りてくる。この循環が2週間で1周します</a:t>
-            </a:r>
-          </a:p>
-        </p:txBody>
-      </p:sp>
-      <p:sp>
-        <p:nvSpPr>
-          <p:cNvPr id="11" name="Rectangle 10"/>
+                  <a:srgbClr val="5F5F6E"/>
+                </a:solidFill>
+                <a:latin typeface="Yu Gothic"/>
+                <a:ea typeface="Yu Gothic"/>
+                <a:cs typeface="Yu Gothic"/>
+              </a:rPr>
+              <a:t>リーダー：黒澤さん</a:t>
+            </a:r>
+          </a:p>
+        </p:txBody>
+      </p:sp>
+      <p:sp>
+        <p:nvSpPr>
+          <p:cNvPr id="13" name="Rounded Rectangle 12"/>
           <p:cNvSpPr/>
           <p:nvPr/>
         </p:nvSpPr>
         <p:spPr>
           <a:xfrm>
-            <a:off x="502920" y="6510528"/>
-            <a:ext cx="11183112" cy="15240"/>
-          </a:xfrm>
-          <a:prstGeom prst="rect">
+            <a:off x="4328160" y="4526280"/>
+            <a:ext cx="2133600" cy="868680"/>
+          </a:xfrm>
+          <a:prstGeom prst="roundRect">
             <a:avLst/>
           </a:prstGeom>
           <a:solidFill>
-            <a:srgbClr val="D9D9E0"/>
+            <a:srgbClr val="FFFFFF"/>
           </a:solidFill>
-          <a:ln>
-            <a:noFill/>
+          <a:ln w="12700">
+            <a:solidFill>
+              <a:srgbClr val="7823DC"/>
+            </a:solidFill>
           </a:ln>
           <a:effectLst/>
         </p:spPr>
@@ -5155,7 +4416,594 @@
       </p:sp>
       <p:sp>
         <p:nvSpPr>
-          <p:cNvPr id="12" name="TextBox 11"/>
+          <p:cNvPr id="14" name="TextBox 13"/>
+          <p:cNvSpPr txBox="1"/>
+          <p:nvPr/>
+        </p:nvSpPr>
+        <p:spPr>
+          <a:xfrm>
+            <a:off x="4328160" y="4526280"/>
+            <a:ext cx="2133600" cy="868680"/>
+          </a:xfrm>
+          <a:prstGeom prst="rect">
+            <a:avLst/>
+          </a:prstGeom>
+          <a:noFill/>
+        </p:spPr>
+        <p:txBody>
+          <a:bodyPr wrap="square" lIns="0" rIns="0" tIns="0" bIns="0" anchor="ctr">
+            <a:spAutoFit/>
+          </a:bodyPr>
+          <a:lstStyle/>
+          <a:p>
+            <a:pPr algn="ctr">
+              <a:spcAft>
+                <a:spcPts val="200"/>
+              </a:spcAft>
+            </a:pPr>
+            <a:r>
+              <a:rPr sz="1250" b="1" i="0">
+                <a:solidFill>
+                  <a:srgbClr val="3A106E"/>
+                </a:solidFill>
+                <a:latin typeface="Yu Gothic"/>
+                <a:ea typeface="Yu Gothic"/>
+                <a:cs typeface="Yu Gothic"/>
+              </a:rPr>
+              <a:t>ライセンス営業改革</a:t>
+            </a:r>
+          </a:p>
+          <a:p>
+            <a:pPr algn="ctr">
+              <a:spcAft>
+                <a:spcPts val="200"/>
+              </a:spcAft>
+            </a:pPr>
+            <a:r>
+              <a:rPr sz="1000" b="0" i="0">
+                <a:solidFill>
+                  <a:srgbClr val="5F5F6E"/>
+                </a:solidFill>
+                <a:latin typeface="Yu Gothic"/>
+                <a:ea typeface="Yu Gothic"/>
+                <a:cs typeface="Yu Gothic"/>
+              </a:rPr>
+              <a:t>リーダー：南谷さん</a:t>
+            </a:r>
+          </a:p>
+        </p:txBody>
+      </p:sp>
+      <p:sp>
+        <p:nvSpPr>
+          <p:cNvPr id="15" name="Rounded Rectangle 14"/>
+          <p:cNvSpPr/>
+          <p:nvPr/>
+        </p:nvSpPr>
+        <p:spPr>
+          <a:xfrm>
+            <a:off x="6598920" y="4526280"/>
+            <a:ext cx="2133600" cy="868680"/>
+          </a:xfrm>
+          <a:prstGeom prst="roundRect">
+            <a:avLst/>
+          </a:prstGeom>
+          <a:solidFill>
+            <a:srgbClr val="FFFFFF"/>
+          </a:solidFill>
+          <a:ln w="12700">
+            <a:solidFill>
+              <a:srgbClr val="7823DC"/>
+            </a:solidFill>
+          </a:ln>
+          <a:effectLst/>
+        </p:spPr>
+        <p:style>
+          <a:lnRef idx="1">
+            <a:schemeClr val="accent1"/>
+          </a:lnRef>
+          <a:fillRef idx="3">
+            <a:schemeClr val="accent1"/>
+          </a:fillRef>
+          <a:effectRef idx="2">
+            <a:schemeClr val="accent1"/>
+          </a:effectRef>
+          <a:fontRef idx="minor">
+            <a:schemeClr val="lt1"/>
+          </a:fontRef>
+        </p:style>
+        <p:txBody>
+          <a:bodyPr rtlCol="0" anchor="ctr"/>
+          <a:lstStyle/>
+          <a:p>
+            <a:pPr algn="ctr"/>
+          </a:p>
+        </p:txBody>
+      </p:sp>
+      <p:sp>
+        <p:nvSpPr>
+          <p:cNvPr id="16" name="TextBox 15"/>
+          <p:cNvSpPr txBox="1"/>
+          <p:nvPr/>
+        </p:nvSpPr>
+        <p:spPr>
+          <a:xfrm>
+            <a:off x="6598920" y="4526280"/>
+            <a:ext cx="2133600" cy="868680"/>
+          </a:xfrm>
+          <a:prstGeom prst="rect">
+            <a:avLst/>
+          </a:prstGeom>
+          <a:noFill/>
+        </p:spPr>
+        <p:txBody>
+          <a:bodyPr wrap="square" lIns="0" rIns="0" tIns="0" bIns="0" anchor="ctr">
+            <a:spAutoFit/>
+          </a:bodyPr>
+          <a:lstStyle/>
+          <a:p>
+            <a:pPr algn="ctr">
+              <a:spcAft>
+                <a:spcPts val="200"/>
+              </a:spcAft>
+            </a:pPr>
+            <a:r>
+              <a:rPr sz="1250" b="1" i="0">
+                <a:solidFill>
+                  <a:srgbClr val="3A106E"/>
+                </a:solidFill>
+                <a:latin typeface="Yu Gothic"/>
+                <a:ea typeface="Yu Gothic"/>
+                <a:cs typeface="Yu Gothic"/>
+              </a:rPr>
+              <a:t>経営基盤強化</a:t>
+            </a:r>
+          </a:p>
+          <a:p>
+            <a:pPr algn="ctr">
+              <a:spcAft>
+                <a:spcPts val="200"/>
+              </a:spcAft>
+            </a:pPr>
+            <a:r>
+              <a:rPr sz="1000" b="0" i="0">
+                <a:solidFill>
+                  <a:srgbClr val="5F5F6E"/>
+                </a:solidFill>
+                <a:latin typeface="Yu Gothic"/>
+                <a:ea typeface="Yu Gothic"/>
+                <a:cs typeface="Yu Gothic"/>
+              </a:rPr>
+              <a:t>リーダー：高橋さん</a:t>
+            </a:r>
+          </a:p>
+        </p:txBody>
+      </p:sp>
+      <p:sp>
+        <p:nvSpPr>
+          <p:cNvPr id="17" name="Up Arrow 16"/>
+          <p:cNvSpPr/>
+          <p:nvPr/>
+        </p:nvSpPr>
+        <p:spPr>
+          <a:xfrm>
+            <a:off x="777240" y="1920240"/>
+            <a:ext cx="685800" cy="3474720"/>
+          </a:xfrm>
+          <a:prstGeom prst="upArrow">
+            <a:avLst/>
+          </a:prstGeom>
+          <a:solidFill>
+            <a:srgbClr val="F7F7F9"/>
+          </a:solidFill>
+          <a:ln w="12700">
+            <a:solidFill>
+              <a:srgbClr val="7823DC"/>
+            </a:solidFill>
+          </a:ln>
+          <a:effectLst/>
+        </p:spPr>
+        <p:style>
+          <a:lnRef idx="1">
+            <a:schemeClr val="accent1"/>
+          </a:lnRef>
+          <a:fillRef idx="3">
+            <a:schemeClr val="accent1"/>
+          </a:fillRef>
+          <a:effectRef idx="2">
+            <a:schemeClr val="accent1"/>
+          </a:effectRef>
+          <a:fontRef idx="minor">
+            <a:schemeClr val="lt1"/>
+          </a:fontRef>
+        </p:style>
+        <p:txBody>
+          <a:bodyPr rtlCol="0" anchor="ctr"/>
+          <a:lstStyle/>
+          <a:p>
+            <a:pPr algn="ctr"/>
+          </a:p>
+        </p:txBody>
+      </p:sp>
+      <p:sp>
+        <p:nvSpPr>
+          <p:cNvPr id="18" name="TextBox 17"/>
+          <p:cNvSpPr txBox="1"/>
+          <p:nvPr/>
+        </p:nvSpPr>
+        <p:spPr>
+          <a:xfrm>
+            <a:off x="274320" y="5486400"/>
+            <a:ext cx="1737360" cy="640080"/>
+          </a:xfrm>
+          <a:prstGeom prst="rect">
+            <a:avLst/>
+          </a:prstGeom>
+          <a:noFill/>
+        </p:spPr>
+        <p:txBody>
+          <a:bodyPr wrap="square" lIns="0" rIns="0" tIns="0" bIns="0" anchor="ctr">
+            <a:spAutoFit/>
+          </a:bodyPr>
+          <a:lstStyle/>
+          <a:p>
+            <a:pPr algn="ctr">
+              <a:spcAft>
+                <a:spcPts val="200"/>
+              </a:spcAft>
+            </a:pPr>
+            <a:r>
+              <a:rPr sz="1050" b="1" i="0">
+                <a:solidFill>
+                  <a:srgbClr val="7823DC"/>
+                </a:solidFill>
+                <a:latin typeface="Yu Gothic"/>
+                <a:ea typeface="Yu Gothic"/>
+                <a:cs typeface="Yu Gothic"/>
+              </a:rPr>
+              <a:t>決めてほしいこと</a:t>
+            </a:r>
+          </a:p>
+          <a:p>
+            <a:pPr algn="ctr">
+              <a:spcAft>
+                <a:spcPts val="200"/>
+              </a:spcAft>
+            </a:pPr>
+            <a:r>
+              <a:rPr sz="1050" b="1" i="0">
+                <a:solidFill>
+                  <a:srgbClr val="7823DC"/>
+                </a:solidFill>
+                <a:latin typeface="Yu Gothic"/>
+                <a:ea typeface="Yu Gothic"/>
+                <a:cs typeface="Yu Gothic"/>
+              </a:rPr>
+              <a:t>が上がる</a:t>
+            </a:r>
+          </a:p>
+        </p:txBody>
+      </p:sp>
+      <p:sp>
+        <p:nvSpPr>
+          <p:cNvPr id="19" name="Down Arrow 18"/>
+          <p:cNvSpPr/>
+          <p:nvPr/>
+        </p:nvSpPr>
+        <p:spPr>
+          <a:xfrm>
+            <a:off x="9144000" y="1920240"/>
+            <a:ext cx="685800" cy="3474720"/>
+          </a:xfrm>
+          <a:prstGeom prst="downArrow">
+            <a:avLst/>
+          </a:prstGeom>
+          <a:solidFill>
+            <a:srgbClr val="F7F7F9"/>
+          </a:solidFill>
+          <a:ln w="12700">
+            <a:solidFill>
+              <a:srgbClr val="7823DC"/>
+            </a:solidFill>
+          </a:ln>
+          <a:effectLst/>
+        </p:spPr>
+        <p:style>
+          <a:lnRef idx="1">
+            <a:schemeClr val="accent1"/>
+          </a:lnRef>
+          <a:fillRef idx="3">
+            <a:schemeClr val="accent1"/>
+          </a:fillRef>
+          <a:effectRef idx="2">
+            <a:schemeClr val="accent1"/>
+          </a:effectRef>
+          <a:fontRef idx="minor">
+            <a:schemeClr val="lt1"/>
+          </a:fontRef>
+        </p:style>
+        <p:txBody>
+          <a:bodyPr rtlCol="0" anchor="ctr"/>
+          <a:lstStyle/>
+          <a:p>
+            <a:pPr algn="ctr"/>
+          </a:p>
+        </p:txBody>
+      </p:sp>
+      <p:sp>
+        <p:nvSpPr>
+          <p:cNvPr id="20" name="TextBox 19"/>
+          <p:cNvSpPr txBox="1"/>
+          <p:nvPr/>
+        </p:nvSpPr>
+        <p:spPr>
+          <a:xfrm>
+            <a:off x="8641080" y="5486400"/>
+            <a:ext cx="1737360" cy="640080"/>
+          </a:xfrm>
+          <a:prstGeom prst="rect">
+            <a:avLst/>
+          </a:prstGeom>
+          <a:noFill/>
+        </p:spPr>
+        <p:txBody>
+          <a:bodyPr wrap="square" lIns="0" rIns="0" tIns="0" bIns="0" anchor="ctr">
+            <a:spAutoFit/>
+          </a:bodyPr>
+          <a:lstStyle/>
+          <a:p>
+            <a:pPr algn="ctr">
+              <a:spcAft>
+                <a:spcPts val="200"/>
+              </a:spcAft>
+            </a:pPr>
+            <a:r>
+              <a:rPr sz="1050" b="1" i="0">
+                <a:solidFill>
+                  <a:srgbClr val="7823DC"/>
+                </a:solidFill>
+                <a:latin typeface="Yu Gothic"/>
+                <a:ea typeface="Yu Gothic"/>
+                <a:cs typeface="Yu Gothic"/>
+              </a:rPr>
+              <a:t>決まったこと</a:t>
+            </a:r>
+          </a:p>
+          <a:p>
+            <a:pPr algn="ctr">
+              <a:spcAft>
+                <a:spcPts val="200"/>
+              </a:spcAft>
+            </a:pPr>
+            <a:r>
+              <a:rPr sz="1050" b="1" i="0">
+                <a:solidFill>
+                  <a:srgbClr val="7823DC"/>
+                </a:solidFill>
+                <a:latin typeface="Yu Gothic"/>
+                <a:ea typeface="Yu Gothic"/>
+                <a:cs typeface="Yu Gothic"/>
+              </a:rPr>
+              <a:t>が降りてくる</a:t>
+            </a:r>
+          </a:p>
+        </p:txBody>
+      </p:sp>
+      <p:sp>
+        <p:nvSpPr>
+          <p:cNvPr id="21" name="Rounded Rectangle 20"/>
+          <p:cNvSpPr/>
+          <p:nvPr/>
+        </p:nvSpPr>
+        <p:spPr>
+          <a:xfrm>
+            <a:off x="10332720" y="1783080"/>
+            <a:ext cx="1371600" cy="3794760"/>
+          </a:xfrm>
+          <a:prstGeom prst="roundRect">
+            <a:avLst/>
+          </a:prstGeom>
+          <a:solidFill>
+            <a:srgbClr val="F7F7F9"/>
+          </a:solidFill>
+          <a:ln w="12700">
+            <a:solidFill>
+              <a:srgbClr val="8A8A99"/>
+            </a:solidFill>
+          </a:ln>
+          <a:effectLst/>
+        </p:spPr>
+        <p:style>
+          <a:lnRef idx="1">
+            <a:schemeClr val="accent1"/>
+          </a:lnRef>
+          <a:fillRef idx="3">
+            <a:schemeClr val="accent1"/>
+          </a:fillRef>
+          <a:effectRef idx="2">
+            <a:schemeClr val="accent1"/>
+          </a:effectRef>
+          <a:fontRef idx="minor">
+            <a:schemeClr val="lt1"/>
+          </a:fontRef>
+        </p:style>
+        <p:txBody>
+          <a:bodyPr rtlCol="0" anchor="ctr"/>
+          <a:lstStyle/>
+          <a:p>
+            <a:pPr algn="ctr"/>
+          </a:p>
+        </p:txBody>
+      </p:sp>
+      <p:sp>
+        <p:nvSpPr>
+          <p:cNvPr id="22" name="TextBox 21"/>
+          <p:cNvSpPr txBox="1"/>
+          <p:nvPr/>
+        </p:nvSpPr>
+        <p:spPr>
+          <a:xfrm>
+            <a:off x="10378440" y="1920240"/>
+            <a:ext cx="1280160" cy="3566160"/>
+          </a:xfrm>
+          <a:prstGeom prst="rect">
+            <a:avLst/>
+          </a:prstGeom>
+          <a:noFill/>
+        </p:spPr>
+        <p:txBody>
+          <a:bodyPr wrap="square" lIns="0" rIns="0" tIns="0" bIns="0" anchor="t">
+            <a:spAutoFit/>
+          </a:bodyPr>
+          <a:lstStyle/>
+          <a:p>
+            <a:pPr algn="ctr">
+              <a:spcAft>
+                <a:spcPts val="200"/>
+              </a:spcAft>
+            </a:pPr>
+            <a:r>
+              <a:rPr sz="1300" b="1" i="0">
+                <a:solidFill>
+                  <a:srgbClr val="3A106E"/>
+                </a:solidFill>
+                <a:latin typeface="Yu Gothic"/>
+                <a:ea typeface="Yu Gothic"/>
+                <a:cs typeface="Yu Gothic"/>
+              </a:rPr>
+              <a:t>事務局</a:t>
+            </a:r>
+          </a:p>
+          <a:p>
+            <a:pPr algn="ctr">
+              <a:spcAft>
+                <a:spcPts val="200"/>
+              </a:spcAft>
+            </a:pPr>
+            <a:r>
+              <a:rPr sz="1000" b="0" i="0">
+                <a:solidFill>
+                  <a:srgbClr val="5F5F6E"/>
+                </a:solidFill>
+                <a:latin typeface="Yu Gothic"/>
+                <a:ea typeface="Yu Gothic"/>
+                <a:cs typeface="Yu Gothic"/>
+              </a:rPr>
+              <a:t>（PMO）</a:t>
+            </a:r>
+          </a:p>
+          <a:p>
+            <a:pPr algn="ctr">
+              <a:spcAft>
+                <a:spcPts val="200"/>
+              </a:spcAft>
+            </a:pPr>
+            <a:r>
+              <a:rPr sz="600" b="0" i="0">
+                <a:solidFill>
+                  <a:srgbClr val="5F5F6E"/>
+                </a:solidFill>
+                <a:latin typeface="Yu Gothic"/>
+                <a:ea typeface="Yu Gothic"/>
+                <a:cs typeface="Yu Gothic"/>
+              </a:rPr>
+              <a:t/>
+            </a:r>
+          </a:p>
+          <a:p>
+            <a:pPr algn="ctr">
+              <a:spcAft>
+                <a:spcPts val="200"/>
+              </a:spcAft>
+            </a:pPr>
+            <a:r>
+              <a:rPr sz="1050" b="0" i="0">
+                <a:solidFill>
+                  <a:srgbClr val="262630"/>
+                </a:solidFill>
+                <a:latin typeface="Yu Gothic"/>
+                <a:ea typeface="Yu Gothic"/>
+                <a:cs typeface="Yu Gothic"/>
+              </a:rPr>
+              <a:t>毎朝30分</a:t>
+            </a:r>
+          </a:p>
+          <a:p>
+            <a:pPr algn="ctr">
+              <a:spcAft>
+                <a:spcPts val="200"/>
+              </a:spcAft>
+            </a:pPr>
+            <a:r>
+              <a:rPr sz="600" b="0" i="0">
+                <a:solidFill>
+                  <a:srgbClr val="5F5F6E"/>
+                </a:solidFill>
+                <a:latin typeface="Yu Gothic"/>
+                <a:ea typeface="Yu Gothic"/>
+                <a:cs typeface="Yu Gothic"/>
+              </a:rPr>
+              <a:t/>
+            </a:r>
+          </a:p>
+          <a:p>
+            <a:pPr algn="ctr">
+              <a:spcAft>
+                <a:spcPts val="200"/>
+              </a:spcAft>
+            </a:pPr>
+            <a:r>
+              <a:rPr sz="1050" b="0" i="0">
+                <a:solidFill>
+                  <a:srgbClr val="262630"/>
+                </a:solidFill>
+                <a:latin typeface="Yu Gothic"/>
+                <a:ea typeface="Yu Gothic"/>
+                <a:cs typeface="Yu Gothic"/>
+              </a:rPr>
+              <a:t>全体を回す</a:t>
+            </a:r>
+          </a:p>
+          <a:p>
+            <a:pPr algn="ctr">
+              <a:spcAft>
+                <a:spcPts val="200"/>
+              </a:spcAft>
+            </a:pPr>
+            <a:r>
+              <a:rPr sz="1050" b="0" i="0">
+                <a:solidFill>
+                  <a:srgbClr val="262630"/>
+                </a:solidFill>
+                <a:latin typeface="Yu Gothic"/>
+                <a:ea typeface="Yu Gothic"/>
+                <a:cs typeface="Yu Gothic"/>
+              </a:rPr>
+              <a:t>記録・準備は</a:t>
+            </a:r>
+          </a:p>
+          <a:p>
+            <a:pPr algn="ctr">
+              <a:spcAft>
+                <a:spcPts val="200"/>
+              </a:spcAft>
+            </a:pPr>
+            <a:r>
+              <a:rPr sz="1050" b="0" i="0">
+                <a:solidFill>
+                  <a:srgbClr val="262630"/>
+                </a:solidFill>
+                <a:latin typeface="Yu Gothic"/>
+                <a:ea typeface="Yu Gothic"/>
+                <a:cs typeface="Yu Gothic"/>
+              </a:rPr>
+              <a:t>全部ここ</a:t>
+            </a:r>
+          </a:p>
+        </p:txBody>
+      </p:sp>
+      <p:sp>
+        <p:nvSpPr>
+          <p:cNvPr id="23" name="TextBox 22"/>
           <p:cNvSpPr txBox="1"/>
           <p:nvPr/>
         </p:nvSpPr>
@@ -5189,14 +5037,14 @@
                 <a:ea typeface="Yu Gothic"/>
                 <a:cs typeface="Yu Gothic"/>
               </a:rPr>
-              <a:t>円谷プロダクション｜構造改革の新しい会議の仕組み 部長会共有資料（社外秘）</a:t>
-            </a:r>
-          </a:p>
-        </p:txBody>
-      </p:sp>
-      <p:sp>
-        <p:nvSpPr>
-          <p:cNvPr id="13" name="TextBox 12"/>
+              <a:t>円谷プロダクション｜新しい会議の仕組み（部長会・社外秘）</a:t>
+            </a:r>
+          </a:p>
+        </p:txBody>
+      </p:sp>
+      <p:sp>
+        <p:nvSpPr>
+          <p:cNvPr id="24" name="TextBox 23"/>
           <p:cNvSpPr txBox="1"/>
           <p:nvPr/>
         </p:nvSpPr>
@@ -5261,8 +5109,8 @@
         </p:nvSpPr>
         <p:spPr>
           <a:xfrm>
-            <a:off x="502920" y="256032"/>
-            <a:ext cx="11155680" cy="256032"/>
+            <a:off x="502920" y="320040"/>
+            <a:ext cx="11155680" cy="274320"/>
           </a:xfrm>
           <a:prstGeom prst="rect">
             <a:avLst/>
@@ -5281,7 +5129,7 @@
               </a:spcAft>
             </a:pPr>
             <a:r>
-              <a:rPr sz="1000" b="1" i="0">
+              <a:rPr sz="1100" b="1" i="0">
                 <a:solidFill>
                   <a:srgbClr val="7823DC"/>
                 </a:solidFill>
@@ -5289,7 +5137,7 @@
                 <a:ea typeface="Yu Gothic"/>
                 <a:cs typeface="Yu Gothic"/>
               </a:rPr>
-              <a:t>3つの分科会（4分）</a:t>
+              <a:t>絵②</a:t>
             </a:r>
           </a:p>
         </p:txBody>
@@ -5302,8 +5150,8 @@
         </p:nvSpPr>
         <p:spPr>
           <a:xfrm>
-            <a:off x="502920" y="512064"/>
-            <a:ext cx="11155680" cy="868680"/>
+            <a:off x="502920" y="621792"/>
+            <a:ext cx="11155680" cy="685800"/>
           </a:xfrm>
           <a:prstGeom prst="rect">
             <a:avLst/>
@@ -5318,11 +5166,11 @@
           <a:p>
             <a:pPr algn="l">
               <a:spcAft>
-                <a:spcPts val="0"/>
-              </a:spcAft>
-            </a:pPr>
-            <a:r>
-              <a:rPr sz="1900" b="1" i="0">
+                <a:spcPts val="400"/>
+              </a:spcAft>
+            </a:pPr>
+            <a:r>
+              <a:rPr sz="2400" b="1" i="0">
                 <a:solidFill>
                   <a:srgbClr val="262630"/>
                 </a:solidFill>
@@ -5330,7 +5178,7 @@
                 <a:ea typeface="Yu Gothic"/>
                 <a:cs typeface="Yu Gothic"/>
               </a:rPr>
-              <a:t>テーマは「接点づくり」「ライセンス営業改革」「経営基盤強化」の3つ</a:t>
+              <a:t>2週間で1周する——毎週の分科会と、隔週の「決める会議」</a:t>
             </a:r>
           </a:p>
         </p:txBody>
@@ -5343,8 +5191,8 @@
         </p:nvSpPr>
         <p:spPr>
           <a:xfrm>
-            <a:off x="502920" y="1389888"/>
-            <a:ext cx="1463040" cy="33020"/>
+            <a:off x="502920" y="1371600"/>
+            <a:ext cx="1645920" cy="38100"/>
           </a:xfrm>
           <a:prstGeom prst="rect">
             <a:avLst/>
@@ -5387,8 +5235,8 @@
         </p:nvSpPr>
         <p:spPr>
           <a:xfrm>
-            <a:off x="502920" y="1517904"/>
-            <a:ext cx="11155680" cy="310896"/>
+            <a:off x="502920" y="2560320"/>
+            <a:ext cx="822960" cy="457200"/>
           </a:xfrm>
           <a:prstGeom prst="rect">
             <a:avLst/>
@@ -5396,18 +5244,18 @@
           <a:noFill/>
         </p:spPr>
         <p:txBody>
-          <a:bodyPr wrap="square" lIns="0" rIns="0" tIns="0" bIns="0">
+          <a:bodyPr wrap="square" lIns="0" rIns="0" tIns="0" bIns="0" anchor="ctr">
             <a:spAutoFit/>
           </a:bodyPr>
           <a:lstStyle/>
           <a:p>
-            <a:pPr algn="l">
-              <a:spcAft>
-                <a:spcPts val="400"/>
-              </a:spcAft>
-            </a:pPr>
-            <a:r>
-              <a:rPr sz="1150" b="1" i="0">
+            <a:pPr algn="ctr">
+              <a:spcAft>
+                <a:spcPts val="200"/>
+              </a:spcAft>
+            </a:pPr>
+            <a:r>
+              <a:rPr sz="1300" b="1" i="0">
                 <a:solidFill>
                   <a:srgbClr val="3A106E"/>
                 </a:solidFill>
@@ -5415,511 +5263,52 @@
                 <a:ea typeface="Yu Gothic"/>
                 <a:cs typeface="Yu Gothic"/>
               </a:rPr>
-              <a:t>分科会は関係する部長にも入っていただく検討チームです。ここが改革の主戦場になります</a:t>
-            </a:r>
-          </a:p>
-        </p:txBody>
-      </p:sp>
-      <p:graphicFrame>
-        <p:nvGraphicFramePr>
-          <p:cNvPr id="6" name="Table 5"/>
-          <p:cNvGraphicFramePr>
-            <a:graphicFrameLocks noGrp="1"/>
-          </p:cNvGraphicFramePr>
-          <p:nvPr/>
-        </p:nvGraphicFramePr>
-        <p:xfrm>
-          <a:off x="502920" y="1901952"/>
-          <a:ext cx="11183110" cy="2560320"/>
-        </p:xfrm>
-        <a:graphic>
-          <a:graphicData uri="http://schemas.openxmlformats.org/drawingml/2006/table">
-            <a:tbl>
-              <a:tblPr firstRow="1" bandRow="1">
-                <a:tableStyleId>{5C22544A-7EE6-4342-B048-85BDC9FD1C3A}</a:tableStyleId>
-              </a:tblPr>
-              <a:tblGrid>
-                <a:gridCol w="2016626"/>
-                <a:gridCol w="1558302"/>
-                <a:gridCol w="4949902"/>
-                <a:gridCol w="2658280"/>
-              </a:tblGrid>
-              <a:tr h="640080">
-                <a:tc>
-                  <a:txBody>
-                    <a:bodyPr wrap="square"/>
-                    <a:lstStyle/>
-                    <a:p>
-                      <a:pPr algn="l">
-                        <a:spcAft>
-                          <a:spcPts val="0"/>
-                        </a:spcAft>
-                      </a:pPr>
-                      <a:r>
-                        <a:rPr sz="950" b="1" i="0">
-                          <a:solidFill>
-                            <a:srgbClr val="FFFFFF"/>
-                          </a:solidFill>
-                          <a:latin typeface="Yu Gothic"/>
-                          <a:ea typeface="Yu Gothic"/>
-                          <a:cs typeface="Yu Gothic"/>
-                        </a:rPr>
-                        <a:t>分科会</a:t>
-                      </a:r>
-                    </a:p>
-                  </a:txBody>
-                  <a:tcPr marL="54864" marR="54864" marT="18288" marB="18288" anchor="ctr">
-                    <a:solidFill>
-                      <a:srgbClr val="3A106E"/>
-                    </a:solidFill>
-                  </a:tcPr>
-                </a:tc>
-                <a:tc>
-                  <a:txBody>
-                    <a:bodyPr wrap="square"/>
-                    <a:lstStyle/>
-                    <a:p>
-                      <a:pPr algn="l">
-                        <a:spcAft>
-                          <a:spcPts val="0"/>
-                        </a:spcAft>
-                      </a:pPr>
-                      <a:r>
-                        <a:rPr sz="950" b="1" i="0">
-                          <a:solidFill>
-                            <a:srgbClr val="FFFFFF"/>
-                          </a:solidFill>
-                          <a:latin typeface="Yu Gothic"/>
-                          <a:ea typeface="Yu Gothic"/>
-                          <a:cs typeface="Yu Gothic"/>
-                        </a:rPr>
-                        <a:t>リーダー（想定）</a:t>
-                      </a:r>
-                    </a:p>
-                  </a:txBody>
-                  <a:tcPr marL="54864" marR="54864" marT="18288" marB="18288" anchor="ctr">
-                    <a:solidFill>
-                      <a:srgbClr val="3A106E"/>
-                    </a:solidFill>
-                  </a:tcPr>
-                </a:tc>
-                <a:tc>
-                  <a:txBody>
-                    <a:bodyPr wrap="square"/>
-                    <a:lstStyle/>
-                    <a:p>
-                      <a:pPr algn="l">
-                        <a:spcAft>
-                          <a:spcPts val="0"/>
-                        </a:spcAft>
-                      </a:pPr>
-                      <a:r>
-                        <a:rPr sz="950" b="1" i="0">
-                          <a:solidFill>
-                            <a:srgbClr val="FFFFFF"/>
-                          </a:solidFill>
-                          <a:latin typeface="Yu Gothic"/>
-                          <a:ea typeface="Yu Gothic"/>
-                          <a:cs typeface="Yu Gothic"/>
-                        </a:rPr>
-                        <a:t>検討するテーマの例</a:t>
-                      </a:r>
-                    </a:p>
-                  </a:txBody>
-                  <a:tcPr marL="54864" marR="54864" marT="18288" marB="18288" anchor="ctr">
-                    <a:solidFill>
-                      <a:srgbClr val="3A106E"/>
-                    </a:solidFill>
-                  </a:tcPr>
-                </a:tc>
-                <a:tc>
-                  <a:txBody>
-                    <a:bodyPr wrap="square"/>
-                    <a:lstStyle/>
-                    <a:p>
-                      <a:pPr algn="l">
-                        <a:spcAft>
-                          <a:spcPts val="0"/>
-                        </a:spcAft>
-                      </a:pPr>
-                      <a:r>
-                        <a:rPr sz="950" b="1" i="0">
-                          <a:solidFill>
-                            <a:srgbClr val="FFFFFF"/>
-                          </a:solidFill>
-                          <a:latin typeface="Yu Gothic"/>
-                          <a:ea typeface="Yu Gothic"/>
-                          <a:cs typeface="Yu Gothic"/>
-                        </a:rPr>
-                        <a:t>関係が深い部門</a:t>
-                      </a:r>
-                    </a:p>
-                  </a:txBody>
-                  <a:tcPr marL="54864" marR="54864" marT="18288" marB="18288" anchor="ctr">
-                    <a:solidFill>
-                      <a:srgbClr val="3A106E"/>
-                    </a:solidFill>
-                  </a:tcPr>
-                </a:tc>
-              </a:tr>
-              <a:tr h="640080">
-                <a:tc>
-                  <a:txBody>
-                    <a:bodyPr wrap="square"/>
-                    <a:lstStyle/>
-                    <a:p>
-                      <a:pPr algn="l">
-                        <a:spcAft>
-                          <a:spcPts val="100"/>
-                        </a:spcAft>
-                      </a:pPr>
-                      <a:r>
-                        <a:rPr sz="900" b="1" i="0">
-                          <a:solidFill>
-                            <a:srgbClr val="3A106E"/>
-                          </a:solidFill>
-                          <a:latin typeface="Yu Gothic"/>
-                          <a:ea typeface="Yu Gothic"/>
-                          <a:cs typeface="Yu Gothic"/>
-                        </a:rPr>
-                        <a:t>接点づくり</a:t>
-                      </a:r>
-                    </a:p>
-                  </a:txBody>
-                  <a:tcPr marL="54864" marR="54864" marT="18288" marB="18288" anchor="ctr">
-                    <a:solidFill>
-                      <a:srgbClr val="FFFFFF"/>
-                    </a:solidFill>
-                  </a:tcPr>
-                </a:tc>
-                <a:tc>
-                  <a:txBody>
-                    <a:bodyPr wrap="square"/>
-                    <a:lstStyle/>
-                    <a:p>
-                      <a:pPr algn="l">
-                        <a:spcAft>
-                          <a:spcPts val="100"/>
-                        </a:spcAft>
-                      </a:pPr>
-                      <a:r>
-                        <a:rPr sz="900" b="0" i="0">
-                          <a:solidFill>
-                            <a:srgbClr val="262630"/>
-                          </a:solidFill>
-                          <a:latin typeface="Yu Gothic"/>
-                          <a:ea typeface="Yu Gothic"/>
-                          <a:cs typeface="Yu Gothic"/>
-                        </a:rPr>
-                        <a:t>黒澤さん</a:t>
-                      </a:r>
-                    </a:p>
-                  </a:txBody>
-                  <a:tcPr marL="54864" marR="54864" marT="18288" marB="18288" anchor="ctr">
-                    <a:solidFill>
-                      <a:srgbClr val="FFFFFF"/>
-                    </a:solidFill>
-                  </a:tcPr>
-                </a:tc>
-                <a:tc>
-                  <a:txBody>
-                    <a:bodyPr wrap="square"/>
-                    <a:lstStyle/>
-                    <a:p>
-                      <a:pPr algn="l">
-                        <a:spcAft>
-                          <a:spcPts val="100"/>
-                        </a:spcAft>
-                      </a:pPr>
-                      <a:r>
-                        <a:rPr sz="900" b="0" i="0">
-                          <a:solidFill>
-                            <a:srgbClr val="262630"/>
-                          </a:solidFill>
-                          <a:latin typeface="Yu Gothic"/>
-                          <a:ea typeface="Yu Gothic"/>
-                          <a:cs typeface="Yu Gothic"/>
-                        </a:rPr>
-                        <a:t>お客様・ファンの理解／日常的な接点づくり／EC・イベント・SNSの活用</a:t>
-                      </a:r>
-                    </a:p>
-                  </a:txBody>
-                  <a:tcPr marL="54864" marR="54864" marT="18288" marB="18288" anchor="ctr">
-                    <a:solidFill>
-                      <a:srgbClr val="FFFFFF"/>
-                    </a:solidFill>
-                  </a:tcPr>
-                </a:tc>
-                <a:tc>
-                  <a:txBody>
-                    <a:bodyPr wrap="square"/>
-                    <a:lstStyle/>
-                    <a:p>
-                      <a:pPr algn="l">
-                        <a:spcAft>
-                          <a:spcPts val="100"/>
-                        </a:spcAft>
-                      </a:pPr>
-                      <a:r>
-                        <a:rPr sz="900" b="0" i="0">
-                          <a:solidFill>
-                            <a:srgbClr val="262630"/>
-                          </a:solidFill>
-                          <a:latin typeface="Yu Gothic"/>
-                          <a:ea typeface="Yu Gothic"/>
-                          <a:cs typeface="Yu Gothic"/>
-                        </a:rPr>
-                        <a:t>マーケティング・EC・イベント・宣伝など</a:t>
-                      </a:r>
-                    </a:p>
-                  </a:txBody>
-                  <a:tcPr marL="54864" marR="54864" marT="18288" marB="18288" anchor="ctr">
-                    <a:solidFill>
-                      <a:srgbClr val="FFFFFF"/>
-                    </a:solidFill>
-                  </a:tcPr>
-                </a:tc>
-              </a:tr>
-              <a:tr h="640080">
-                <a:tc>
-                  <a:txBody>
-                    <a:bodyPr wrap="square"/>
-                    <a:lstStyle/>
-                    <a:p>
-                      <a:pPr algn="l">
-                        <a:spcAft>
-                          <a:spcPts val="100"/>
-                        </a:spcAft>
-                      </a:pPr>
-                      <a:r>
-                        <a:rPr sz="900" b="1" i="0">
-                          <a:solidFill>
-                            <a:srgbClr val="3A106E"/>
-                          </a:solidFill>
-                          <a:latin typeface="Yu Gothic"/>
-                          <a:ea typeface="Yu Gothic"/>
-                          <a:cs typeface="Yu Gothic"/>
-                        </a:rPr>
-                        <a:t>ライセンス営業改革</a:t>
-                      </a:r>
-                    </a:p>
-                  </a:txBody>
-                  <a:tcPr marL="54864" marR="54864" marT="18288" marB="18288" anchor="ctr">
-                    <a:solidFill>
-                      <a:srgbClr val="F7F7F9"/>
-                    </a:solidFill>
-                  </a:tcPr>
-                </a:tc>
-                <a:tc>
-                  <a:txBody>
-                    <a:bodyPr wrap="square"/>
-                    <a:lstStyle/>
-                    <a:p>
-                      <a:pPr algn="l">
-                        <a:spcAft>
-                          <a:spcPts val="100"/>
-                        </a:spcAft>
-                      </a:pPr>
-                      <a:r>
-                        <a:rPr sz="900" b="0" i="0">
-                          <a:solidFill>
-                            <a:srgbClr val="262630"/>
-                          </a:solidFill>
-                          <a:latin typeface="Yu Gothic"/>
-                          <a:ea typeface="Yu Gothic"/>
-                          <a:cs typeface="Yu Gothic"/>
-                        </a:rPr>
-                        <a:t>南谷さん</a:t>
-                      </a:r>
-                    </a:p>
-                  </a:txBody>
-                  <a:tcPr marL="54864" marR="54864" marT="18288" marB="18288" anchor="ctr">
-                    <a:solidFill>
-                      <a:srgbClr val="F7F7F9"/>
-                    </a:solidFill>
-                  </a:tcPr>
-                </a:tc>
-                <a:tc>
-                  <a:txBody>
-                    <a:bodyPr wrap="square"/>
-                    <a:lstStyle/>
-                    <a:p>
-                      <a:pPr algn="l">
-                        <a:spcAft>
-                          <a:spcPts val="100"/>
-                        </a:spcAft>
-                      </a:pPr>
-                      <a:r>
-                        <a:rPr sz="900" b="0" i="0">
-                          <a:solidFill>
-                            <a:srgbClr val="262630"/>
-                          </a:solidFill>
-                          <a:latin typeface="Yu Gothic"/>
-                          <a:ea typeface="Yu Gothic"/>
-                          <a:cs typeface="Yu Gothic"/>
-                        </a:rPr>
-                        <a:t>既存取引先の分析と重要度のランク分け／新規開拓／営業資料・提案の質の向上／営業の管理の仕組み</a:t>
-                      </a:r>
-                    </a:p>
-                  </a:txBody>
-                  <a:tcPr marL="54864" marR="54864" marT="18288" marB="18288" anchor="ctr">
-                    <a:solidFill>
-                      <a:srgbClr val="F7F7F9"/>
-                    </a:solidFill>
-                  </a:tcPr>
-                </a:tc>
-                <a:tc>
-                  <a:txBody>
-                    <a:bodyPr wrap="square"/>
-                    <a:lstStyle/>
-                    <a:p>
-                      <a:pPr algn="l">
-                        <a:spcAft>
-                          <a:spcPts val="100"/>
-                        </a:spcAft>
-                      </a:pPr>
-                      <a:r>
-                        <a:rPr sz="900" b="0" i="0">
-                          <a:solidFill>
-                            <a:srgbClr val="262630"/>
-                          </a:solidFill>
-                          <a:latin typeface="Yu Gothic"/>
-                          <a:ea typeface="Yu Gothic"/>
-                          <a:cs typeface="Yu Gothic"/>
-                        </a:rPr>
-                        <a:t>ライセンス営業・リテール・海外・監修・法務など</a:t>
-                      </a:r>
-                    </a:p>
-                  </a:txBody>
-                  <a:tcPr marL="54864" marR="54864" marT="18288" marB="18288" anchor="ctr">
-                    <a:solidFill>
-                      <a:srgbClr val="F7F7F9"/>
-                    </a:solidFill>
-                  </a:tcPr>
-                </a:tc>
-              </a:tr>
-              <a:tr h="640080">
-                <a:tc>
-                  <a:txBody>
-                    <a:bodyPr wrap="square"/>
-                    <a:lstStyle/>
-                    <a:p>
-                      <a:pPr algn="l">
-                        <a:spcAft>
-                          <a:spcPts val="100"/>
-                        </a:spcAft>
-                      </a:pPr>
-                      <a:r>
-                        <a:rPr sz="900" b="1" i="0">
-                          <a:solidFill>
-                            <a:srgbClr val="3A106E"/>
-                          </a:solidFill>
-                          <a:latin typeface="Yu Gothic"/>
-                          <a:ea typeface="Yu Gothic"/>
-                          <a:cs typeface="Yu Gothic"/>
-                        </a:rPr>
-                        <a:t>経営基盤強化</a:t>
-                      </a:r>
-                    </a:p>
-                  </a:txBody>
-                  <a:tcPr marL="54864" marR="54864" marT="18288" marB="18288" anchor="ctr">
-                    <a:solidFill>
-                      <a:srgbClr val="FFFFFF"/>
-                    </a:solidFill>
-                  </a:tcPr>
-                </a:tc>
-                <a:tc>
-                  <a:txBody>
-                    <a:bodyPr wrap="square"/>
-                    <a:lstStyle/>
-                    <a:p>
-                      <a:pPr algn="l">
-                        <a:spcAft>
-                          <a:spcPts val="100"/>
-                        </a:spcAft>
-                      </a:pPr>
-                      <a:r>
-                        <a:rPr sz="900" b="0" i="0">
-                          <a:solidFill>
-                            <a:srgbClr val="262630"/>
-                          </a:solidFill>
-                          <a:latin typeface="Yu Gothic"/>
-                          <a:ea typeface="Yu Gothic"/>
-                          <a:cs typeface="Yu Gothic"/>
-                        </a:rPr>
-                        <a:t>高橋さん</a:t>
-                      </a:r>
-                    </a:p>
-                  </a:txBody>
-                  <a:tcPr marL="54864" marR="54864" marT="18288" marB="18288" anchor="ctr">
-                    <a:solidFill>
-                      <a:srgbClr val="FFFFFF"/>
-                    </a:solidFill>
-                  </a:tcPr>
-                </a:tc>
-                <a:tc>
-                  <a:txBody>
-                    <a:bodyPr wrap="square"/>
-                    <a:lstStyle/>
-                    <a:p>
-                      <a:pPr algn="l">
-                        <a:spcAft>
-                          <a:spcPts val="100"/>
-                        </a:spcAft>
-                      </a:pPr>
-                      <a:r>
-                        <a:rPr sz="900" b="0" i="0">
-                          <a:solidFill>
-                            <a:srgbClr val="262630"/>
-                          </a:solidFill>
-                          <a:latin typeface="Yu Gothic"/>
-                          <a:ea typeface="Yu Gothic"/>
-                          <a:cs typeface="Yu Gothic"/>
-                        </a:rPr>
-                        <a:t>会議の仕組み／目標と進み具合を測る数字／役割分担の整理／管理ルール・手引き／AIの活用</a:t>
-                      </a:r>
-                    </a:p>
-                  </a:txBody>
-                  <a:tcPr marL="54864" marR="54864" marT="18288" marB="18288" anchor="ctr">
-                    <a:solidFill>
-                      <a:srgbClr val="FFFFFF"/>
-                    </a:solidFill>
-                  </a:tcPr>
-                </a:tc>
-                <a:tc>
-                  <a:txBody>
-                    <a:bodyPr wrap="square"/>
-                    <a:lstStyle/>
-                    <a:p>
-                      <a:pPr algn="l">
-                        <a:spcAft>
-                          <a:spcPts val="100"/>
-                        </a:spcAft>
-                      </a:pPr>
-                      <a:r>
-                        <a:rPr sz="900" b="0" i="0">
-                          <a:solidFill>
-                            <a:srgbClr val="262630"/>
-                          </a:solidFill>
-                          <a:latin typeface="Yu Gothic"/>
-                          <a:ea typeface="Yu Gothic"/>
-                          <a:cs typeface="Yu Gothic"/>
-                        </a:rPr>
-                        <a:t>経営企画・管理部門・情報システムなど</a:t>
-                      </a:r>
-                    </a:p>
-                  </a:txBody>
-                  <a:tcPr marL="54864" marR="54864" marT="18288" marB="18288" anchor="ctr">
-                    <a:solidFill>
-                      <a:srgbClr val="FFFFFF"/>
-                    </a:solidFill>
-                  </a:tcPr>
-                </a:tc>
-              </a:tr>
-            </a:tbl>
-          </a:graphicData>
-        </a:graphic>
-      </p:graphicFrame>
+              <a:t>第1週</a:t>
+            </a:r>
+          </a:p>
+        </p:txBody>
+      </p:sp>
+      <p:sp>
+        <p:nvSpPr>
+          <p:cNvPr id="6" name="TextBox 5"/>
+          <p:cNvSpPr txBox="1"/>
+          <p:nvPr/>
+        </p:nvSpPr>
+        <p:spPr>
+          <a:xfrm>
+            <a:off x="502920" y="4160520"/>
+            <a:ext cx="822960" cy="457200"/>
+          </a:xfrm>
+          <a:prstGeom prst="rect">
+            <a:avLst/>
+          </a:prstGeom>
+          <a:noFill/>
+        </p:spPr>
+        <p:txBody>
+          <a:bodyPr wrap="square" lIns="0" rIns="0" tIns="0" bIns="0" anchor="ctr">
+            <a:spAutoFit/>
+          </a:bodyPr>
+          <a:lstStyle/>
+          <a:p>
+            <a:pPr algn="ctr">
+              <a:spcAft>
+                <a:spcPts val="200"/>
+              </a:spcAft>
+            </a:pPr>
+            <a:r>
+              <a:rPr sz="1300" b="1" i="0">
+                <a:solidFill>
+                  <a:srgbClr val="3A106E"/>
+                </a:solidFill>
+                <a:latin typeface="Yu Gothic"/>
+                <a:ea typeface="Yu Gothic"/>
+                <a:cs typeface="Yu Gothic"/>
+              </a:rPr>
+              <a:t>第2週</a:t>
+            </a:r>
+          </a:p>
+        </p:txBody>
+      </p:sp>
       <p:sp>
         <p:nvSpPr>
           <p:cNvPr id="7" name="TextBox 6"/>
@@ -5928,8 +5317,8 @@
         </p:nvSpPr>
         <p:spPr>
           <a:xfrm>
-            <a:off x="502920" y="4983480"/>
-            <a:ext cx="11155680" cy="822960"/>
+            <a:off x="1371600" y="1719072"/>
+            <a:ext cx="1965960" cy="320040"/>
           </a:xfrm>
           <a:prstGeom prst="rect">
             <a:avLst/>
@@ -5937,60 +5326,215 @@
           <a:noFill/>
         </p:spPr>
         <p:txBody>
-          <a:bodyPr wrap="square" lIns="0" rIns="0" tIns="0" bIns="0">
+          <a:bodyPr wrap="square" lIns="0" rIns="0" tIns="0" bIns="0" anchor="ctr">
             <a:spAutoFit/>
           </a:bodyPr>
           <a:lstStyle/>
           <a:p>
-            <a:pPr algn="l">
+            <a:pPr algn="ctr">
               <a:spcAft>
                 <a:spcPts val="200"/>
               </a:spcAft>
             </a:pPr>
             <a:r>
-              <a:rPr sz="1100" b="1" i="0">
-                <a:solidFill>
-                  <a:srgbClr val="3A106E"/>
-                </a:solidFill>
-                <a:latin typeface="Yu Gothic"/>
-                <a:ea typeface="Yu Gothic"/>
-                <a:cs typeface="Yu Gothic"/>
-              </a:rPr>
-              <a:t>分科会の進め方のルール　</a:t>
-            </a:r>
-            <a:r>
-              <a:rPr sz="1000" b="0" i="0">
-                <a:solidFill>
-                  <a:srgbClr val="262630"/>
-                </a:solidFill>
-                <a:latin typeface="Yu Gothic"/>
-                <a:ea typeface="Yu Gothic"/>
-                <a:cs typeface="Yu Gothic"/>
-              </a:rPr>
-              <a:t>■ 資料の作り込みなし（Wordのメモで運営）　■ 議題は「共有・議論・決定」の3つに必ず区分（全部が“共有”になったら赤信号）　■ 会議の最後に「戦略会議に上げる論点」を確定して事務局へ渡す</a:t>
-            </a:r>
-          </a:p>
-        </p:txBody>
-      </p:sp>
-      <p:sp>
-        <p:nvSpPr>
-          <p:cNvPr id="8" name="Rectangle 7"/>
+              <a:rPr sz="1200" b="1" i="0">
+                <a:solidFill>
+                  <a:srgbClr val="5F5F6E"/>
+                </a:solidFill>
+                <a:latin typeface="Yu Gothic"/>
+                <a:ea typeface="Yu Gothic"/>
+                <a:cs typeface="Yu Gothic"/>
+              </a:rPr>
+              <a:t>月</a:t>
+            </a:r>
+          </a:p>
+        </p:txBody>
+      </p:sp>
+      <p:sp>
+        <p:nvSpPr>
+          <p:cNvPr id="8" name="TextBox 7"/>
+          <p:cNvSpPr txBox="1"/>
+          <p:nvPr/>
+        </p:nvSpPr>
+        <p:spPr>
+          <a:xfrm>
+            <a:off x="3383280" y="1719072"/>
+            <a:ext cx="1965960" cy="320040"/>
+          </a:xfrm>
+          <a:prstGeom prst="rect">
+            <a:avLst/>
+          </a:prstGeom>
+          <a:noFill/>
+        </p:spPr>
+        <p:txBody>
+          <a:bodyPr wrap="square" lIns="0" rIns="0" tIns="0" bIns="0" anchor="ctr">
+            <a:spAutoFit/>
+          </a:bodyPr>
+          <a:lstStyle/>
+          <a:p>
+            <a:pPr algn="ctr">
+              <a:spcAft>
+                <a:spcPts val="200"/>
+              </a:spcAft>
+            </a:pPr>
+            <a:r>
+              <a:rPr sz="1200" b="1" i="0">
+                <a:solidFill>
+                  <a:srgbClr val="5F5F6E"/>
+                </a:solidFill>
+                <a:latin typeface="Yu Gothic"/>
+                <a:ea typeface="Yu Gothic"/>
+                <a:cs typeface="Yu Gothic"/>
+              </a:rPr>
+              <a:t>火</a:t>
+            </a:r>
+          </a:p>
+        </p:txBody>
+      </p:sp>
+      <p:sp>
+        <p:nvSpPr>
+          <p:cNvPr id="9" name="TextBox 8"/>
+          <p:cNvSpPr txBox="1"/>
+          <p:nvPr/>
+        </p:nvSpPr>
+        <p:spPr>
+          <a:xfrm>
+            <a:off x="5394960" y="1719072"/>
+            <a:ext cx="1965960" cy="320040"/>
+          </a:xfrm>
+          <a:prstGeom prst="rect">
+            <a:avLst/>
+          </a:prstGeom>
+          <a:noFill/>
+        </p:spPr>
+        <p:txBody>
+          <a:bodyPr wrap="square" lIns="0" rIns="0" tIns="0" bIns="0" anchor="ctr">
+            <a:spAutoFit/>
+          </a:bodyPr>
+          <a:lstStyle/>
+          <a:p>
+            <a:pPr algn="ctr">
+              <a:spcAft>
+                <a:spcPts val="200"/>
+              </a:spcAft>
+            </a:pPr>
+            <a:r>
+              <a:rPr sz="1200" b="1" i="0">
+                <a:solidFill>
+                  <a:srgbClr val="5F5F6E"/>
+                </a:solidFill>
+                <a:latin typeface="Yu Gothic"/>
+                <a:ea typeface="Yu Gothic"/>
+                <a:cs typeface="Yu Gothic"/>
+              </a:rPr>
+              <a:t>水</a:t>
+            </a:r>
+          </a:p>
+        </p:txBody>
+      </p:sp>
+      <p:sp>
+        <p:nvSpPr>
+          <p:cNvPr id="10" name="TextBox 9"/>
+          <p:cNvSpPr txBox="1"/>
+          <p:nvPr/>
+        </p:nvSpPr>
+        <p:spPr>
+          <a:xfrm>
+            <a:off x="7406640" y="1719072"/>
+            <a:ext cx="1965960" cy="320040"/>
+          </a:xfrm>
+          <a:prstGeom prst="rect">
+            <a:avLst/>
+          </a:prstGeom>
+          <a:noFill/>
+        </p:spPr>
+        <p:txBody>
+          <a:bodyPr wrap="square" lIns="0" rIns="0" tIns="0" bIns="0" anchor="ctr">
+            <a:spAutoFit/>
+          </a:bodyPr>
+          <a:lstStyle/>
+          <a:p>
+            <a:pPr algn="ctr">
+              <a:spcAft>
+                <a:spcPts val="200"/>
+              </a:spcAft>
+            </a:pPr>
+            <a:r>
+              <a:rPr sz="1200" b="1" i="0">
+                <a:solidFill>
+                  <a:srgbClr val="5F5F6E"/>
+                </a:solidFill>
+                <a:latin typeface="Yu Gothic"/>
+                <a:ea typeface="Yu Gothic"/>
+                <a:cs typeface="Yu Gothic"/>
+              </a:rPr>
+              <a:t>木</a:t>
+            </a:r>
+          </a:p>
+        </p:txBody>
+      </p:sp>
+      <p:sp>
+        <p:nvSpPr>
+          <p:cNvPr id="11" name="TextBox 10"/>
+          <p:cNvSpPr txBox="1"/>
+          <p:nvPr/>
+        </p:nvSpPr>
+        <p:spPr>
+          <a:xfrm>
+            <a:off x="9418320" y="1719072"/>
+            <a:ext cx="1965960" cy="320040"/>
+          </a:xfrm>
+          <a:prstGeom prst="rect">
+            <a:avLst/>
+          </a:prstGeom>
+          <a:noFill/>
+        </p:spPr>
+        <p:txBody>
+          <a:bodyPr wrap="square" lIns="0" rIns="0" tIns="0" bIns="0" anchor="ctr">
+            <a:spAutoFit/>
+          </a:bodyPr>
+          <a:lstStyle/>
+          <a:p>
+            <a:pPr algn="ctr">
+              <a:spcAft>
+                <a:spcPts val="200"/>
+              </a:spcAft>
+            </a:pPr>
+            <a:r>
+              <a:rPr sz="1200" b="1" i="0">
+                <a:solidFill>
+                  <a:srgbClr val="5F5F6E"/>
+                </a:solidFill>
+                <a:latin typeface="Yu Gothic"/>
+                <a:ea typeface="Yu Gothic"/>
+                <a:cs typeface="Yu Gothic"/>
+              </a:rPr>
+              <a:t>金</a:t>
+            </a:r>
+          </a:p>
+        </p:txBody>
+      </p:sp>
+      <p:sp>
+        <p:nvSpPr>
+          <p:cNvPr id="12" name="Rounded Rectangle 11"/>
           <p:cNvSpPr/>
           <p:nvPr/>
         </p:nvSpPr>
         <p:spPr>
           <a:xfrm>
-            <a:off x="502920" y="5870448"/>
-            <a:ext cx="11183112" cy="566928"/>
-          </a:xfrm>
-          <a:prstGeom prst="rect">
+            <a:off x="1371600" y="2103120"/>
+            <a:ext cx="1965960" cy="1371600"/>
+          </a:xfrm>
+          <a:prstGeom prst="roundRect">
             <a:avLst/>
           </a:prstGeom>
           <a:solidFill>
-            <a:srgbClr val="F3EFFB"/>
+            <a:srgbClr val="F7F7F9"/>
           </a:solidFill>
-          <a:ln>
-            <a:noFill/>
+          <a:ln w="12700">
+            <a:solidFill>
+              <a:srgbClr val="D9D9E0"/>
+            </a:solidFill>
           </a:ln>
           <a:effectLst/>
         </p:spPr>
@@ -6018,16 +5562,640 @@
       </p:sp>
       <p:sp>
         <p:nvSpPr>
-          <p:cNvPr id="9" name="Rectangle 8"/>
+          <p:cNvPr id="13" name="Rounded Rectangle 12"/>
           <p:cNvSpPr/>
           <p:nvPr/>
         </p:nvSpPr>
         <p:spPr>
           <a:xfrm>
-            <a:off x="502920" y="5870448"/>
-            <a:ext cx="38100" cy="566928"/>
-          </a:xfrm>
-          <a:prstGeom prst="rect">
+            <a:off x="3383280" y="2103120"/>
+            <a:ext cx="1965960" cy="1371600"/>
+          </a:xfrm>
+          <a:prstGeom prst="roundRect">
+            <a:avLst/>
+          </a:prstGeom>
+          <a:solidFill>
+            <a:srgbClr val="F7F7F9"/>
+          </a:solidFill>
+          <a:ln w="12700">
+            <a:solidFill>
+              <a:srgbClr val="D9D9E0"/>
+            </a:solidFill>
+          </a:ln>
+          <a:effectLst/>
+        </p:spPr>
+        <p:style>
+          <a:lnRef idx="1">
+            <a:schemeClr val="accent1"/>
+          </a:lnRef>
+          <a:fillRef idx="3">
+            <a:schemeClr val="accent1"/>
+          </a:fillRef>
+          <a:effectRef idx="2">
+            <a:schemeClr val="accent1"/>
+          </a:effectRef>
+          <a:fontRef idx="minor">
+            <a:schemeClr val="lt1"/>
+          </a:fontRef>
+        </p:style>
+        <p:txBody>
+          <a:bodyPr rtlCol="0" anchor="ctr"/>
+          <a:lstStyle/>
+          <a:p>
+            <a:pPr algn="ctr"/>
+          </a:p>
+        </p:txBody>
+      </p:sp>
+      <p:sp>
+        <p:nvSpPr>
+          <p:cNvPr id="14" name="Rounded Rectangle 13"/>
+          <p:cNvSpPr/>
+          <p:nvPr/>
+        </p:nvSpPr>
+        <p:spPr>
+          <a:xfrm>
+            <a:off x="5394960" y="2103120"/>
+            <a:ext cx="1965960" cy="1371600"/>
+          </a:xfrm>
+          <a:prstGeom prst="roundRect">
+            <a:avLst/>
+          </a:prstGeom>
+          <a:solidFill>
+            <a:srgbClr val="F7F7F9"/>
+          </a:solidFill>
+          <a:ln w="12700">
+            <a:solidFill>
+              <a:srgbClr val="D9D9E0"/>
+            </a:solidFill>
+          </a:ln>
+          <a:effectLst/>
+        </p:spPr>
+        <p:style>
+          <a:lnRef idx="1">
+            <a:schemeClr val="accent1"/>
+          </a:lnRef>
+          <a:fillRef idx="3">
+            <a:schemeClr val="accent1"/>
+          </a:fillRef>
+          <a:effectRef idx="2">
+            <a:schemeClr val="accent1"/>
+          </a:effectRef>
+          <a:fontRef idx="minor">
+            <a:schemeClr val="lt1"/>
+          </a:fontRef>
+        </p:style>
+        <p:txBody>
+          <a:bodyPr rtlCol="0" anchor="ctr"/>
+          <a:lstStyle/>
+          <a:p>
+            <a:pPr algn="ctr"/>
+          </a:p>
+        </p:txBody>
+      </p:sp>
+      <p:sp>
+        <p:nvSpPr>
+          <p:cNvPr id="15" name="Rounded Rectangle 14"/>
+          <p:cNvSpPr/>
+          <p:nvPr/>
+        </p:nvSpPr>
+        <p:spPr>
+          <a:xfrm>
+            <a:off x="7406640" y="2103120"/>
+            <a:ext cx="1965960" cy="1371600"/>
+          </a:xfrm>
+          <a:prstGeom prst="roundRect">
+            <a:avLst/>
+          </a:prstGeom>
+          <a:solidFill>
+            <a:srgbClr val="F7F7F9"/>
+          </a:solidFill>
+          <a:ln w="12700">
+            <a:solidFill>
+              <a:srgbClr val="D9D9E0"/>
+            </a:solidFill>
+          </a:ln>
+          <a:effectLst/>
+        </p:spPr>
+        <p:style>
+          <a:lnRef idx="1">
+            <a:schemeClr val="accent1"/>
+          </a:lnRef>
+          <a:fillRef idx="3">
+            <a:schemeClr val="accent1"/>
+          </a:fillRef>
+          <a:effectRef idx="2">
+            <a:schemeClr val="accent1"/>
+          </a:effectRef>
+          <a:fontRef idx="minor">
+            <a:schemeClr val="lt1"/>
+          </a:fontRef>
+        </p:style>
+        <p:txBody>
+          <a:bodyPr rtlCol="0" anchor="ctr"/>
+          <a:lstStyle/>
+          <a:p>
+            <a:pPr algn="ctr"/>
+          </a:p>
+        </p:txBody>
+      </p:sp>
+      <p:sp>
+        <p:nvSpPr>
+          <p:cNvPr id="16" name="Rounded Rectangle 15"/>
+          <p:cNvSpPr/>
+          <p:nvPr/>
+        </p:nvSpPr>
+        <p:spPr>
+          <a:xfrm>
+            <a:off x="9418320" y="2103120"/>
+            <a:ext cx="1965960" cy="1371600"/>
+          </a:xfrm>
+          <a:prstGeom prst="roundRect">
+            <a:avLst/>
+          </a:prstGeom>
+          <a:solidFill>
+            <a:srgbClr val="F7F7F9"/>
+          </a:solidFill>
+          <a:ln w="12700">
+            <a:solidFill>
+              <a:srgbClr val="D9D9E0"/>
+            </a:solidFill>
+          </a:ln>
+          <a:effectLst/>
+        </p:spPr>
+        <p:style>
+          <a:lnRef idx="1">
+            <a:schemeClr val="accent1"/>
+          </a:lnRef>
+          <a:fillRef idx="3">
+            <a:schemeClr val="accent1"/>
+          </a:fillRef>
+          <a:effectRef idx="2">
+            <a:schemeClr val="accent1"/>
+          </a:effectRef>
+          <a:fontRef idx="minor">
+            <a:schemeClr val="lt1"/>
+          </a:fontRef>
+        </p:style>
+        <p:txBody>
+          <a:bodyPr rtlCol="0" anchor="ctr"/>
+          <a:lstStyle/>
+          <a:p>
+            <a:pPr algn="ctr"/>
+          </a:p>
+        </p:txBody>
+      </p:sp>
+      <p:sp>
+        <p:nvSpPr>
+          <p:cNvPr id="17" name="Rounded Rectangle 16"/>
+          <p:cNvSpPr/>
+          <p:nvPr/>
+        </p:nvSpPr>
+        <p:spPr>
+          <a:xfrm>
+            <a:off x="1371600" y="3703320"/>
+            <a:ext cx="1965960" cy="1371600"/>
+          </a:xfrm>
+          <a:prstGeom prst="roundRect">
+            <a:avLst/>
+          </a:prstGeom>
+          <a:solidFill>
+            <a:srgbClr val="F7F7F9"/>
+          </a:solidFill>
+          <a:ln w="12700">
+            <a:solidFill>
+              <a:srgbClr val="D9D9E0"/>
+            </a:solidFill>
+          </a:ln>
+          <a:effectLst/>
+        </p:spPr>
+        <p:style>
+          <a:lnRef idx="1">
+            <a:schemeClr val="accent1"/>
+          </a:lnRef>
+          <a:fillRef idx="3">
+            <a:schemeClr val="accent1"/>
+          </a:fillRef>
+          <a:effectRef idx="2">
+            <a:schemeClr val="accent1"/>
+          </a:effectRef>
+          <a:fontRef idx="minor">
+            <a:schemeClr val="lt1"/>
+          </a:fontRef>
+        </p:style>
+        <p:txBody>
+          <a:bodyPr rtlCol="0" anchor="ctr"/>
+          <a:lstStyle/>
+          <a:p>
+            <a:pPr algn="ctr"/>
+          </a:p>
+        </p:txBody>
+      </p:sp>
+      <p:sp>
+        <p:nvSpPr>
+          <p:cNvPr id="18" name="Rounded Rectangle 17"/>
+          <p:cNvSpPr/>
+          <p:nvPr/>
+        </p:nvSpPr>
+        <p:spPr>
+          <a:xfrm>
+            <a:off x="3383280" y="3703320"/>
+            <a:ext cx="1965960" cy="1371600"/>
+          </a:xfrm>
+          <a:prstGeom prst="roundRect">
+            <a:avLst/>
+          </a:prstGeom>
+          <a:solidFill>
+            <a:srgbClr val="F7F7F9"/>
+          </a:solidFill>
+          <a:ln w="12700">
+            <a:solidFill>
+              <a:srgbClr val="D9D9E0"/>
+            </a:solidFill>
+          </a:ln>
+          <a:effectLst/>
+        </p:spPr>
+        <p:style>
+          <a:lnRef idx="1">
+            <a:schemeClr val="accent1"/>
+          </a:lnRef>
+          <a:fillRef idx="3">
+            <a:schemeClr val="accent1"/>
+          </a:fillRef>
+          <a:effectRef idx="2">
+            <a:schemeClr val="accent1"/>
+          </a:effectRef>
+          <a:fontRef idx="minor">
+            <a:schemeClr val="lt1"/>
+          </a:fontRef>
+        </p:style>
+        <p:txBody>
+          <a:bodyPr rtlCol="0" anchor="ctr"/>
+          <a:lstStyle/>
+          <a:p>
+            <a:pPr algn="ctr"/>
+          </a:p>
+        </p:txBody>
+      </p:sp>
+      <p:sp>
+        <p:nvSpPr>
+          <p:cNvPr id="19" name="Rounded Rectangle 18"/>
+          <p:cNvSpPr/>
+          <p:nvPr/>
+        </p:nvSpPr>
+        <p:spPr>
+          <a:xfrm>
+            <a:off x="5394960" y="3703320"/>
+            <a:ext cx="1965960" cy="1371600"/>
+          </a:xfrm>
+          <a:prstGeom prst="roundRect">
+            <a:avLst/>
+          </a:prstGeom>
+          <a:solidFill>
+            <a:srgbClr val="F7F7F9"/>
+          </a:solidFill>
+          <a:ln w="12700">
+            <a:solidFill>
+              <a:srgbClr val="D9D9E0"/>
+            </a:solidFill>
+          </a:ln>
+          <a:effectLst/>
+        </p:spPr>
+        <p:style>
+          <a:lnRef idx="1">
+            <a:schemeClr val="accent1"/>
+          </a:lnRef>
+          <a:fillRef idx="3">
+            <a:schemeClr val="accent1"/>
+          </a:fillRef>
+          <a:effectRef idx="2">
+            <a:schemeClr val="accent1"/>
+          </a:effectRef>
+          <a:fontRef idx="minor">
+            <a:schemeClr val="lt1"/>
+          </a:fontRef>
+        </p:style>
+        <p:txBody>
+          <a:bodyPr rtlCol="0" anchor="ctr"/>
+          <a:lstStyle/>
+          <a:p>
+            <a:pPr algn="ctr"/>
+          </a:p>
+        </p:txBody>
+      </p:sp>
+      <p:sp>
+        <p:nvSpPr>
+          <p:cNvPr id="20" name="Rounded Rectangle 19"/>
+          <p:cNvSpPr/>
+          <p:nvPr/>
+        </p:nvSpPr>
+        <p:spPr>
+          <a:xfrm>
+            <a:off x="7406640" y="3703320"/>
+            <a:ext cx="1965960" cy="1371600"/>
+          </a:xfrm>
+          <a:prstGeom prst="roundRect">
+            <a:avLst/>
+          </a:prstGeom>
+          <a:solidFill>
+            <a:srgbClr val="F7F7F9"/>
+          </a:solidFill>
+          <a:ln w="12700">
+            <a:solidFill>
+              <a:srgbClr val="D9D9E0"/>
+            </a:solidFill>
+          </a:ln>
+          <a:effectLst/>
+        </p:spPr>
+        <p:style>
+          <a:lnRef idx="1">
+            <a:schemeClr val="accent1"/>
+          </a:lnRef>
+          <a:fillRef idx="3">
+            <a:schemeClr val="accent1"/>
+          </a:fillRef>
+          <a:effectRef idx="2">
+            <a:schemeClr val="accent1"/>
+          </a:effectRef>
+          <a:fontRef idx="minor">
+            <a:schemeClr val="lt1"/>
+          </a:fontRef>
+        </p:style>
+        <p:txBody>
+          <a:bodyPr rtlCol="0" anchor="ctr"/>
+          <a:lstStyle/>
+          <a:p>
+            <a:pPr algn="ctr"/>
+          </a:p>
+        </p:txBody>
+      </p:sp>
+      <p:sp>
+        <p:nvSpPr>
+          <p:cNvPr id="21" name="Rounded Rectangle 20"/>
+          <p:cNvSpPr/>
+          <p:nvPr/>
+        </p:nvSpPr>
+        <p:spPr>
+          <a:xfrm>
+            <a:off x="9418320" y="3703320"/>
+            <a:ext cx="1965960" cy="1371600"/>
+          </a:xfrm>
+          <a:prstGeom prst="roundRect">
+            <a:avLst/>
+          </a:prstGeom>
+          <a:solidFill>
+            <a:srgbClr val="F7F7F9"/>
+          </a:solidFill>
+          <a:ln w="12700">
+            <a:solidFill>
+              <a:srgbClr val="D9D9E0"/>
+            </a:solidFill>
+          </a:ln>
+          <a:effectLst/>
+        </p:spPr>
+        <p:style>
+          <a:lnRef idx="1">
+            <a:schemeClr val="accent1"/>
+          </a:lnRef>
+          <a:fillRef idx="3">
+            <a:schemeClr val="accent1"/>
+          </a:fillRef>
+          <a:effectRef idx="2">
+            <a:schemeClr val="accent1"/>
+          </a:effectRef>
+          <a:fontRef idx="minor">
+            <a:schemeClr val="lt1"/>
+          </a:fontRef>
+        </p:style>
+        <p:txBody>
+          <a:bodyPr rtlCol="0" anchor="ctr"/>
+          <a:lstStyle/>
+          <a:p>
+            <a:pPr algn="ctr"/>
+          </a:p>
+        </p:txBody>
+      </p:sp>
+      <p:sp>
+        <p:nvSpPr>
+          <p:cNvPr id="22" name="Rounded Rectangle 21"/>
+          <p:cNvSpPr/>
+          <p:nvPr/>
+        </p:nvSpPr>
+        <p:spPr>
+          <a:xfrm>
+            <a:off x="3383280" y="2103120"/>
+            <a:ext cx="1965960" cy="1371600"/>
+          </a:xfrm>
+          <a:prstGeom prst="roundRect">
+            <a:avLst/>
+          </a:prstGeom>
+          <a:solidFill>
+            <a:srgbClr val="F3EFFB"/>
+          </a:solidFill>
+          <a:ln w="12700">
+            <a:solidFill>
+              <a:srgbClr val="7823DC"/>
+            </a:solidFill>
+          </a:ln>
+          <a:effectLst/>
+        </p:spPr>
+        <p:style>
+          <a:lnRef idx="1">
+            <a:schemeClr val="accent1"/>
+          </a:lnRef>
+          <a:fillRef idx="3">
+            <a:schemeClr val="accent1"/>
+          </a:fillRef>
+          <a:effectRef idx="2">
+            <a:schemeClr val="accent1"/>
+          </a:effectRef>
+          <a:fontRef idx="minor">
+            <a:schemeClr val="lt1"/>
+          </a:fontRef>
+        </p:style>
+        <p:txBody>
+          <a:bodyPr rtlCol="0" anchor="ctr"/>
+          <a:lstStyle/>
+          <a:p>
+            <a:pPr algn="ctr"/>
+          </a:p>
+        </p:txBody>
+      </p:sp>
+      <p:sp>
+        <p:nvSpPr>
+          <p:cNvPr id="23" name="TextBox 22"/>
+          <p:cNvSpPr txBox="1"/>
+          <p:nvPr/>
+        </p:nvSpPr>
+        <p:spPr>
+          <a:xfrm>
+            <a:off x="3383280" y="2103120"/>
+            <a:ext cx="1965960" cy="1371600"/>
+          </a:xfrm>
+          <a:prstGeom prst="rect">
+            <a:avLst/>
+          </a:prstGeom>
+          <a:noFill/>
+        </p:spPr>
+        <p:txBody>
+          <a:bodyPr wrap="square" lIns="0" rIns="0" tIns="0" bIns="0" anchor="ctr">
+            <a:spAutoFit/>
+          </a:bodyPr>
+          <a:lstStyle/>
+          <a:p>
+            <a:pPr algn="ctr">
+              <a:spcAft>
+                <a:spcPts val="200"/>
+              </a:spcAft>
+            </a:pPr>
+            <a:r>
+              <a:rPr sz="1300" b="1" i="0">
+                <a:solidFill>
+                  <a:srgbClr val="3A106E"/>
+                </a:solidFill>
+                <a:latin typeface="Yu Gothic"/>
+                <a:ea typeface="Yu Gothic"/>
+                <a:cs typeface="Yu Gothic"/>
+              </a:rPr>
+              <a:t>分科会 ×3</a:t>
+            </a:r>
+          </a:p>
+          <a:p>
+            <a:pPr algn="ctr">
+              <a:spcAft>
+                <a:spcPts val="200"/>
+              </a:spcAft>
+            </a:pPr>
+            <a:r>
+              <a:rPr sz="1000" b="0" i="0">
+                <a:solidFill>
+                  <a:srgbClr val="5F5F6E"/>
+                </a:solidFill>
+                <a:latin typeface="Yu Gothic"/>
+                <a:ea typeface="Yu Gothic"/>
+                <a:cs typeface="Yu Gothic"/>
+              </a:rPr>
+              <a:t>各60〜90分</a:t>
+            </a:r>
+          </a:p>
+        </p:txBody>
+      </p:sp>
+      <p:sp>
+        <p:nvSpPr>
+          <p:cNvPr id="24" name="Rounded Rectangle 23"/>
+          <p:cNvSpPr/>
+          <p:nvPr/>
+        </p:nvSpPr>
+        <p:spPr>
+          <a:xfrm>
+            <a:off x="3383280" y="3703320"/>
+            <a:ext cx="1965960" cy="1371600"/>
+          </a:xfrm>
+          <a:prstGeom prst="roundRect">
+            <a:avLst/>
+          </a:prstGeom>
+          <a:solidFill>
+            <a:srgbClr val="F3EFFB"/>
+          </a:solidFill>
+          <a:ln w="12700">
+            <a:solidFill>
+              <a:srgbClr val="7823DC"/>
+            </a:solidFill>
+          </a:ln>
+          <a:effectLst/>
+        </p:spPr>
+        <p:style>
+          <a:lnRef idx="1">
+            <a:schemeClr val="accent1"/>
+          </a:lnRef>
+          <a:fillRef idx="3">
+            <a:schemeClr val="accent1"/>
+          </a:fillRef>
+          <a:effectRef idx="2">
+            <a:schemeClr val="accent1"/>
+          </a:effectRef>
+          <a:fontRef idx="minor">
+            <a:schemeClr val="lt1"/>
+          </a:fontRef>
+        </p:style>
+        <p:txBody>
+          <a:bodyPr rtlCol="0" anchor="ctr"/>
+          <a:lstStyle/>
+          <a:p>
+            <a:pPr algn="ctr"/>
+          </a:p>
+        </p:txBody>
+      </p:sp>
+      <p:sp>
+        <p:nvSpPr>
+          <p:cNvPr id="25" name="TextBox 24"/>
+          <p:cNvSpPr txBox="1"/>
+          <p:nvPr/>
+        </p:nvSpPr>
+        <p:spPr>
+          <a:xfrm>
+            <a:off x="3383280" y="3703320"/>
+            <a:ext cx="1965960" cy="1371600"/>
+          </a:xfrm>
+          <a:prstGeom prst="rect">
+            <a:avLst/>
+          </a:prstGeom>
+          <a:noFill/>
+        </p:spPr>
+        <p:txBody>
+          <a:bodyPr wrap="square" lIns="0" rIns="0" tIns="0" bIns="0" anchor="ctr">
+            <a:spAutoFit/>
+          </a:bodyPr>
+          <a:lstStyle/>
+          <a:p>
+            <a:pPr algn="ctr">
+              <a:spcAft>
+                <a:spcPts val="200"/>
+              </a:spcAft>
+            </a:pPr>
+            <a:r>
+              <a:rPr sz="1300" b="1" i="0">
+                <a:solidFill>
+                  <a:srgbClr val="3A106E"/>
+                </a:solidFill>
+                <a:latin typeface="Yu Gothic"/>
+                <a:ea typeface="Yu Gothic"/>
+                <a:cs typeface="Yu Gothic"/>
+              </a:rPr>
+              <a:t>分科会 ×3</a:t>
+            </a:r>
+          </a:p>
+          <a:p>
+            <a:pPr algn="ctr">
+              <a:spcAft>
+                <a:spcPts val="200"/>
+              </a:spcAft>
+            </a:pPr>
+            <a:r>
+              <a:rPr sz="1000" b="0" i="0">
+                <a:solidFill>
+                  <a:srgbClr val="5F5F6E"/>
+                </a:solidFill>
+                <a:latin typeface="Yu Gothic"/>
+                <a:ea typeface="Yu Gothic"/>
+                <a:cs typeface="Yu Gothic"/>
+              </a:rPr>
+              <a:t>各60〜90分</a:t>
+            </a:r>
+          </a:p>
+        </p:txBody>
+      </p:sp>
+      <p:sp>
+        <p:nvSpPr>
+          <p:cNvPr id="26" name="Rounded Rectangle 25"/>
+          <p:cNvSpPr/>
+          <p:nvPr/>
+        </p:nvSpPr>
+        <p:spPr>
+          <a:xfrm>
+            <a:off x="7406640" y="2103120"/>
+            <a:ext cx="1965960" cy="1371600"/>
+          </a:xfrm>
+          <a:prstGeom prst="roundRect">
             <a:avLst/>
           </a:prstGeom>
           <a:solidFill>
@@ -6062,14 +6230,14 @@
       </p:sp>
       <p:sp>
         <p:nvSpPr>
-          <p:cNvPr id="10" name="TextBox 9"/>
+          <p:cNvPr id="27" name="TextBox 26"/>
           <p:cNvSpPr txBox="1"/>
           <p:nvPr/>
         </p:nvSpPr>
         <p:spPr>
           <a:xfrm>
-            <a:off x="685800" y="5934456"/>
-            <a:ext cx="10881360" cy="457200"/>
+            <a:off x="7406640" y="2103120"/>
+            <a:ext cx="1965960" cy="1371600"/>
           </a:xfrm>
           <a:prstGeom prst="rect">
             <a:avLst/>
@@ -6082,52 +6250,59 @@
           </a:bodyPr>
           <a:lstStyle/>
           <a:p>
-            <a:pPr algn="l">
-              <a:spcAft>
-                <a:spcPts val="400"/>
-              </a:spcAft>
-            </a:pPr>
-            <a:r>
-              <a:rPr sz="1000" b="1" i="0">
-                <a:solidFill>
-                  <a:srgbClr val="7823DC"/>
-                </a:solidFill>
-                <a:latin typeface="Yu Gothic"/>
-                <a:ea typeface="Yu Gothic"/>
-                <a:cs typeface="Yu Gothic"/>
-              </a:rPr>
-              <a:t>ここだけ覚えて帰ってください　</a:t>
-            </a:r>
-            <a:r>
-              <a:rPr sz="1000" b="0" i="0">
-                <a:solidFill>
-                  <a:srgbClr val="262630"/>
-                </a:solidFill>
-                <a:latin typeface="Yu Gothic"/>
-                <a:ea typeface="Yu Gothic"/>
-                <a:cs typeface="Yu Gothic"/>
-              </a:rPr>
-              <a:t>皆さんの部門のメンバーが分科会の主力になります。人選のご相談をこの後させてください</a:t>
-            </a:r>
-          </a:p>
-        </p:txBody>
-      </p:sp>
-      <p:sp>
-        <p:nvSpPr>
-          <p:cNvPr id="11" name="Rectangle 10"/>
+            <a:pPr algn="ctr">
+              <a:spcAft>
+                <a:spcPts val="200"/>
+              </a:spcAft>
+            </a:pPr>
+            <a:r>
+              <a:rPr sz="1400" b="1" i="0">
+                <a:solidFill>
+                  <a:srgbClr val="FFFFFF"/>
+                </a:solidFill>
+                <a:latin typeface="Yu Gothic"/>
+                <a:ea typeface="Yu Gothic"/>
+                <a:cs typeface="Yu Gothic"/>
+              </a:rPr>
+              <a:t>戦略会議</a:t>
+            </a:r>
+          </a:p>
+          <a:p>
+            <a:pPr algn="ctr">
+              <a:spcAft>
+                <a:spcPts val="200"/>
+              </a:spcAft>
+            </a:pPr>
+            <a:r>
+              <a:rPr sz="1050" b="0" i="0">
+                <a:solidFill>
+                  <a:srgbClr val="FFFFFF"/>
+                </a:solidFill>
+                <a:latin typeface="Yu Gothic"/>
+                <a:ea typeface="Yu Gothic"/>
+                <a:cs typeface="Yu Gothic"/>
+              </a:rPr>
+              <a:t>社長</a:t>
+            </a:r>
+          </a:p>
+        </p:txBody>
+      </p:sp>
+      <p:sp>
+        <p:nvSpPr>
+          <p:cNvPr id="28" name="Rounded Rectangle 27"/>
           <p:cNvSpPr/>
           <p:nvPr/>
         </p:nvSpPr>
         <p:spPr>
           <a:xfrm>
-            <a:off x="502920" y="6510528"/>
-            <a:ext cx="11183112" cy="15240"/>
-          </a:xfrm>
-          <a:prstGeom prst="rect">
+            <a:off x="7406640" y="3703320"/>
+            <a:ext cx="1965960" cy="1371600"/>
+          </a:xfrm>
+          <a:prstGeom prst="roundRect">
             <a:avLst/>
           </a:prstGeom>
           <a:solidFill>
-            <a:srgbClr val="D9D9E0"/>
+            <a:srgbClr val="3A106E"/>
           </a:solidFill>
           <a:ln>
             <a:noFill/>
@@ -6158,14 +6333,158 @@
       </p:sp>
       <p:sp>
         <p:nvSpPr>
-          <p:cNvPr id="12" name="TextBox 11"/>
+          <p:cNvPr id="29" name="TextBox 28"/>
           <p:cNvSpPr txBox="1"/>
           <p:nvPr/>
         </p:nvSpPr>
         <p:spPr>
           <a:xfrm>
-            <a:off x="502920" y="6565392"/>
-            <a:ext cx="8229600" cy="274320"/>
+            <a:off x="7406640" y="3703320"/>
+            <a:ext cx="1965960" cy="1371600"/>
+          </a:xfrm>
+          <a:prstGeom prst="rect">
+            <a:avLst/>
+          </a:prstGeom>
+          <a:noFill/>
+        </p:spPr>
+        <p:txBody>
+          <a:bodyPr wrap="square" lIns="0" rIns="0" tIns="0" bIns="0" anchor="ctr">
+            <a:spAutoFit/>
+          </a:bodyPr>
+          <a:lstStyle/>
+          <a:p>
+            <a:pPr algn="ctr">
+              <a:spcAft>
+                <a:spcPts val="200"/>
+              </a:spcAft>
+            </a:pPr>
+            <a:r>
+              <a:rPr sz="1400" b="1" i="0">
+                <a:solidFill>
+                  <a:srgbClr val="FFFFFF"/>
+                </a:solidFill>
+                <a:latin typeface="Yu Gothic"/>
+                <a:ea typeface="Yu Gothic"/>
+                <a:cs typeface="Yu Gothic"/>
+              </a:rPr>
+              <a:t>点検会議</a:t>
+            </a:r>
+          </a:p>
+          <a:p>
+            <a:pPr algn="ctr">
+              <a:spcAft>
+                <a:spcPts val="200"/>
+              </a:spcAft>
+            </a:pPr>
+            <a:r>
+              <a:rPr sz="1050" b="0" i="0">
+                <a:solidFill>
+                  <a:srgbClr val="FFFFFF"/>
+                </a:solidFill>
+                <a:latin typeface="Yu Gothic"/>
+                <a:ea typeface="Yu Gothic"/>
+                <a:cs typeface="Yu Gothic"/>
+              </a:rPr>
+              <a:t>会長</a:t>
+            </a:r>
+          </a:p>
+        </p:txBody>
+      </p:sp>
+      <p:sp>
+        <p:nvSpPr>
+          <p:cNvPr id="30" name="Rectangle 29"/>
+          <p:cNvSpPr/>
+          <p:nvPr/>
+        </p:nvSpPr>
+        <p:spPr>
+          <a:xfrm>
+            <a:off x="1371600" y="5349240"/>
+            <a:ext cx="10012680" cy="502920"/>
+          </a:xfrm>
+          <a:prstGeom prst="rect">
+            <a:avLst/>
+          </a:prstGeom>
+          <a:solidFill>
+            <a:srgbClr val="F7F7F9"/>
+          </a:solidFill>
+          <a:ln>
+            <a:noFill/>
+          </a:ln>
+          <a:effectLst/>
+        </p:spPr>
+        <p:style>
+          <a:lnRef idx="1">
+            <a:schemeClr val="accent1"/>
+          </a:lnRef>
+          <a:fillRef idx="3">
+            <a:schemeClr val="accent1"/>
+          </a:fillRef>
+          <a:effectRef idx="2">
+            <a:schemeClr val="accent1"/>
+          </a:effectRef>
+          <a:fontRef idx="minor">
+            <a:schemeClr val="lt1"/>
+          </a:fontRef>
+        </p:style>
+        <p:txBody>
+          <a:bodyPr rtlCol="0" anchor="ctr"/>
+          <a:lstStyle/>
+          <a:p>
+            <a:pPr algn="ctr"/>
+          </a:p>
+        </p:txBody>
+      </p:sp>
+      <p:sp>
+        <p:nvSpPr>
+          <p:cNvPr id="31" name="TextBox 30"/>
+          <p:cNvSpPr txBox="1"/>
+          <p:nvPr/>
+        </p:nvSpPr>
+        <p:spPr>
+          <a:xfrm>
+            <a:off x="1371600" y="5349240"/>
+            <a:ext cx="10012680" cy="502920"/>
+          </a:xfrm>
+          <a:prstGeom prst="rect">
+            <a:avLst/>
+          </a:prstGeom>
+          <a:noFill/>
+        </p:spPr>
+        <p:txBody>
+          <a:bodyPr wrap="square" lIns="0" rIns="0" tIns="0" bIns="0" anchor="ctr">
+            <a:spAutoFit/>
+          </a:bodyPr>
+          <a:lstStyle/>
+          <a:p>
+            <a:pPr algn="ctr">
+              <a:spcAft>
+                <a:spcPts val="200"/>
+              </a:spcAft>
+            </a:pPr>
+            <a:r>
+              <a:rPr sz="1200" b="1" i="0">
+                <a:solidFill>
+                  <a:srgbClr val="5F5F6E"/>
+                </a:solidFill>
+                <a:latin typeface="Yu Gothic"/>
+                <a:ea typeface="Yu Gothic"/>
+                <a:cs typeface="Yu Gothic"/>
+              </a:rPr>
+              <a:t>毎朝：事務局会議 30分（進捗の確認と、次の会議の準備）</a:t>
+            </a:r>
+          </a:p>
+        </p:txBody>
+      </p:sp>
+      <p:sp>
+        <p:nvSpPr>
+          <p:cNvPr id="32" name="TextBox 31"/>
+          <p:cNvSpPr txBox="1"/>
+          <p:nvPr/>
+        </p:nvSpPr>
+        <p:spPr>
+          <a:xfrm>
+            <a:off x="502920" y="5989320"/>
+            <a:ext cx="11155680" cy="457200"/>
           </a:xfrm>
           <a:prstGeom prst="rect">
             <a:avLst/>
@@ -6184,6 +6503,47 @@
               </a:spcAft>
             </a:pPr>
             <a:r>
+              <a:rPr sz="1100" b="0" i="0">
+                <a:solidFill>
+                  <a:srgbClr val="5F5F6E"/>
+                </a:solidFill>
+                <a:latin typeface="Yu Gothic"/>
+                <a:ea typeface="Yu Gothic"/>
+                <a:cs typeface="Yu Gothic"/>
+              </a:rPr>
+              <a:t>※ 曜日は仮。初回に確定します。皆さんに毎回出ていただくのは「自部門に関係する分科会」だけです（週1回）</a:t>
+            </a:r>
+          </a:p>
+        </p:txBody>
+      </p:sp>
+      <p:sp>
+        <p:nvSpPr>
+          <p:cNvPr id="33" name="TextBox 32"/>
+          <p:cNvSpPr txBox="1"/>
+          <p:nvPr/>
+        </p:nvSpPr>
+        <p:spPr>
+          <a:xfrm>
+            <a:off x="502920" y="6565392"/>
+            <a:ext cx="8229600" cy="274320"/>
+          </a:xfrm>
+          <a:prstGeom prst="rect">
+            <a:avLst/>
+          </a:prstGeom>
+          <a:noFill/>
+        </p:spPr>
+        <p:txBody>
+          <a:bodyPr wrap="square" lIns="0" rIns="0" tIns="0" bIns="0">
+            <a:spAutoFit/>
+          </a:bodyPr>
+          <a:lstStyle/>
+          <a:p>
+            <a:pPr algn="l">
+              <a:spcAft>
+                <a:spcPts val="400"/>
+              </a:spcAft>
+            </a:pPr>
+            <a:r>
               <a:rPr sz="750" b="0" i="0">
                 <a:solidFill>
                   <a:srgbClr val="8A8A99"/>
@@ -6192,14 +6552,14 @@
                 <a:ea typeface="Yu Gothic"/>
                 <a:cs typeface="Yu Gothic"/>
               </a:rPr>
-              <a:t>円谷プロダクション｜構造改革の新しい会議の仕組み 部長会共有資料（社外秘）</a:t>
-            </a:r>
-          </a:p>
-        </p:txBody>
-      </p:sp>
-      <p:sp>
-        <p:nvSpPr>
-          <p:cNvPr id="13" name="TextBox 12"/>
+              <a:t>円谷プロダクション｜新しい会議の仕組み（部長会・社外秘）</a:t>
+            </a:r>
+          </a:p>
+        </p:txBody>
+      </p:sp>
+      <p:sp>
+        <p:nvSpPr>
+          <p:cNvPr id="34" name="TextBox 33"/>
           <p:cNvSpPr txBox="1"/>
           <p:nvPr/>
         </p:nvSpPr>
@@ -6264,8 +6624,8 @@
         </p:nvSpPr>
         <p:spPr>
           <a:xfrm>
-            <a:off x="502920" y="256032"/>
-            <a:ext cx="11155680" cy="256032"/>
+            <a:off x="502920" y="320040"/>
+            <a:ext cx="11155680" cy="274320"/>
           </a:xfrm>
           <a:prstGeom prst="rect">
             <a:avLst/>
@@ -6284,7 +6644,7 @@
               </a:spcAft>
             </a:pPr>
             <a:r>
-              <a:rPr sz="1000" b="1" i="0">
+              <a:rPr sz="1100" b="1" i="0">
                 <a:solidFill>
                   <a:srgbClr val="7823DC"/>
                 </a:solidFill>
@@ -6292,7 +6652,7 @@
                 <a:ea typeface="Yu Gothic"/>
                 <a:cs typeface="Yu Gothic"/>
               </a:rPr>
-              <a:t>戦略会議と点検会議（3分）</a:t>
+              <a:t>絵③</a:t>
             </a:r>
           </a:p>
         </p:txBody>
@@ -6305,8 +6665,8 @@
         </p:nvSpPr>
         <p:spPr>
           <a:xfrm>
-            <a:off x="502920" y="512064"/>
-            <a:ext cx="11155680" cy="868680"/>
+            <a:off x="502920" y="621792"/>
+            <a:ext cx="11155680" cy="685800"/>
           </a:xfrm>
           <a:prstGeom prst="rect">
             <a:avLst/>
@@ -6321,11 +6681,11 @@
           <a:p>
             <a:pPr algn="l">
               <a:spcAft>
-                <a:spcPts val="0"/>
-              </a:spcAft>
-            </a:pPr>
-            <a:r>
-              <a:rPr sz="1900" b="1" i="0">
+                <a:spcPts val="400"/>
+              </a:spcAft>
+            </a:pPr>
+            <a:r>
+              <a:rPr sz="2400" b="1" i="0">
                 <a:solidFill>
                   <a:srgbClr val="262630"/>
                 </a:solidFill>
@@ -6333,7 +6693,7 @@
                 <a:ea typeface="Yu Gothic"/>
                 <a:cs typeface="Yu Gothic"/>
               </a:rPr>
-              <a:t>「決め切る場」と「会長が決める場」——2つの会議の違い</a:t>
+              <a:t>困りごとが上がっていく道——例：「監修の戻りが多くて案件が進まない」</a:t>
             </a:r>
           </a:p>
         </p:txBody>
@@ -6346,8 +6706,8 @@
         </p:nvSpPr>
         <p:spPr>
           <a:xfrm>
-            <a:off x="502920" y="1389888"/>
-            <a:ext cx="1463040" cy="33020"/>
+            <a:off x="502920" y="1371600"/>
+            <a:ext cx="1645920" cy="38100"/>
           </a:xfrm>
           <a:prstGeom prst="rect">
             <a:avLst/>
@@ -6384,206 +6744,16 @@
       </p:sp>
       <p:sp>
         <p:nvSpPr>
-          <p:cNvPr id="5" name="TextBox 4"/>
-          <p:cNvSpPr txBox="1"/>
-          <p:nvPr/>
-        </p:nvSpPr>
-        <p:spPr>
-          <a:xfrm>
-            <a:off x="502920" y="1517904"/>
-            <a:ext cx="11155680" cy="310896"/>
-          </a:xfrm>
-          <a:prstGeom prst="rect">
-            <a:avLst/>
-          </a:prstGeom>
-          <a:noFill/>
-        </p:spPr>
-        <p:txBody>
-          <a:bodyPr wrap="square" lIns="0" rIns="0" tIns="0" bIns="0">
-            <a:spAutoFit/>
-          </a:bodyPr>
-          <a:lstStyle/>
-          <a:p>
-            <a:pPr algn="l">
-              <a:spcAft>
-                <a:spcPts val="400"/>
-              </a:spcAft>
-            </a:pPr>
-            <a:r>
-              <a:rPr sz="1150" b="1" i="0">
-                <a:solidFill>
-                  <a:srgbClr val="3A106E"/>
-                </a:solidFill>
-                <a:latin typeface="Yu Gothic"/>
-                <a:ea typeface="Yu Gothic"/>
-                <a:cs typeface="Yu Gothic"/>
-              </a:rPr>
-              <a:t>同じ論点を二度議論しない。それぞれの会議で決めることをはっきり分けます</a:t>
-            </a:r>
-          </a:p>
-        </p:txBody>
-      </p:sp>
-      <p:sp>
-        <p:nvSpPr>
-          <p:cNvPr id="6" name="TextBox 5"/>
-          <p:cNvSpPr txBox="1"/>
-          <p:nvPr/>
-        </p:nvSpPr>
-        <p:spPr>
-          <a:xfrm>
-            <a:off x="502920" y="1865376"/>
-            <a:ext cx="11155680" cy="3931920"/>
-          </a:xfrm>
-          <a:prstGeom prst="rect">
-            <a:avLst/>
-          </a:prstGeom>
-          <a:noFill/>
-        </p:spPr>
-        <p:txBody>
-          <a:bodyPr wrap="square" lIns="0" rIns="0" tIns="0" bIns="0">
-            <a:spAutoFit/>
-          </a:bodyPr>
-          <a:lstStyle/>
-          <a:p>
-            <a:pPr algn="l">
-              <a:spcAft>
-                <a:spcPts val="300"/>
-              </a:spcAft>
-            </a:pPr>
-            <a:r>
-              <a:rPr sz="1200" b="1" i="0">
-                <a:solidFill>
-                  <a:srgbClr val="3A106E"/>
-                </a:solidFill>
-                <a:latin typeface="Yu Gothic"/>
-                <a:ea typeface="Yu Gothic"/>
-                <a:cs typeface="Yu Gothic"/>
-              </a:rPr>
-              <a:t>戦略会議（社長・2週に1回）＝ 自分たちで決められることを決め切る場</a:t>
-            </a:r>
-          </a:p>
-          <a:p>
-            <a:pPr algn="l">
-              <a:spcAft>
-                <a:spcPts val="600"/>
-              </a:spcAft>
-            </a:pPr>
-            <a:r>
-              <a:rPr sz="1150" b="0" i="0">
-                <a:solidFill>
-                  <a:srgbClr val="262630"/>
-                </a:solidFill>
-                <a:latin typeface="Yu Gothic"/>
-                <a:ea typeface="Yu Gothic"/>
-                <a:cs typeface="Yu Gothic"/>
-              </a:rPr>
-              <a:t>■ 15週間の計画に対して進んでいるかの確認／人と時間の配分の判断／部門をまたぐ調整。ここで決められることは、ここで全部決めます</a:t>
-            </a:r>
-          </a:p>
-          <a:p>
-            <a:pPr algn="l">
-              <a:spcAft>
-                <a:spcPts val="300"/>
-              </a:spcAft>
-            </a:pPr>
-            <a:r>
-              <a:rPr sz="1200" b="1" i="0">
-                <a:solidFill>
-                  <a:srgbClr val="3A106E"/>
-                </a:solidFill>
-                <a:latin typeface="Yu Gothic"/>
-                <a:ea typeface="Yu Gothic"/>
-                <a:cs typeface="Yu Gothic"/>
-              </a:rPr>
-              <a:t>点検会議（会長・2週に1回）＝ 会長の判断が必要なことだけを上げる場</a:t>
-            </a:r>
-          </a:p>
-          <a:p>
-            <a:pPr algn="l">
-              <a:spcAft>
-                <a:spcPts val="600"/>
-              </a:spcAft>
-            </a:pPr>
-            <a:r>
-              <a:rPr sz="1150" b="0" i="0">
-                <a:solidFill>
-                  <a:srgbClr val="262630"/>
-                </a:solidFill>
-                <a:latin typeface="Yu Gothic"/>
-                <a:ea typeface="Yu Gothic"/>
-                <a:cs typeface="Yu Gothic"/>
-              </a:rPr>
-              <a:t>■ 会社の方針・優先順位に関わること／新しいお金や体制が必要なこと／部門の権限や組織に関わること／会長・社長に動いていただきたいこと（重要な取引先との面談など）——に絞って、1回3件以内で上げます</a:t>
-            </a:r>
-          </a:p>
-          <a:p>
-            <a:pPr algn="l">
-              <a:spcAft>
-                <a:spcPts val="300"/>
-              </a:spcAft>
-            </a:pPr>
-            <a:r>
-              <a:rPr sz="1200" b="1" i="0">
-                <a:solidFill>
-                  <a:srgbClr val="3A106E"/>
-                </a:solidFill>
-                <a:latin typeface="Yu Gothic"/>
-                <a:ea typeface="Yu Gothic"/>
-                <a:cs typeface="Yu Gothic"/>
-              </a:rPr>
-              <a:t>点検会議の型（毎回同じ流れ）</a:t>
-            </a:r>
-          </a:p>
-          <a:p>
-            <a:pPr algn="l">
-              <a:spcAft>
-                <a:spcPts val="600"/>
-              </a:spcAft>
-            </a:pPr>
-            <a:r>
-              <a:rPr sz="1150" b="0" i="0">
-                <a:solidFill>
-                  <a:srgbClr val="262630"/>
-                </a:solidFill>
-                <a:latin typeface="Yu Gothic"/>
-                <a:ea typeface="Yu Gothic"/>
-                <a:cs typeface="Yu Gothic"/>
-              </a:rPr>
-              <a:t>■ ①今日決めること（最大3件）→ ②前回決めたことの進捗確認 → ③全体の進み具合 → ④分科会ごとの要点 → ⑤決める（本丸）→ ⑥詰まっていることの対応 → ⑦次回までの宿題の確認</a:t>
-            </a:r>
-          </a:p>
-          <a:p>
-            <a:pPr algn="l">
-              <a:spcAft>
-                <a:spcPts val="300"/>
-              </a:spcAft>
-            </a:pPr>
-            <a:r>
-              <a:rPr sz="1000" b="0" i="0">
-                <a:solidFill>
-                  <a:srgbClr val="8A8A99"/>
-                </a:solidFill>
-                <a:latin typeface="Yu Gothic"/>
-                <a:ea typeface="Yu Gothic"/>
-                <a:cs typeface="Yu Gothic"/>
-              </a:rPr>
-              <a:t>※ 会長向けには、判断に必要な図表だけを数枚のPowerPointで用意します（作成は事務局・上限2時間）。それ以外はWordのメモです</a:t>
-            </a:r>
-          </a:p>
-        </p:txBody>
-      </p:sp>
-      <p:sp>
-        <p:nvSpPr>
-          <p:cNvPr id="7" name="Rectangle 6"/>
+          <p:cNvPr id="5" name="Chevron 4"/>
           <p:cNvSpPr/>
           <p:nvPr/>
         </p:nvSpPr>
         <p:spPr>
           <a:xfrm>
-            <a:off x="502920" y="5870448"/>
-            <a:ext cx="11183112" cy="566928"/>
-          </a:xfrm>
-          <a:prstGeom prst="rect">
+            <a:off x="822960" y="2011680"/>
+            <a:ext cx="3566160" cy="1371600"/>
+          </a:xfrm>
+          <a:prstGeom prst="chevron">
             <a:avLst/>
           </a:prstGeom>
           <a:solidFill>
@@ -6618,16 +6788,93 @@
       </p:sp>
       <p:sp>
         <p:nvSpPr>
-          <p:cNvPr id="8" name="Rectangle 7"/>
+          <p:cNvPr id="6" name="TextBox 5"/>
+          <p:cNvSpPr txBox="1"/>
+          <p:nvPr/>
+        </p:nvSpPr>
+        <p:spPr>
+          <a:xfrm>
+            <a:off x="1234440" y="2011680"/>
+            <a:ext cx="3017520" cy="1371600"/>
+          </a:xfrm>
+          <a:prstGeom prst="rect">
+            <a:avLst/>
+          </a:prstGeom>
+          <a:noFill/>
+        </p:spPr>
+        <p:txBody>
+          <a:bodyPr wrap="square" lIns="0" rIns="0" tIns="0" bIns="0" anchor="ctr">
+            <a:spAutoFit/>
+          </a:bodyPr>
+          <a:lstStyle/>
+          <a:p>
+            <a:pPr algn="ctr">
+              <a:spcAft>
+                <a:spcPts val="200"/>
+              </a:spcAft>
+            </a:pPr>
+            <a:r>
+              <a:rPr sz="1600" b="1" i="0">
+                <a:solidFill>
+                  <a:srgbClr val="3A106E"/>
+                </a:solidFill>
+                <a:latin typeface="Yu Gothic"/>
+                <a:ea typeface="Yu Gothic"/>
+                <a:cs typeface="Yu Gothic"/>
+              </a:rPr>
+              <a:t>分科会</a:t>
+            </a:r>
+          </a:p>
+          <a:p>
+            <a:pPr algn="ctr">
+              <a:spcAft>
+                <a:spcPts val="200"/>
+              </a:spcAft>
+            </a:pPr>
+            <a:r>
+              <a:rPr sz="1050" b="0" i="0">
+                <a:solidFill>
+                  <a:srgbClr val="3A106E"/>
+                </a:solidFill>
+                <a:latin typeface="Yu Gothic"/>
+                <a:ea typeface="Yu Gothic"/>
+                <a:cs typeface="Yu Gothic"/>
+              </a:rPr>
+              <a:t>部門内でできる改善は</a:t>
+            </a:r>
+          </a:p>
+          <a:p>
+            <a:pPr algn="ctr">
+              <a:spcAft>
+                <a:spcPts val="200"/>
+              </a:spcAft>
+            </a:pPr>
+            <a:r>
+              <a:rPr sz="1050" b="0" i="0">
+                <a:solidFill>
+                  <a:srgbClr val="3A106E"/>
+                </a:solidFill>
+                <a:latin typeface="Yu Gothic"/>
+                <a:ea typeface="Yu Gothic"/>
+                <a:cs typeface="Yu Gothic"/>
+              </a:rPr>
+              <a:t>ここで決めて、すぐ実行</a:t>
+            </a:r>
+          </a:p>
+        </p:txBody>
+      </p:sp>
+      <p:sp>
+        <p:nvSpPr>
+          <p:cNvPr id="7" name="Chevron 6"/>
           <p:cNvSpPr/>
           <p:nvPr/>
         </p:nvSpPr>
         <p:spPr>
           <a:xfrm>
-            <a:off x="502920" y="5870448"/>
-            <a:ext cx="38100" cy="566928"/>
-          </a:xfrm>
-          <a:prstGeom prst="rect">
+            <a:off x="4617720" y="2011680"/>
+            <a:ext cx="3566160" cy="1371600"/>
+          </a:xfrm>
+          <a:prstGeom prst="chevron">
             <a:avLst/>
           </a:prstGeom>
           <a:solidFill>
@@ -6662,14 +6909,14 @@
       </p:sp>
       <p:sp>
         <p:nvSpPr>
-          <p:cNvPr id="9" name="TextBox 8"/>
+          <p:cNvPr id="8" name="TextBox 7"/>
           <p:cNvSpPr txBox="1"/>
           <p:nvPr/>
         </p:nvSpPr>
         <p:spPr>
           <a:xfrm>
-            <a:off x="685800" y="5934456"/>
-            <a:ext cx="10881360" cy="457200"/>
+            <a:off x="5029200" y="2011680"/>
+            <a:ext cx="3017520" cy="1371600"/>
           </a:xfrm>
           <a:prstGeom prst="rect">
             <a:avLst/>
@@ -6682,52 +6929,77 @@
           </a:bodyPr>
           <a:lstStyle/>
           <a:p>
-            <a:pPr algn="l">
-              <a:spcAft>
-                <a:spcPts val="400"/>
-              </a:spcAft>
-            </a:pPr>
-            <a:r>
-              <a:rPr sz="1000" b="1" i="0">
-                <a:solidFill>
-                  <a:srgbClr val="7823DC"/>
-                </a:solidFill>
-                <a:latin typeface="Yu Gothic"/>
-                <a:ea typeface="Yu Gothic"/>
-                <a:cs typeface="Yu Gothic"/>
-              </a:rPr>
-              <a:t>ここだけ覚えて帰ってください　</a:t>
-            </a:r>
-            <a:r>
-              <a:rPr sz="1000" b="0" i="0">
-                <a:solidFill>
-                  <a:srgbClr val="262630"/>
-                </a:solidFill>
-                <a:latin typeface="Yu Gothic"/>
-                <a:ea typeface="Yu Gothic"/>
-                <a:cs typeface="Yu Gothic"/>
-              </a:rPr>
-              <a:t>「上げすぎない」ことが大事。細かいことまで上げると、会長の会議が報告会に戻ってしまいます</a:t>
-            </a:r>
-          </a:p>
-        </p:txBody>
-      </p:sp>
-      <p:sp>
-        <p:nvSpPr>
-          <p:cNvPr id="10" name="Rectangle 9"/>
+            <a:pPr algn="ctr">
+              <a:spcAft>
+                <a:spcPts val="200"/>
+              </a:spcAft>
+            </a:pPr>
+            <a:r>
+              <a:rPr sz="1600" b="1" i="0">
+                <a:solidFill>
+                  <a:srgbClr val="FFFFFF"/>
+                </a:solidFill>
+                <a:latin typeface="Yu Gothic"/>
+                <a:ea typeface="Yu Gothic"/>
+                <a:cs typeface="Yu Gothic"/>
+              </a:rPr>
+              <a:t>戦略会議</a:t>
+            </a:r>
+          </a:p>
+          <a:p>
+            <a:pPr algn="ctr">
+              <a:spcAft>
+                <a:spcPts val="200"/>
+              </a:spcAft>
+            </a:pPr>
+            <a:r>
+              <a:rPr sz="1050" b="0" i="0">
+                <a:solidFill>
+                  <a:srgbClr val="FFFFFF"/>
+                </a:solidFill>
+                <a:latin typeface="Yu Gothic"/>
+                <a:ea typeface="Yu Gothic"/>
+                <a:cs typeface="Yu Gothic"/>
+              </a:rPr>
+              <a:t>部門をまたぐこと・</a:t>
+            </a:r>
+          </a:p>
+          <a:p>
+            <a:pPr algn="ctr">
+              <a:spcAft>
+                <a:spcPts val="200"/>
+              </a:spcAft>
+            </a:pPr>
+            <a:r>
+              <a:rPr sz="1050" b="0" i="0">
+                <a:solidFill>
+                  <a:srgbClr val="FFFFFF"/>
+                </a:solidFill>
+                <a:latin typeface="Yu Gothic"/>
+                <a:ea typeface="Yu Gothic"/>
+                <a:cs typeface="Yu Gothic"/>
+              </a:rPr>
+              <a:t>人の配分はここで決定</a:t>
+            </a:r>
+          </a:p>
+        </p:txBody>
+      </p:sp>
+      <p:sp>
+        <p:nvSpPr>
+          <p:cNvPr id="9" name="Chevron 8"/>
           <p:cNvSpPr/>
           <p:nvPr/>
         </p:nvSpPr>
         <p:spPr>
           <a:xfrm>
-            <a:off x="502920" y="6510528"/>
-            <a:ext cx="11183112" cy="15240"/>
-          </a:xfrm>
-          <a:prstGeom prst="rect">
+            <a:off x="8412480" y="2011680"/>
+            <a:ext cx="3566160" cy="1371600"/>
+          </a:xfrm>
+          <a:prstGeom prst="chevron">
             <a:avLst/>
           </a:prstGeom>
           <a:solidFill>
-            <a:srgbClr val="D9D9E0"/>
+            <a:srgbClr val="3A106E"/>
           </a:solidFill>
           <a:ln>
             <a:noFill/>
@@ -6758,14 +7030,601 @@
       </p:sp>
       <p:sp>
         <p:nvSpPr>
-          <p:cNvPr id="11" name="TextBox 10"/>
+          <p:cNvPr id="10" name="TextBox 9"/>
           <p:cNvSpPr txBox="1"/>
           <p:nvPr/>
         </p:nvSpPr>
         <p:spPr>
           <a:xfrm>
-            <a:off x="502920" y="6565392"/>
-            <a:ext cx="8229600" cy="274320"/>
+            <a:off x="8823960" y="2011680"/>
+            <a:ext cx="3017520" cy="1371600"/>
+          </a:xfrm>
+          <a:prstGeom prst="rect">
+            <a:avLst/>
+          </a:prstGeom>
+          <a:noFill/>
+        </p:spPr>
+        <p:txBody>
+          <a:bodyPr wrap="square" lIns="0" rIns="0" tIns="0" bIns="0" anchor="ctr">
+            <a:spAutoFit/>
+          </a:bodyPr>
+          <a:lstStyle/>
+          <a:p>
+            <a:pPr algn="ctr">
+              <a:spcAft>
+                <a:spcPts val="200"/>
+              </a:spcAft>
+            </a:pPr>
+            <a:r>
+              <a:rPr sz="1600" b="1" i="0">
+                <a:solidFill>
+                  <a:srgbClr val="FFFFFF"/>
+                </a:solidFill>
+                <a:latin typeface="Yu Gothic"/>
+                <a:ea typeface="Yu Gothic"/>
+                <a:cs typeface="Yu Gothic"/>
+              </a:rPr>
+              <a:t>点検会議</a:t>
+            </a:r>
+          </a:p>
+          <a:p>
+            <a:pPr algn="ctr">
+              <a:spcAft>
+                <a:spcPts val="200"/>
+              </a:spcAft>
+            </a:pPr>
+            <a:r>
+              <a:rPr sz="1050" b="0" i="0">
+                <a:solidFill>
+                  <a:srgbClr val="FFFFFF"/>
+                </a:solidFill>
+                <a:latin typeface="Yu Gothic"/>
+                <a:ea typeface="Yu Gothic"/>
+                <a:cs typeface="Yu Gothic"/>
+              </a:rPr>
+              <a:t>会社の方針・お金・体制に</a:t>
+            </a:r>
+          </a:p>
+          <a:p>
+            <a:pPr algn="ctr">
+              <a:spcAft>
+                <a:spcPts val="200"/>
+              </a:spcAft>
+            </a:pPr>
+            <a:r>
+              <a:rPr sz="1050" b="0" i="0">
+                <a:solidFill>
+                  <a:srgbClr val="FFFFFF"/>
+                </a:solidFill>
+                <a:latin typeface="Yu Gothic"/>
+                <a:ea typeface="Yu Gothic"/>
+                <a:cs typeface="Yu Gothic"/>
+              </a:rPr>
+              <a:t>関わることだけ会長が決定</a:t>
+            </a:r>
+          </a:p>
+        </p:txBody>
+      </p:sp>
+      <p:sp>
+        <p:nvSpPr>
+          <p:cNvPr id="11" name="Rectangle 10"/>
+          <p:cNvSpPr/>
+          <p:nvPr/>
+        </p:nvSpPr>
+        <p:spPr>
+          <a:xfrm>
+            <a:off x="822960" y="3749039"/>
+            <a:ext cx="10972800" cy="566928"/>
+          </a:xfrm>
+          <a:prstGeom prst="rect">
+            <a:avLst/>
+          </a:prstGeom>
+          <a:solidFill>
+            <a:srgbClr val="F7F7F9"/>
+          </a:solidFill>
+          <a:ln>
+            <a:noFill/>
+          </a:ln>
+          <a:effectLst/>
+        </p:spPr>
+        <p:style>
+          <a:lnRef idx="1">
+            <a:schemeClr val="accent1"/>
+          </a:lnRef>
+          <a:fillRef idx="3">
+            <a:schemeClr val="accent1"/>
+          </a:fillRef>
+          <a:effectRef idx="2">
+            <a:schemeClr val="accent1"/>
+          </a:effectRef>
+          <a:fontRef idx="minor">
+            <a:schemeClr val="lt1"/>
+          </a:fontRef>
+        </p:style>
+        <p:txBody>
+          <a:bodyPr rtlCol="0" anchor="ctr"/>
+          <a:lstStyle/>
+          <a:p>
+            <a:pPr algn="ctr"/>
+          </a:p>
+        </p:txBody>
+      </p:sp>
+      <p:sp>
+        <p:nvSpPr>
+          <p:cNvPr id="12" name="Rectangle 11"/>
+          <p:cNvSpPr/>
+          <p:nvPr/>
+        </p:nvSpPr>
+        <p:spPr>
+          <a:xfrm>
+            <a:off x="822960" y="3749039"/>
+            <a:ext cx="38100" cy="566928"/>
+          </a:xfrm>
+          <a:prstGeom prst="rect">
+            <a:avLst/>
+          </a:prstGeom>
+          <a:solidFill>
+            <a:srgbClr val="7823DC"/>
+          </a:solidFill>
+          <a:ln>
+            <a:noFill/>
+          </a:ln>
+          <a:effectLst/>
+        </p:spPr>
+        <p:style>
+          <a:lnRef idx="1">
+            <a:schemeClr val="accent1"/>
+          </a:lnRef>
+          <a:fillRef idx="3">
+            <a:schemeClr val="accent1"/>
+          </a:fillRef>
+          <a:effectRef idx="2">
+            <a:schemeClr val="accent1"/>
+          </a:effectRef>
+          <a:fontRef idx="minor">
+            <a:schemeClr val="lt1"/>
+          </a:fontRef>
+        </p:style>
+        <p:txBody>
+          <a:bodyPr rtlCol="0" anchor="ctr"/>
+          <a:lstStyle/>
+          <a:p>
+            <a:pPr algn="ctr"/>
+          </a:p>
+        </p:txBody>
+      </p:sp>
+      <p:sp>
+        <p:nvSpPr>
+          <p:cNvPr id="13" name="TextBox 12"/>
+          <p:cNvSpPr txBox="1"/>
+          <p:nvPr/>
+        </p:nvSpPr>
+        <p:spPr>
+          <a:xfrm>
+            <a:off x="1051560" y="3749039"/>
+            <a:ext cx="1554480" cy="566928"/>
+          </a:xfrm>
+          <a:prstGeom prst="rect">
+            <a:avLst/>
+          </a:prstGeom>
+          <a:noFill/>
+        </p:spPr>
+        <p:txBody>
+          <a:bodyPr wrap="square" lIns="0" rIns="0" tIns="0" bIns="0" anchor="ctr">
+            <a:spAutoFit/>
+          </a:bodyPr>
+          <a:lstStyle/>
+          <a:p>
+            <a:pPr algn="l">
+              <a:spcAft>
+                <a:spcPts val="200"/>
+              </a:spcAft>
+            </a:pPr>
+            <a:r>
+              <a:rPr sz="1200" b="1" i="0">
+                <a:solidFill>
+                  <a:srgbClr val="3A106E"/>
+                </a:solidFill>
+                <a:latin typeface="Yu Gothic"/>
+                <a:ea typeface="Yu Gothic"/>
+                <a:cs typeface="Yu Gothic"/>
+              </a:rPr>
+              <a:t>分科会で</a:t>
+            </a:r>
+          </a:p>
+        </p:txBody>
+      </p:sp>
+      <p:sp>
+        <p:nvSpPr>
+          <p:cNvPr id="14" name="TextBox 13"/>
+          <p:cNvSpPr txBox="1"/>
+          <p:nvPr/>
+        </p:nvSpPr>
+        <p:spPr>
+          <a:xfrm>
+            <a:off x="2697480" y="3749039"/>
+            <a:ext cx="8961120" cy="566928"/>
+          </a:xfrm>
+          <a:prstGeom prst="rect">
+            <a:avLst/>
+          </a:prstGeom>
+          <a:noFill/>
+        </p:spPr>
+        <p:txBody>
+          <a:bodyPr wrap="square" lIns="0" rIns="0" tIns="0" bIns="0" anchor="ctr">
+            <a:spAutoFit/>
+          </a:bodyPr>
+          <a:lstStyle/>
+          <a:p>
+            <a:pPr algn="l">
+              <a:spcAft>
+                <a:spcPts val="200"/>
+              </a:spcAft>
+            </a:pPr>
+            <a:r>
+              <a:rPr sz="1150" b="0" i="0">
+                <a:solidFill>
+                  <a:srgbClr val="262630"/>
+                </a:solidFill>
+                <a:latin typeface="Yu Gothic"/>
+                <a:ea typeface="Yu Gothic"/>
+                <a:cs typeface="Yu Gothic"/>
+              </a:rPr>
+              <a:t>戻りの多い原因を確認。「事前チェックリストを作る」は、その場で決めて翌週から実行</a:t>
+            </a:r>
+          </a:p>
+        </p:txBody>
+      </p:sp>
+      <p:sp>
+        <p:nvSpPr>
+          <p:cNvPr id="15" name="Rectangle 14"/>
+          <p:cNvSpPr/>
+          <p:nvPr/>
+        </p:nvSpPr>
+        <p:spPr>
+          <a:xfrm>
+            <a:off x="822960" y="4434840"/>
+            <a:ext cx="10972800" cy="566928"/>
+          </a:xfrm>
+          <a:prstGeom prst="rect">
+            <a:avLst/>
+          </a:prstGeom>
+          <a:solidFill>
+            <a:srgbClr val="F7F7F9"/>
+          </a:solidFill>
+          <a:ln>
+            <a:noFill/>
+          </a:ln>
+          <a:effectLst/>
+        </p:spPr>
+        <p:style>
+          <a:lnRef idx="1">
+            <a:schemeClr val="accent1"/>
+          </a:lnRef>
+          <a:fillRef idx="3">
+            <a:schemeClr val="accent1"/>
+          </a:fillRef>
+          <a:effectRef idx="2">
+            <a:schemeClr val="accent1"/>
+          </a:effectRef>
+          <a:fontRef idx="minor">
+            <a:schemeClr val="lt1"/>
+          </a:fontRef>
+        </p:style>
+        <p:txBody>
+          <a:bodyPr rtlCol="0" anchor="ctr"/>
+          <a:lstStyle/>
+          <a:p>
+            <a:pPr algn="ctr"/>
+          </a:p>
+        </p:txBody>
+      </p:sp>
+      <p:sp>
+        <p:nvSpPr>
+          <p:cNvPr id="16" name="Rectangle 15"/>
+          <p:cNvSpPr/>
+          <p:nvPr/>
+        </p:nvSpPr>
+        <p:spPr>
+          <a:xfrm>
+            <a:off x="822960" y="4434840"/>
+            <a:ext cx="38100" cy="566928"/>
+          </a:xfrm>
+          <a:prstGeom prst="rect">
+            <a:avLst/>
+          </a:prstGeom>
+          <a:solidFill>
+            <a:srgbClr val="7823DC"/>
+          </a:solidFill>
+          <a:ln>
+            <a:noFill/>
+          </a:ln>
+          <a:effectLst/>
+        </p:spPr>
+        <p:style>
+          <a:lnRef idx="1">
+            <a:schemeClr val="accent1"/>
+          </a:lnRef>
+          <a:fillRef idx="3">
+            <a:schemeClr val="accent1"/>
+          </a:fillRef>
+          <a:effectRef idx="2">
+            <a:schemeClr val="accent1"/>
+          </a:effectRef>
+          <a:fontRef idx="minor">
+            <a:schemeClr val="lt1"/>
+          </a:fontRef>
+        </p:style>
+        <p:txBody>
+          <a:bodyPr rtlCol="0" anchor="ctr"/>
+          <a:lstStyle/>
+          <a:p>
+            <a:pPr algn="ctr"/>
+          </a:p>
+        </p:txBody>
+      </p:sp>
+      <p:sp>
+        <p:nvSpPr>
+          <p:cNvPr id="17" name="TextBox 16"/>
+          <p:cNvSpPr txBox="1"/>
+          <p:nvPr/>
+        </p:nvSpPr>
+        <p:spPr>
+          <a:xfrm>
+            <a:off x="1051560" y="4434840"/>
+            <a:ext cx="1554480" cy="566928"/>
+          </a:xfrm>
+          <a:prstGeom prst="rect">
+            <a:avLst/>
+          </a:prstGeom>
+          <a:noFill/>
+        </p:spPr>
+        <p:txBody>
+          <a:bodyPr wrap="square" lIns="0" rIns="0" tIns="0" bIns="0" anchor="ctr">
+            <a:spAutoFit/>
+          </a:bodyPr>
+          <a:lstStyle/>
+          <a:p>
+            <a:pPr algn="l">
+              <a:spcAft>
+                <a:spcPts val="200"/>
+              </a:spcAft>
+            </a:pPr>
+            <a:r>
+              <a:rPr sz="1200" b="1" i="0">
+                <a:solidFill>
+                  <a:srgbClr val="3A106E"/>
+                </a:solidFill>
+                <a:latin typeface="Yu Gothic"/>
+                <a:ea typeface="Yu Gothic"/>
+                <a:cs typeface="Yu Gothic"/>
+              </a:rPr>
+              <a:t>戦略会議へ</a:t>
+            </a:r>
+          </a:p>
+        </p:txBody>
+      </p:sp>
+      <p:sp>
+        <p:nvSpPr>
+          <p:cNvPr id="18" name="TextBox 17"/>
+          <p:cNvSpPr txBox="1"/>
+          <p:nvPr/>
+        </p:nvSpPr>
+        <p:spPr>
+          <a:xfrm>
+            <a:off x="2697480" y="4434840"/>
+            <a:ext cx="8961120" cy="566928"/>
+          </a:xfrm>
+          <a:prstGeom prst="rect">
+            <a:avLst/>
+          </a:prstGeom>
+          <a:noFill/>
+        </p:spPr>
+        <p:txBody>
+          <a:bodyPr wrap="square" lIns="0" rIns="0" tIns="0" bIns="0" anchor="ctr">
+            <a:spAutoFit/>
+          </a:bodyPr>
+          <a:lstStyle/>
+          <a:p>
+            <a:pPr algn="l">
+              <a:spcAft>
+                <a:spcPts val="200"/>
+              </a:spcAft>
+            </a:pPr>
+            <a:r>
+              <a:rPr sz="1150" b="0" i="0">
+                <a:solidFill>
+                  <a:srgbClr val="262630"/>
+                </a:solidFill>
+                <a:latin typeface="Yu Gothic"/>
+                <a:ea typeface="Yu Gothic"/>
+                <a:cs typeface="Yu Gothic"/>
+              </a:rPr>
+              <a:t>「監修の人手が足りない」は部門をまたぐ話なので上げる → 応援の配置を社長が決定</a:t>
+            </a:r>
+          </a:p>
+        </p:txBody>
+      </p:sp>
+      <p:sp>
+        <p:nvSpPr>
+          <p:cNvPr id="19" name="Rectangle 18"/>
+          <p:cNvSpPr/>
+          <p:nvPr/>
+        </p:nvSpPr>
+        <p:spPr>
+          <a:xfrm>
+            <a:off x="822960" y="5120640"/>
+            <a:ext cx="10972800" cy="566928"/>
+          </a:xfrm>
+          <a:prstGeom prst="rect">
+            <a:avLst/>
+          </a:prstGeom>
+          <a:solidFill>
+            <a:srgbClr val="F7F7F9"/>
+          </a:solidFill>
+          <a:ln>
+            <a:noFill/>
+          </a:ln>
+          <a:effectLst/>
+        </p:spPr>
+        <p:style>
+          <a:lnRef idx="1">
+            <a:schemeClr val="accent1"/>
+          </a:lnRef>
+          <a:fillRef idx="3">
+            <a:schemeClr val="accent1"/>
+          </a:fillRef>
+          <a:effectRef idx="2">
+            <a:schemeClr val="accent1"/>
+          </a:effectRef>
+          <a:fontRef idx="minor">
+            <a:schemeClr val="lt1"/>
+          </a:fontRef>
+        </p:style>
+        <p:txBody>
+          <a:bodyPr rtlCol="0" anchor="ctr"/>
+          <a:lstStyle/>
+          <a:p>
+            <a:pPr algn="ctr"/>
+          </a:p>
+        </p:txBody>
+      </p:sp>
+      <p:sp>
+        <p:nvSpPr>
+          <p:cNvPr id="20" name="Rectangle 19"/>
+          <p:cNvSpPr/>
+          <p:nvPr/>
+        </p:nvSpPr>
+        <p:spPr>
+          <a:xfrm>
+            <a:off x="822960" y="5120640"/>
+            <a:ext cx="38100" cy="566928"/>
+          </a:xfrm>
+          <a:prstGeom prst="rect">
+            <a:avLst/>
+          </a:prstGeom>
+          <a:solidFill>
+            <a:srgbClr val="7823DC"/>
+          </a:solidFill>
+          <a:ln>
+            <a:noFill/>
+          </a:ln>
+          <a:effectLst/>
+        </p:spPr>
+        <p:style>
+          <a:lnRef idx="1">
+            <a:schemeClr val="accent1"/>
+          </a:lnRef>
+          <a:fillRef idx="3">
+            <a:schemeClr val="accent1"/>
+          </a:fillRef>
+          <a:effectRef idx="2">
+            <a:schemeClr val="accent1"/>
+          </a:effectRef>
+          <a:fontRef idx="minor">
+            <a:schemeClr val="lt1"/>
+          </a:fontRef>
+        </p:style>
+        <p:txBody>
+          <a:bodyPr rtlCol="0" anchor="ctr"/>
+          <a:lstStyle/>
+          <a:p>
+            <a:pPr algn="ctr"/>
+          </a:p>
+        </p:txBody>
+      </p:sp>
+      <p:sp>
+        <p:nvSpPr>
+          <p:cNvPr id="21" name="TextBox 20"/>
+          <p:cNvSpPr txBox="1"/>
+          <p:nvPr/>
+        </p:nvSpPr>
+        <p:spPr>
+          <a:xfrm>
+            <a:off x="1051560" y="5120640"/>
+            <a:ext cx="1554480" cy="566928"/>
+          </a:xfrm>
+          <a:prstGeom prst="rect">
+            <a:avLst/>
+          </a:prstGeom>
+          <a:noFill/>
+        </p:spPr>
+        <p:txBody>
+          <a:bodyPr wrap="square" lIns="0" rIns="0" tIns="0" bIns="0" anchor="ctr">
+            <a:spAutoFit/>
+          </a:bodyPr>
+          <a:lstStyle/>
+          <a:p>
+            <a:pPr algn="l">
+              <a:spcAft>
+                <a:spcPts val="200"/>
+              </a:spcAft>
+            </a:pPr>
+            <a:r>
+              <a:rPr sz="1200" b="1" i="0">
+                <a:solidFill>
+                  <a:srgbClr val="3A106E"/>
+                </a:solidFill>
+                <a:latin typeface="Yu Gothic"/>
+                <a:ea typeface="Yu Gothic"/>
+                <a:cs typeface="Yu Gothic"/>
+              </a:rPr>
+              <a:t>点検会議へ</a:t>
+            </a:r>
+          </a:p>
+        </p:txBody>
+      </p:sp>
+      <p:sp>
+        <p:nvSpPr>
+          <p:cNvPr id="22" name="TextBox 21"/>
+          <p:cNvSpPr txBox="1"/>
+          <p:nvPr/>
+        </p:nvSpPr>
+        <p:spPr>
+          <a:xfrm>
+            <a:off x="2697480" y="5120640"/>
+            <a:ext cx="8961120" cy="566928"/>
+          </a:xfrm>
+          <a:prstGeom prst="rect">
+            <a:avLst/>
+          </a:prstGeom>
+          <a:noFill/>
+        </p:spPr>
+        <p:txBody>
+          <a:bodyPr wrap="square" lIns="0" rIns="0" tIns="0" bIns="0" anchor="ctr">
+            <a:spAutoFit/>
+          </a:bodyPr>
+          <a:lstStyle/>
+          <a:p>
+            <a:pPr algn="l">
+              <a:spcAft>
+                <a:spcPts val="200"/>
+              </a:spcAft>
+            </a:pPr>
+            <a:r>
+              <a:rPr sz="1150" b="0" i="0">
+                <a:solidFill>
+                  <a:srgbClr val="262630"/>
+                </a:solidFill>
+                <a:latin typeface="Yu Gothic"/>
+                <a:ea typeface="Yu Gothic"/>
+                <a:cs typeface="Yu Gothic"/>
+              </a:rPr>
+              <a:t>「監修の体制を増強する（費用が発生）」は会社の判断なので上げる → 会長が決定</a:t>
+            </a:r>
+          </a:p>
+        </p:txBody>
+      </p:sp>
+      <p:sp>
+        <p:nvSpPr>
+          <p:cNvPr id="23" name="TextBox 22"/>
+          <p:cNvSpPr txBox="1"/>
+          <p:nvPr/>
+        </p:nvSpPr>
+        <p:spPr>
+          <a:xfrm>
+            <a:off x="822960" y="5943600"/>
+            <a:ext cx="10972800" cy="457200"/>
           </a:xfrm>
           <a:prstGeom prst="rect">
             <a:avLst/>
@@ -6784,6 +7643,47 @@
               </a:spcAft>
             </a:pPr>
             <a:r>
+              <a:rPr sz="1200" b="1" i="0">
+                <a:solidFill>
+                  <a:srgbClr val="7823DC"/>
+                </a:solidFill>
+                <a:latin typeface="Yu Gothic"/>
+                <a:ea typeface="Yu Gothic"/>
+                <a:cs typeface="Yu Gothic"/>
+              </a:rPr>
+              <a:t>ポイント：現場で決められることは現場で決め切る。上の会議には「そこでしか決められないこと」だけを上げる</a:t>
+            </a:r>
+          </a:p>
+        </p:txBody>
+      </p:sp>
+      <p:sp>
+        <p:nvSpPr>
+          <p:cNvPr id="24" name="TextBox 23"/>
+          <p:cNvSpPr txBox="1"/>
+          <p:nvPr/>
+        </p:nvSpPr>
+        <p:spPr>
+          <a:xfrm>
+            <a:off x="502920" y="6565392"/>
+            <a:ext cx="8229600" cy="274320"/>
+          </a:xfrm>
+          <a:prstGeom prst="rect">
+            <a:avLst/>
+          </a:prstGeom>
+          <a:noFill/>
+        </p:spPr>
+        <p:txBody>
+          <a:bodyPr wrap="square" lIns="0" rIns="0" tIns="0" bIns="0">
+            <a:spAutoFit/>
+          </a:bodyPr>
+          <a:lstStyle/>
+          <a:p>
+            <a:pPr algn="l">
+              <a:spcAft>
+                <a:spcPts val="400"/>
+              </a:spcAft>
+            </a:pPr>
+            <a:r>
               <a:rPr sz="750" b="0" i="0">
                 <a:solidFill>
                   <a:srgbClr val="8A8A99"/>
@@ -6792,14 +7692,14 @@
                 <a:ea typeface="Yu Gothic"/>
                 <a:cs typeface="Yu Gothic"/>
               </a:rPr>
-              <a:t>円谷プロダクション｜構造改革の新しい会議の仕組み 部長会共有資料（社外秘）</a:t>
-            </a:r>
-          </a:p>
-        </p:txBody>
-      </p:sp>
-      <p:sp>
-        <p:nvSpPr>
-          <p:cNvPr id="12" name="TextBox 11"/>
+              <a:t>円谷プロダクション｜新しい会議の仕組み（部長会・社外秘）</a:t>
+            </a:r>
+          </a:p>
+        </p:txBody>
+      </p:sp>
+      <p:sp>
+        <p:nvSpPr>
+          <p:cNvPr id="25" name="TextBox 24"/>
           <p:cNvSpPr txBox="1"/>
           <p:nvPr/>
         </p:nvSpPr>
@@ -6864,8 +7764,8 @@
         </p:nvSpPr>
         <p:spPr>
           <a:xfrm>
-            <a:off x="502920" y="256032"/>
-            <a:ext cx="11155680" cy="256032"/>
+            <a:off x="502920" y="320040"/>
+            <a:ext cx="11155680" cy="274320"/>
           </a:xfrm>
           <a:prstGeom prst="rect">
             <a:avLst/>
@@ -6884,7 +7784,7 @@
               </a:spcAft>
             </a:pPr>
             <a:r>
-              <a:rPr sz="1000" b="1" i="0">
+              <a:rPr sz="1100" b="1" i="0">
                 <a:solidFill>
                   <a:srgbClr val="7823DC"/>
                 </a:solidFill>
@@ -6892,7 +7792,7 @@
                 <a:ea typeface="Yu Gothic"/>
                 <a:cs typeface="Yu Gothic"/>
               </a:rPr>
-              <a:t>全会議 共通のルール（2分）</a:t>
+              <a:t>運営のルール</a:t>
             </a:r>
           </a:p>
         </p:txBody>
@@ -6905,8 +7805,8 @@
         </p:nvSpPr>
         <p:spPr>
           <a:xfrm>
-            <a:off x="502920" y="512064"/>
-            <a:ext cx="11155680" cy="868680"/>
+            <a:off x="502920" y="621792"/>
+            <a:ext cx="11155680" cy="685800"/>
           </a:xfrm>
           <a:prstGeom prst="rect">
             <a:avLst/>
@@ -6921,11 +7821,11 @@
           <a:p>
             <a:pPr algn="l">
               <a:spcAft>
-                <a:spcPts val="0"/>
-              </a:spcAft>
-            </a:pPr>
-            <a:r>
-              <a:rPr sz="1900" b="1" i="0">
+                <a:spcPts val="400"/>
+              </a:spcAft>
+            </a:pPr>
+            <a:r>
+              <a:rPr sz="2400" b="1" i="0">
                 <a:solidFill>
                   <a:srgbClr val="262630"/>
                 </a:solidFill>
@@ -6933,7 +7833,7 @@
                 <a:ea typeface="Yu Gothic"/>
                 <a:cs typeface="Yu Gothic"/>
               </a:rPr>
-              <a:t>決めたことは1つの台帳に記録し、放置されたら自動的に上の会議に上がる</a:t>
+              <a:t>ルールは3つだけ</a:t>
             </a:r>
           </a:p>
         </p:txBody>
@@ -6946,8 +7846,8 @@
         </p:nvSpPr>
         <p:spPr>
           <a:xfrm>
-            <a:off x="502920" y="1389888"/>
-            <a:ext cx="1463040" cy="33020"/>
+            <a:off x="502920" y="1371600"/>
+            <a:ext cx="1645920" cy="38100"/>
           </a:xfrm>
           <a:prstGeom prst="rect">
             <a:avLst/>
@@ -6984,213 +7884,25 @@
       </p:sp>
       <p:sp>
         <p:nvSpPr>
-          <p:cNvPr id="5" name="TextBox 4"/>
-          <p:cNvSpPr txBox="1"/>
-          <p:nvPr/>
-        </p:nvSpPr>
-        <p:spPr>
-          <a:xfrm>
-            <a:off x="502920" y="1517904"/>
-            <a:ext cx="11155680" cy="310896"/>
-          </a:xfrm>
-          <a:prstGeom prst="rect">
-            <a:avLst/>
-          </a:prstGeom>
-          <a:noFill/>
-        </p:spPr>
-        <p:txBody>
-          <a:bodyPr wrap="square" lIns="0" rIns="0" tIns="0" bIns="0">
-            <a:spAutoFit/>
-          </a:bodyPr>
-          <a:lstStyle/>
-          <a:p>
-            <a:pPr algn="l">
-              <a:spcAft>
-                <a:spcPts val="400"/>
-              </a:spcAft>
-            </a:pPr>
-            <a:r>
-              <a:rPr sz="1150" b="1" i="0">
-                <a:solidFill>
-                  <a:srgbClr val="3A106E"/>
-                </a:solidFill>
-                <a:latin typeface="Yu Gothic"/>
-                <a:ea typeface="Yu Gothic"/>
-                <a:cs typeface="Yu Gothic"/>
-              </a:rPr>
-              <a:t>この2つのルールが「言いっぱなし」を防ぎます</a:t>
-            </a:r>
-          </a:p>
-        </p:txBody>
-      </p:sp>
-      <p:sp>
-        <p:nvSpPr>
-          <p:cNvPr id="6" name="TextBox 5"/>
-          <p:cNvSpPr txBox="1"/>
-          <p:nvPr/>
-        </p:nvSpPr>
-        <p:spPr>
-          <a:xfrm>
-            <a:off x="502920" y="1865376"/>
-            <a:ext cx="11155680" cy="3931920"/>
-          </a:xfrm>
-          <a:prstGeom prst="rect">
-            <a:avLst/>
-          </a:prstGeom>
-          <a:noFill/>
-        </p:spPr>
-        <p:txBody>
-          <a:bodyPr wrap="square" lIns="0" rIns="0" tIns="0" bIns="0">
-            <a:spAutoFit/>
-          </a:bodyPr>
-          <a:lstStyle/>
-          <a:p>
-            <a:pPr algn="l">
-              <a:spcAft>
-                <a:spcPts val="300"/>
-              </a:spcAft>
-            </a:pPr>
-            <a:r>
-              <a:rPr sz="1200" b="1" i="0">
-                <a:solidFill>
-                  <a:srgbClr val="3A106E"/>
-                </a:solidFill>
-                <a:latin typeface="Yu Gothic"/>
-                <a:ea typeface="Yu Gothic"/>
-                <a:cs typeface="Yu Gothic"/>
-              </a:rPr>
-              <a:t>ルール①　決定の台帳（全会議共通）</a:t>
-            </a:r>
-          </a:p>
-          <a:p>
-            <a:pPr algn="l">
-              <a:spcAft>
-                <a:spcPts val="600"/>
-              </a:spcAft>
-            </a:pPr>
-            <a:r>
-              <a:rPr sz="1150" b="0" i="0">
-                <a:solidFill>
-                  <a:srgbClr val="262630"/>
-                </a:solidFill>
-                <a:latin typeface="Yu Gothic"/>
-                <a:ea typeface="Yu Gothic"/>
-                <a:cs typeface="Yu Gothic"/>
-              </a:rPr>
-              <a:t>■ どの会議で決まったことも、1つの台帳に記録します：決めたこと／理由／担当／期限。各会議の冒頭で前回分の「やったか」を必ず確認します。「検討します」は決定ではありません——誰が・いつまでに・何を、まで決めて記録します</a:t>
-            </a:r>
-          </a:p>
-          <a:p>
-            <a:pPr algn="l">
-              <a:spcAft>
-                <a:spcPts val="300"/>
-              </a:spcAft>
-            </a:pPr>
-            <a:r>
-              <a:rPr sz="1200" b="1" i="0">
-                <a:solidFill>
-                  <a:srgbClr val="3A106E"/>
-                </a:solidFill>
-                <a:latin typeface="Yu Gothic"/>
-                <a:ea typeface="Yu Gothic"/>
-                <a:cs typeface="Yu Gothic"/>
-              </a:rPr>
-              <a:t>ルール②　放置されたら上に上がる</a:t>
-            </a:r>
-          </a:p>
-          <a:p>
-            <a:pPr algn="l">
-              <a:spcAft>
-                <a:spcPts val="600"/>
-              </a:spcAft>
-            </a:pPr>
-            <a:r>
-              <a:rPr sz="1150" b="0" i="0">
-                <a:solidFill>
-                  <a:srgbClr val="262630"/>
-                </a:solidFill>
-                <a:latin typeface="Yu Gothic"/>
-                <a:ea typeface="Yu Gothic"/>
-                <a:cs typeface="Yu Gothic"/>
-              </a:rPr>
-              <a:t>■ 期限を2回続けて超えたことは、自動的に1つ上の会議（分科会→戦略会議→点検会議）の議題になります。担当者を責めるためではなく、「一人で抱えて止まる」のを防ぐためです</a:t>
-            </a:r>
-          </a:p>
-          <a:p>
-            <a:pPr algn="l">
-              <a:spcAft>
-                <a:spcPts val="300"/>
-              </a:spcAft>
-            </a:pPr>
-            <a:r>
-              <a:rPr sz="1200" b="1" i="0">
-                <a:solidFill>
-                  <a:srgbClr val="3A106E"/>
-                </a:solidFill>
-                <a:latin typeface="Yu Gothic"/>
-                <a:ea typeface="Yu Gothic"/>
-                <a:cs typeface="Yu Gothic"/>
-              </a:rPr>
-              <a:t>ルール③　資料の作り込み禁止</a:t>
-            </a:r>
-          </a:p>
-          <a:p>
-            <a:pPr algn="l">
-              <a:spcAft>
-                <a:spcPts val="600"/>
-              </a:spcAft>
-            </a:pPr>
-            <a:r>
-              <a:rPr sz="1150" b="0" i="0">
-                <a:solidFill>
-                  <a:srgbClr val="262630"/>
-                </a:solidFill>
-                <a:latin typeface="Yu Gothic"/>
-                <a:ea typeface="Yu Gothic"/>
-                <a:cs typeface="Yu Gothic"/>
-              </a:rPr>
-              <a:t>■ 全会議、Wordのメモが基本。きれいな資料を作る時間を、検討と実行に使います（例外は点検会議の図表数枚のみ）</a:t>
-            </a:r>
-          </a:p>
-          <a:p>
-            <a:pPr algn="l">
-              <a:spcAft>
-                <a:spcPts val="600"/>
-              </a:spcAft>
-            </a:pPr>
-            <a:r>
-              <a:rPr sz="1150" b="0" i="0">
-                <a:solidFill>
-                  <a:srgbClr val="262630"/>
-                </a:solidFill>
-                <a:latin typeface="Yu Gothic"/>
-                <a:ea typeface="Yu Gothic"/>
-                <a:cs typeface="Yu Gothic"/>
-              </a:rPr>
-              <a:t>■ 記録・運営はすべて事務局チーム（PMO）が担います。皆さんに議事録づくりをお願いすることはありません</a:t>
-            </a:r>
-          </a:p>
-        </p:txBody>
-      </p:sp>
-      <p:sp>
-        <p:nvSpPr>
-          <p:cNvPr id="7" name="Rectangle 6"/>
+          <p:cNvPr id="5" name="Rounded Rectangle 4"/>
           <p:cNvSpPr/>
           <p:nvPr/>
         </p:nvSpPr>
         <p:spPr>
           <a:xfrm>
-            <a:off x="502920" y="5870448"/>
-            <a:ext cx="11183112" cy="566928"/>
-          </a:xfrm>
-          <a:prstGeom prst="rect">
+            <a:off x="640080" y="2011680"/>
+            <a:ext cx="3566160" cy="3108960"/>
+          </a:xfrm>
+          <a:prstGeom prst="roundRect">
             <a:avLst/>
           </a:prstGeom>
           <a:solidFill>
-            <a:srgbClr val="F3EFFB"/>
+            <a:srgbClr val="F7F7F9"/>
           </a:solidFill>
-          <a:ln>
-            <a:noFill/>
+          <a:ln w="12700">
+            <a:solidFill>
+              <a:srgbClr val="D9D9E0"/>
+            </a:solidFill>
           </a:ln>
           <a:effectLst/>
         </p:spPr>
@@ -7218,16 +7930,16 @@
       </p:sp>
       <p:sp>
         <p:nvSpPr>
-          <p:cNvPr id="8" name="Rectangle 7"/>
+          <p:cNvPr id="6" name="Oval 5"/>
           <p:cNvSpPr/>
           <p:nvPr/>
         </p:nvSpPr>
         <p:spPr>
           <a:xfrm>
-            <a:off x="502920" y="5870448"/>
-            <a:ext cx="38100" cy="566928"/>
-          </a:xfrm>
-          <a:prstGeom prst="rect">
+            <a:off x="2057400" y="1691640"/>
+            <a:ext cx="731520" cy="731520"/>
+          </a:xfrm>
+          <a:prstGeom prst="ellipse">
             <a:avLst/>
           </a:prstGeom>
           <a:solidFill>
@@ -7262,14 +7974,14 @@
       </p:sp>
       <p:sp>
         <p:nvSpPr>
-          <p:cNvPr id="9" name="TextBox 8"/>
+          <p:cNvPr id="7" name="TextBox 6"/>
           <p:cNvSpPr txBox="1"/>
           <p:nvPr/>
         </p:nvSpPr>
         <p:spPr>
           <a:xfrm>
-            <a:off x="685800" y="5934456"/>
-            <a:ext cx="10881360" cy="457200"/>
+            <a:off x="2057400" y="1691640"/>
+            <a:ext cx="731520" cy="731520"/>
           </a:xfrm>
           <a:prstGeom prst="rect">
             <a:avLst/>
@@ -7282,24 +7994,95 @@
           </a:bodyPr>
           <a:lstStyle/>
           <a:p>
+            <a:pPr algn="ctr">
+              <a:spcAft>
+                <a:spcPts val="200"/>
+              </a:spcAft>
+            </a:pPr>
+            <a:r>
+              <a:rPr sz="2000" b="1" i="0">
+                <a:solidFill>
+                  <a:srgbClr val="FFFFFF"/>
+                </a:solidFill>
+                <a:latin typeface="Yu Gothic"/>
+                <a:ea typeface="Yu Gothic"/>
+                <a:cs typeface="Yu Gothic"/>
+              </a:rPr>
+              <a:t>1</a:t>
+            </a:r>
+          </a:p>
+        </p:txBody>
+      </p:sp>
+      <p:sp>
+        <p:nvSpPr>
+          <p:cNvPr id="8" name="TextBox 7"/>
+          <p:cNvSpPr txBox="1"/>
+          <p:nvPr/>
+        </p:nvSpPr>
+        <p:spPr>
+          <a:xfrm>
+            <a:off x="822960" y="2606040"/>
+            <a:ext cx="3200400" cy="548640"/>
+          </a:xfrm>
+          <a:prstGeom prst="rect">
+            <a:avLst/>
+          </a:prstGeom>
+          <a:noFill/>
+        </p:spPr>
+        <p:txBody>
+          <a:bodyPr wrap="square" lIns="0" rIns="0" tIns="0" bIns="0" anchor="ctr">
+            <a:spAutoFit/>
+          </a:bodyPr>
+          <a:lstStyle/>
+          <a:p>
+            <a:pPr algn="ctr">
+              <a:spcAft>
+                <a:spcPts val="200"/>
+              </a:spcAft>
+            </a:pPr>
+            <a:r>
+              <a:rPr sz="1550" b="1" i="0">
+                <a:solidFill>
+                  <a:srgbClr val="3A106E"/>
+                </a:solidFill>
+                <a:latin typeface="Yu Gothic"/>
+                <a:ea typeface="Yu Gothic"/>
+                <a:cs typeface="Yu Gothic"/>
+              </a:rPr>
+              <a:t>資料を作らない</a:t>
+            </a:r>
+          </a:p>
+        </p:txBody>
+      </p:sp>
+      <p:sp>
+        <p:nvSpPr>
+          <p:cNvPr id="9" name="TextBox 8"/>
+          <p:cNvSpPr txBox="1"/>
+          <p:nvPr/>
+        </p:nvSpPr>
+        <p:spPr>
+          <a:xfrm>
+            <a:off x="960120" y="3246120"/>
+            <a:ext cx="2926080" cy="1737360"/>
+          </a:xfrm>
+          <a:prstGeom prst="rect">
+            <a:avLst/>
+          </a:prstGeom>
+          <a:noFill/>
+        </p:spPr>
+        <p:txBody>
+          <a:bodyPr wrap="square" lIns="0" rIns="0" tIns="0" bIns="0">
+            <a:spAutoFit/>
+          </a:bodyPr>
+          <a:lstStyle/>
+          <a:p>
             <a:pPr algn="l">
               <a:spcAft>
                 <a:spcPts val="400"/>
               </a:spcAft>
             </a:pPr>
             <a:r>
-              <a:rPr sz="1000" b="1" i="0">
-                <a:solidFill>
-                  <a:srgbClr val="7823DC"/>
-                </a:solidFill>
-                <a:latin typeface="Yu Gothic"/>
-                <a:ea typeface="Yu Gothic"/>
-                <a:cs typeface="Yu Gothic"/>
-              </a:rPr>
-              <a:t>ここだけ覚えて帰ってください　</a:t>
-            </a:r>
-            <a:r>
-              <a:rPr sz="1000" b="0" i="0">
+              <a:rPr sz="1100" b="0" i="0">
                 <a:solidFill>
                   <a:srgbClr val="262630"/>
                 </a:solidFill>
@@ -7307,27 +8090,109 @@
                 <a:ea typeface="Yu Gothic"/>
                 <a:cs typeface="Yu Gothic"/>
               </a:rPr>
-              <a:t>「決めたことが台帳に残り、翌回に確認される」——これだけで会議の実効性は大きく変わります</a:t>
-            </a:r>
-          </a:p>
-        </p:txBody>
-      </p:sp>
-      <p:sp>
-        <p:nvSpPr>
-          <p:cNvPr id="10" name="Rectangle 9"/>
+              <a:t>会議のためのパワポ・報告資料は禁止。</a:t>
+            </a:r>
+          </a:p>
+          <a:p>
+            <a:pPr algn="l">
+              <a:spcAft>
+                <a:spcPts val="400"/>
+              </a:spcAft>
+            </a:pPr>
+            <a:r>
+              <a:rPr sz="1100" b="0" i="0">
+                <a:solidFill>
+                  <a:srgbClr val="262630"/>
+                </a:solidFill>
+                <a:latin typeface="Yu Gothic"/>
+                <a:ea typeface="Yu Gothic"/>
+                <a:cs typeface="Yu Gothic"/>
+              </a:rPr>
+              <a:t>Wordのメモとその場のデータで話す。</a:t>
+            </a:r>
+          </a:p>
+          <a:p>
+            <a:pPr algn="l">
+              <a:spcAft>
+                <a:spcPts val="400"/>
+              </a:spcAft>
+            </a:pPr>
+            <a:r>
+              <a:rPr sz="1100" b="0" i="0">
+                <a:solidFill>
+                  <a:srgbClr val="8A8A99"/>
+                </a:solidFill>
+                <a:latin typeface="Yu Gothic"/>
+                <a:ea typeface="Yu Gothic"/>
+                <a:cs typeface="Yu Gothic"/>
+              </a:rPr>
+              <a:t>（例外は点検会議の要点数枚のみ・事務局が作成）</a:t>
+            </a:r>
+          </a:p>
+        </p:txBody>
+      </p:sp>
+      <p:sp>
+        <p:nvSpPr>
+          <p:cNvPr id="10" name="Rounded Rectangle 9"/>
           <p:cNvSpPr/>
           <p:nvPr/>
         </p:nvSpPr>
         <p:spPr>
           <a:xfrm>
-            <a:off x="502920" y="6510528"/>
-            <a:ext cx="11183112" cy="15240"/>
-          </a:xfrm>
-          <a:prstGeom prst="rect">
+            <a:off x="4434840" y="2011680"/>
+            <a:ext cx="3566160" cy="3108960"/>
+          </a:xfrm>
+          <a:prstGeom prst="roundRect">
             <a:avLst/>
           </a:prstGeom>
           <a:solidFill>
-            <a:srgbClr val="D9D9E0"/>
+            <a:srgbClr val="F7F7F9"/>
+          </a:solidFill>
+          <a:ln w="12700">
+            <a:solidFill>
+              <a:srgbClr val="D9D9E0"/>
+            </a:solidFill>
+          </a:ln>
+          <a:effectLst/>
+        </p:spPr>
+        <p:style>
+          <a:lnRef idx="1">
+            <a:schemeClr val="accent1"/>
+          </a:lnRef>
+          <a:fillRef idx="3">
+            <a:schemeClr val="accent1"/>
+          </a:fillRef>
+          <a:effectRef idx="2">
+            <a:schemeClr val="accent1"/>
+          </a:effectRef>
+          <a:fontRef idx="minor">
+            <a:schemeClr val="lt1"/>
+          </a:fontRef>
+        </p:style>
+        <p:txBody>
+          <a:bodyPr rtlCol="0" anchor="ctr"/>
+          <a:lstStyle/>
+          <a:p>
+            <a:pPr algn="ctr"/>
+          </a:p>
+        </p:txBody>
+      </p:sp>
+      <p:sp>
+        <p:nvSpPr>
+          <p:cNvPr id="11" name="Oval 10"/>
+          <p:cNvSpPr/>
+          <p:nvPr/>
+        </p:nvSpPr>
+        <p:spPr>
+          <a:xfrm>
+            <a:off x="5852160" y="1691640"/>
+            <a:ext cx="731520" cy="731520"/>
+          </a:xfrm>
+          <a:prstGeom prst="ellipse">
+            <a:avLst/>
+          </a:prstGeom>
+          <a:solidFill>
+            <a:srgbClr val="7823DC"/>
           </a:solidFill>
           <a:ln>
             <a:noFill/>
@@ -7358,14 +8223,96 @@
       </p:sp>
       <p:sp>
         <p:nvSpPr>
-          <p:cNvPr id="11" name="TextBox 10"/>
+          <p:cNvPr id="12" name="TextBox 11"/>
           <p:cNvSpPr txBox="1"/>
           <p:nvPr/>
         </p:nvSpPr>
         <p:spPr>
           <a:xfrm>
-            <a:off x="502920" y="6565392"/>
-            <a:ext cx="8229600" cy="274320"/>
+            <a:off x="5852160" y="1691640"/>
+            <a:ext cx="731520" cy="731520"/>
+          </a:xfrm>
+          <a:prstGeom prst="rect">
+            <a:avLst/>
+          </a:prstGeom>
+          <a:noFill/>
+        </p:spPr>
+        <p:txBody>
+          <a:bodyPr wrap="square" lIns="0" rIns="0" tIns="0" bIns="0" anchor="ctr">
+            <a:spAutoFit/>
+          </a:bodyPr>
+          <a:lstStyle/>
+          <a:p>
+            <a:pPr algn="ctr">
+              <a:spcAft>
+                <a:spcPts val="200"/>
+              </a:spcAft>
+            </a:pPr>
+            <a:r>
+              <a:rPr sz="2000" b="1" i="0">
+                <a:solidFill>
+                  <a:srgbClr val="FFFFFF"/>
+                </a:solidFill>
+                <a:latin typeface="Yu Gothic"/>
+                <a:ea typeface="Yu Gothic"/>
+                <a:cs typeface="Yu Gothic"/>
+              </a:rPr>
+              <a:t>2</a:t>
+            </a:r>
+          </a:p>
+        </p:txBody>
+      </p:sp>
+      <p:sp>
+        <p:nvSpPr>
+          <p:cNvPr id="13" name="TextBox 12"/>
+          <p:cNvSpPr txBox="1"/>
+          <p:nvPr/>
+        </p:nvSpPr>
+        <p:spPr>
+          <a:xfrm>
+            <a:off x="4617720" y="2606040"/>
+            <a:ext cx="3200400" cy="548640"/>
+          </a:xfrm>
+          <a:prstGeom prst="rect">
+            <a:avLst/>
+          </a:prstGeom>
+          <a:noFill/>
+        </p:spPr>
+        <p:txBody>
+          <a:bodyPr wrap="square" lIns="0" rIns="0" tIns="0" bIns="0" anchor="ctr">
+            <a:spAutoFit/>
+          </a:bodyPr>
+          <a:lstStyle/>
+          <a:p>
+            <a:pPr algn="ctr">
+              <a:spcAft>
+                <a:spcPts val="200"/>
+              </a:spcAft>
+            </a:pPr>
+            <a:r>
+              <a:rPr sz="1550" b="1" i="0">
+                <a:solidFill>
+                  <a:srgbClr val="3A106E"/>
+                </a:solidFill>
+                <a:latin typeface="Yu Gothic"/>
+                <a:ea typeface="Yu Gothic"/>
+                <a:cs typeface="Yu Gothic"/>
+              </a:rPr>
+              <a:t>決めたことは台帳に残す</a:t>
+            </a:r>
+          </a:p>
+        </p:txBody>
+      </p:sp>
+      <p:sp>
+        <p:nvSpPr>
+          <p:cNvPr id="14" name="TextBox 13"/>
+          <p:cNvSpPr txBox="1"/>
+          <p:nvPr/>
+        </p:nvSpPr>
+        <p:spPr>
+          <a:xfrm>
+            <a:off x="4754880" y="3246120"/>
+            <a:ext cx="2926080" cy="1737360"/>
           </a:xfrm>
           <a:prstGeom prst="rect">
             <a:avLst/>
@@ -7384,6 +8331,373 @@
               </a:spcAft>
             </a:pPr>
             <a:r>
+              <a:rPr sz="1100" b="0" i="0">
+                <a:solidFill>
+                  <a:srgbClr val="262630"/>
+                </a:solidFill>
+                <a:latin typeface="Yu Gothic"/>
+                <a:ea typeface="Yu Gothic"/>
+                <a:cs typeface="Yu Gothic"/>
+              </a:rPr>
+              <a:t>「誰が・いつまでに・何を」まで決めて記録。</a:t>
+            </a:r>
+          </a:p>
+          <a:p>
+            <a:pPr algn="l">
+              <a:spcAft>
+                <a:spcPts val="400"/>
+              </a:spcAft>
+            </a:pPr>
+            <a:r>
+              <a:rPr sz="1100" b="0" i="0">
+                <a:solidFill>
+                  <a:srgbClr val="262630"/>
+                </a:solidFill>
+                <a:latin typeface="Yu Gothic"/>
+                <a:ea typeface="Yu Gothic"/>
+                <a:cs typeface="Yu Gothic"/>
+              </a:rPr>
+              <a:t>次の会議の冒頭で、やったかを必ず確認。</a:t>
+            </a:r>
+          </a:p>
+          <a:p>
+            <a:pPr algn="l">
+              <a:spcAft>
+                <a:spcPts val="400"/>
+              </a:spcAft>
+            </a:pPr>
+            <a:r>
+              <a:rPr sz="1100" b="0" i="0">
+                <a:solidFill>
+                  <a:srgbClr val="262630"/>
+                </a:solidFill>
+                <a:latin typeface="Yu Gothic"/>
+                <a:ea typeface="Yu Gothic"/>
+                <a:cs typeface="Yu Gothic"/>
+              </a:rPr>
+              <a:t>記録は全部、事務局がやります。</a:t>
+            </a:r>
+          </a:p>
+        </p:txBody>
+      </p:sp>
+      <p:sp>
+        <p:nvSpPr>
+          <p:cNvPr id="15" name="Rounded Rectangle 14"/>
+          <p:cNvSpPr/>
+          <p:nvPr/>
+        </p:nvSpPr>
+        <p:spPr>
+          <a:xfrm>
+            <a:off x="8229600" y="2011680"/>
+            <a:ext cx="3566160" cy="3108960"/>
+          </a:xfrm>
+          <a:prstGeom prst="roundRect">
+            <a:avLst/>
+          </a:prstGeom>
+          <a:solidFill>
+            <a:srgbClr val="F7F7F9"/>
+          </a:solidFill>
+          <a:ln w="12700">
+            <a:solidFill>
+              <a:srgbClr val="D9D9E0"/>
+            </a:solidFill>
+          </a:ln>
+          <a:effectLst/>
+        </p:spPr>
+        <p:style>
+          <a:lnRef idx="1">
+            <a:schemeClr val="accent1"/>
+          </a:lnRef>
+          <a:fillRef idx="3">
+            <a:schemeClr val="accent1"/>
+          </a:fillRef>
+          <a:effectRef idx="2">
+            <a:schemeClr val="accent1"/>
+          </a:effectRef>
+          <a:fontRef idx="minor">
+            <a:schemeClr val="lt1"/>
+          </a:fontRef>
+        </p:style>
+        <p:txBody>
+          <a:bodyPr rtlCol="0" anchor="ctr"/>
+          <a:lstStyle/>
+          <a:p>
+            <a:pPr algn="ctr"/>
+          </a:p>
+        </p:txBody>
+      </p:sp>
+      <p:sp>
+        <p:nvSpPr>
+          <p:cNvPr id="16" name="Oval 15"/>
+          <p:cNvSpPr/>
+          <p:nvPr/>
+        </p:nvSpPr>
+        <p:spPr>
+          <a:xfrm>
+            <a:off x="9646920" y="1691640"/>
+            <a:ext cx="731520" cy="731520"/>
+          </a:xfrm>
+          <a:prstGeom prst="ellipse">
+            <a:avLst/>
+          </a:prstGeom>
+          <a:solidFill>
+            <a:srgbClr val="7823DC"/>
+          </a:solidFill>
+          <a:ln>
+            <a:noFill/>
+          </a:ln>
+          <a:effectLst/>
+        </p:spPr>
+        <p:style>
+          <a:lnRef idx="1">
+            <a:schemeClr val="accent1"/>
+          </a:lnRef>
+          <a:fillRef idx="3">
+            <a:schemeClr val="accent1"/>
+          </a:fillRef>
+          <a:effectRef idx="2">
+            <a:schemeClr val="accent1"/>
+          </a:effectRef>
+          <a:fontRef idx="minor">
+            <a:schemeClr val="lt1"/>
+          </a:fontRef>
+        </p:style>
+        <p:txBody>
+          <a:bodyPr rtlCol="0" anchor="ctr"/>
+          <a:lstStyle/>
+          <a:p>
+            <a:pPr algn="ctr"/>
+          </a:p>
+        </p:txBody>
+      </p:sp>
+      <p:sp>
+        <p:nvSpPr>
+          <p:cNvPr id="17" name="TextBox 16"/>
+          <p:cNvSpPr txBox="1"/>
+          <p:nvPr/>
+        </p:nvSpPr>
+        <p:spPr>
+          <a:xfrm>
+            <a:off x="9646920" y="1691640"/>
+            <a:ext cx="731520" cy="731520"/>
+          </a:xfrm>
+          <a:prstGeom prst="rect">
+            <a:avLst/>
+          </a:prstGeom>
+          <a:noFill/>
+        </p:spPr>
+        <p:txBody>
+          <a:bodyPr wrap="square" lIns="0" rIns="0" tIns="0" bIns="0" anchor="ctr">
+            <a:spAutoFit/>
+          </a:bodyPr>
+          <a:lstStyle/>
+          <a:p>
+            <a:pPr algn="ctr">
+              <a:spcAft>
+                <a:spcPts val="200"/>
+              </a:spcAft>
+            </a:pPr>
+            <a:r>
+              <a:rPr sz="2000" b="1" i="0">
+                <a:solidFill>
+                  <a:srgbClr val="FFFFFF"/>
+                </a:solidFill>
+                <a:latin typeface="Yu Gothic"/>
+                <a:ea typeface="Yu Gothic"/>
+                <a:cs typeface="Yu Gothic"/>
+              </a:rPr>
+              <a:t>3</a:t>
+            </a:r>
+          </a:p>
+        </p:txBody>
+      </p:sp>
+      <p:sp>
+        <p:nvSpPr>
+          <p:cNvPr id="18" name="TextBox 17"/>
+          <p:cNvSpPr txBox="1"/>
+          <p:nvPr/>
+        </p:nvSpPr>
+        <p:spPr>
+          <a:xfrm>
+            <a:off x="8412480" y="2606040"/>
+            <a:ext cx="3200400" cy="548640"/>
+          </a:xfrm>
+          <a:prstGeom prst="rect">
+            <a:avLst/>
+          </a:prstGeom>
+          <a:noFill/>
+        </p:spPr>
+        <p:txBody>
+          <a:bodyPr wrap="square" lIns="0" rIns="0" tIns="0" bIns="0" anchor="ctr">
+            <a:spAutoFit/>
+          </a:bodyPr>
+          <a:lstStyle/>
+          <a:p>
+            <a:pPr algn="ctr">
+              <a:spcAft>
+                <a:spcPts val="200"/>
+              </a:spcAft>
+            </a:pPr>
+            <a:r>
+              <a:rPr sz="1550" b="1" i="0">
+                <a:solidFill>
+                  <a:srgbClr val="3A106E"/>
+                </a:solidFill>
+                <a:latin typeface="Yu Gothic"/>
+                <a:ea typeface="Yu Gothic"/>
+                <a:cs typeface="Yu Gothic"/>
+              </a:rPr>
+              <a:t>止まったら、上に上がる</a:t>
+            </a:r>
+          </a:p>
+        </p:txBody>
+      </p:sp>
+      <p:sp>
+        <p:nvSpPr>
+          <p:cNvPr id="19" name="TextBox 18"/>
+          <p:cNvSpPr txBox="1"/>
+          <p:nvPr/>
+        </p:nvSpPr>
+        <p:spPr>
+          <a:xfrm>
+            <a:off x="8549640" y="3246120"/>
+            <a:ext cx="2926080" cy="1737360"/>
+          </a:xfrm>
+          <a:prstGeom prst="rect">
+            <a:avLst/>
+          </a:prstGeom>
+          <a:noFill/>
+        </p:spPr>
+        <p:txBody>
+          <a:bodyPr wrap="square" lIns="0" rIns="0" tIns="0" bIns="0">
+            <a:spAutoFit/>
+          </a:bodyPr>
+          <a:lstStyle/>
+          <a:p>
+            <a:pPr algn="l">
+              <a:spcAft>
+                <a:spcPts val="400"/>
+              </a:spcAft>
+            </a:pPr>
+            <a:r>
+              <a:rPr sz="1100" b="0" i="0">
+                <a:solidFill>
+                  <a:srgbClr val="262630"/>
+                </a:solidFill>
+                <a:latin typeface="Yu Gothic"/>
+                <a:ea typeface="Yu Gothic"/>
+                <a:cs typeface="Yu Gothic"/>
+              </a:rPr>
+              <a:t>期限を2回超えたことは、自動的に</a:t>
+            </a:r>
+          </a:p>
+          <a:p>
+            <a:pPr algn="l">
+              <a:spcAft>
+                <a:spcPts val="400"/>
+              </a:spcAft>
+            </a:pPr>
+            <a:r>
+              <a:rPr sz="1100" b="0" i="0">
+                <a:solidFill>
+                  <a:srgbClr val="262630"/>
+                </a:solidFill>
+                <a:latin typeface="Yu Gothic"/>
+                <a:ea typeface="Yu Gothic"/>
+                <a:cs typeface="Yu Gothic"/>
+              </a:rPr>
+              <a:t>1つ上の会議の議題になる。</a:t>
+            </a:r>
+          </a:p>
+          <a:p>
+            <a:pPr algn="l">
+              <a:spcAft>
+                <a:spcPts val="400"/>
+              </a:spcAft>
+            </a:pPr>
+            <a:r>
+              <a:rPr sz="1100" b="0" i="0">
+                <a:solidFill>
+                  <a:srgbClr val="262630"/>
+                </a:solidFill>
+                <a:latin typeface="Yu Gothic"/>
+                <a:ea typeface="Yu Gothic"/>
+                <a:cs typeface="Yu Gothic"/>
+              </a:rPr>
+              <a:t>人を責めるためではなく、助けを出すため。</a:t>
+            </a:r>
+          </a:p>
+        </p:txBody>
+      </p:sp>
+      <p:sp>
+        <p:nvSpPr>
+          <p:cNvPr id="20" name="TextBox 19"/>
+          <p:cNvSpPr txBox="1"/>
+          <p:nvPr/>
+        </p:nvSpPr>
+        <p:spPr>
+          <a:xfrm>
+            <a:off x="640080" y="5486400"/>
+            <a:ext cx="10972800" cy="457200"/>
+          </a:xfrm>
+          <a:prstGeom prst="rect">
+            <a:avLst/>
+          </a:prstGeom>
+          <a:noFill/>
+        </p:spPr>
+        <p:txBody>
+          <a:bodyPr wrap="square" lIns="0" rIns="0" tIns="0" bIns="0">
+            <a:spAutoFit/>
+          </a:bodyPr>
+          <a:lstStyle/>
+          <a:p>
+            <a:pPr algn="l">
+              <a:spcAft>
+                <a:spcPts val="400"/>
+              </a:spcAft>
+            </a:pPr>
+            <a:r>
+              <a:rPr sz="1300" b="1" i="0">
+                <a:solidFill>
+                  <a:srgbClr val="7823DC"/>
+                </a:solidFill>
+                <a:latin typeface="Yu Gothic"/>
+                <a:ea typeface="Yu Gothic"/>
+                <a:cs typeface="Yu Gothic"/>
+              </a:rPr>
+              <a:t>狙いはひとつ：会議の時間と準備の時間を減らして、検討と実行に時間を使うこと</a:t>
+            </a:r>
+          </a:p>
+        </p:txBody>
+      </p:sp>
+      <p:sp>
+        <p:nvSpPr>
+          <p:cNvPr id="21" name="TextBox 20"/>
+          <p:cNvSpPr txBox="1"/>
+          <p:nvPr/>
+        </p:nvSpPr>
+        <p:spPr>
+          <a:xfrm>
+            <a:off x="502920" y="6565392"/>
+            <a:ext cx="8229600" cy="274320"/>
+          </a:xfrm>
+          <a:prstGeom prst="rect">
+            <a:avLst/>
+          </a:prstGeom>
+          <a:noFill/>
+        </p:spPr>
+        <p:txBody>
+          <a:bodyPr wrap="square" lIns="0" rIns="0" tIns="0" bIns="0">
+            <a:spAutoFit/>
+          </a:bodyPr>
+          <a:lstStyle/>
+          <a:p>
+            <a:pPr algn="l">
+              <a:spcAft>
+                <a:spcPts val="400"/>
+              </a:spcAft>
+            </a:pPr>
+            <a:r>
               <a:rPr sz="750" b="0" i="0">
                 <a:solidFill>
                   <a:srgbClr val="8A8A99"/>
@@ -7392,14 +8706,14 @@
                 <a:ea typeface="Yu Gothic"/>
                 <a:cs typeface="Yu Gothic"/>
               </a:rPr>
-              <a:t>円谷プロダクション｜構造改革の新しい会議の仕組み 部長会共有資料（社外秘）</a:t>
-            </a:r>
-          </a:p>
-        </p:txBody>
-      </p:sp>
-      <p:sp>
-        <p:nvSpPr>
-          <p:cNvPr id="12" name="TextBox 11"/>
+              <a:t>円谷プロダクション｜新しい会議の仕組み（部長会・社外秘）</a:t>
+            </a:r>
+          </a:p>
+        </p:txBody>
+      </p:sp>
+      <p:sp>
+        <p:nvSpPr>
+          <p:cNvPr id="22" name="TextBox 21"/>
           <p:cNvSpPr txBox="1"/>
           <p:nvPr/>
         </p:nvSpPr>
@@ -7464,8 +8778,8 @@
         </p:nvSpPr>
         <p:spPr>
           <a:xfrm>
-            <a:off x="502920" y="256032"/>
-            <a:ext cx="11155680" cy="256032"/>
+            <a:off x="502920" y="320040"/>
+            <a:ext cx="11155680" cy="274320"/>
           </a:xfrm>
           <a:prstGeom prst="rect">
             <a:avLst/>
@@ -7484,7 +8798,7 @@
               </a:spcAft>
             </a:pPr>
             <a:r>
-              <a:rPr sz="1000" b="1" i="0">
+              <a:rPr sz="1100" b="1" i="0">
                 <a:solidFill>
                   <a:srgbClr val="7823DC"/>
                 </a:solidFill>
@@ -7492,7 +8806,7 @@
                 <a:ea typeface="Yu Gothic"/>
                 <a:cs typeface="Yu Gothic"/>
               </a:rPr>
-              <a:t>いまある会議はどうなるか（2分）</a:t>
+              <a:t>お願い</a:t>
             </a:r>
           </a:p>
         </p:txBody>
@@ -7505,8 +8819,8 @@
         </p:nvSpPr>
         <p:spPr>
           <a:xfrm>
-            <a:off x="502920" y="512064"/>
-            <a:ext cx="11155680" cy="868680"/>
+            <a:off x="502920" y="621792"/>
+            <a:ext cx="11155680" cy="685800"/>
           </a:xfrm>
           <a:prstGeom prst="rect">
             <a:avLst/>
@@ -7521,11 +8835,11 @@
           <a:p>
             <a:pPr algn="l">
               <a:spcAft>
-                <a:spcPts val="0"/>
-              </a:spcAft>
-            </a:pPr>
-            <a:r>
-              <a:rPr sz="1900" b="1" i="0">
+                <a:spcPts val="400"/>
+              </a:spcAft>
+            </a:pPr>
+            <a:r>
+              <a:rPr sz="2400" b="1" i="0">
                 <a:solidFill>
                   <a:srgbClr val="262630"/>
                 </a:solidFill>
@@ -7533,7 +8847,7 @@
                 <a:ea typeface="Yu Gothic"/>
                 <a:cs typeface="Yu Gothic"/>
               </a:rPr>
-              <a:t>会議は増やしません——重なるものは統合し、部門の定例はそのまま</a:t>
+              <a:t>部長の皆さんへのお願いは3つ</a:t>
             </a:r>
           </a:p>
         </p:txBody>
@@ -7546,8 +8860,8 @@
         </p:nvSpPr>
         <p:spPr>
           <a:xfrm>
-            <a:off x="502920" y="1389888"/>
-            <a:ext cx="1463040" cy="33020"/>
+            <a:off x="502920" y="1371600"/>
+            <a:ext cx="1645920" cy="38100"/>
           </a:xfrm>
           <a:prstGeom prst="rect">
             <a:avLst/>
@@ -7584,446 +8898,66 @@
       </p:sp>
       <p:sp>
         <p:nvSpPr>
-          <p:cNvPr id="5" name="TextBox 4"/>
-          <p:cNvSpPr txBox="1"/>
-          <p:nvPr/>
-        </p:nvSpPr>
-        <p:spPr>
-          <a:xfrm>
-            <a:off x="502920" y="1517904"/>
-            <a:ext cx="11155680" cy="310896"/>
-          </a:xfrm>
-          <a:prstGeom prst="rect">
-            <a:avLst/>
-          </a:prstGeom>
-          <a:noFill/>
-        </p:spPr>
-        <p:txBody>
-          <a:bodyPr wrap="square" lIns="0" rIns="0" tIns="0" bIns="0">
-            <a:spAutoFit/>
-          </a:bodyPr>
-          <a:lstStyle/>
-          <a:p>
-            <a:pPr algn="l">
-              <a:spcAft>
-                <a:spcPts val="400"/>
-              </a:spcAft>
-            </a:pPr>
-            <a:r>
-              <a:rPr sz="1150" b="1" i="0">
-                <a:solidFill>
-                  <a:srgbClr val="3A106E"/>
-                </a:solidFill>
-                <a:latin typeface="Yu Gothic"/>
-                <a:ea typeface="Yu Gothic"/>
-                <a:cs typeface="Yu Gothic"/>
-              </a:rPr>
-              <a:t>新しい会議と重複する既存の会議・取り組みは、次のとおり整理します</a:t>
-            </a:r>
-          </a:p>
-        </p:txBody>
-      </p:sp>
-      <p:graphicFrame>
-        <p:nvGraphicFramePr>
-          <p:cNvPr id="6" name="Table 5"/>
-          <p:cNvGraphicFramePr>
-            <a:graphicFrameLocks noGrp="1"/>
-          </p:cNvGraphicFramePr>
-          <p:nvPr/>
-        </p:nvGraphicFramePr>
-        <p:xfrm>
-          <a:off x="502920" y="1901952"/>
-          <a:ext cx="11183111" cy="2834640"/>
-        </p:xfrm>
-        <a:graphic>
-          <a:graphicData uri="http://schemas.openxmlformats.org/drawingml/2006/table">
-            <a:tbl>
-              <a:tblPr firstRow="1" bandRow="1">
-                <a:tableStyleId>{5C22544A-7EE6-4342-B048-85BDC9FD1C3A}</a:tableStyleId>
-              </a:tblPr>
-              <a:tblGrid>
-                <a:gridCol w="5133231"/>
-                <a:gridCol w="6049880"/>
-              </a:tblGrid>
-              <a:tr h="566928">
-                <a:tc>
-                  <a:txBody>
-                    <a:bodyPr wrap="square"/>
-                    <a:lstStyle/>
-                    <a:p>
-                      <a:pPr algn="l">
-                        <a:spcAft>
-                          <a:spcPts val="0"/>
-                        </a:spcAft>
-                      </a:pPr>
-                      <a:r>
-                        <a:rPr sz="950" b="1" i="0">
-                          <a:solidFill>
-                            <a:srgbClr val="FFFFFF"/>
-                          </a:solidFill>
-                          <a:latin typeface="Yu Gothic"/>
-                          <a:ea typeface="Yu Gothic"/>
-                          <a:cs typeface="Yu Gothic"/>
-                        </a:rPr>
-                        <a:t>これまで</a:t>
-                      </a:r>
-                    </a:p>
-                  </a:txBody>
-                  <a:tcPr marL="54864" marR="54864" marT="18288" marB="18288" anchor="ctr">
-                    <a:solidFill>
-                      <a:srgbClr val="3A106E"/>
-                    </a:solidFill>
-                  </a:tcPr>
-                </a:tc>
-                <a:tc>
-                  <a:txBody>
-                    <a:bodyPr wrap="square"/>
-                    <a:lstStyle/>
-                    <a:p>
-                      <a:pPr algn="l">
-                        <a:spcAft>
-                          <a:spcPts val="0"/>
-                        </a:spcAft>
-                      </a:pPr>
-                      <a:r>
-                        <a:rPr sz="950" b="1" i="0">
-                          <a:solidFill>
-                            <a:srgbClr val="FFFFFF"/>
-                          </a:solidFill>
-                          <a:latin typeface="Yu Gothic"/>
-                          <a:ea typeface="Yu Gothic"/>
-                          <a:cs typeface="Yu Gothic"/>
-                        </a:rPr>
-                        <a:t>これから</a:t>
-                      </a:r>
-                    </a:p>
-                  </a:txBody>
-                  <a:tcPr marL="54864" marR="54864" marT="18288" marB="18288" anchor="ctr">
-                    <a:solidFill>
-                      <a:srgbClr val="3A106E"/>
-                    </a:solidFill>
-                  </a:tcPr>
-                </a:tc>
-              </a:tr>
-              <a:tr h="566928">
-                <a:tc>
-                  <a:txBody>
-                    <a:bodyPr wrap="square"/>
-                    <a:lstStyle/>
-                    <a:p>
-                      <a:pPr algn="l">
-                        <a:spcAft>
-                          <a:spcPts val="100"/>
-                        </a:spcAft>
-                      </a:pPr>
-                      <a:r>
-                        <a:rPr sz="950" b="1" i="0">
-                          <a:solidFill>
-                            <a:srgbClr val="3A106E"/>
-                          </a:solidFill>
-                          <a:latin typeface="Yu Gothic"/>
-                          <a:ea typeface="Yu Gothic"/>
-                          <a:cs typeface="Yu Gothic"/>
-                        </a:rPr>
-                        <a:t>営業改革で始めるとお話ししていた「週次の営業会議（案件・停滞の確認）」</a:t>
-                      </a:r>
-                    </a:p>
-                  </a:txBody>
-                  <a:tcPr marL="54864" marR="54864" marT="18288" marB="18288" anchor="ctr">
-                    <a:solidFill>
-                      <a:srgbClr val="FFFFFF"/>
-                    </a:solidFill>
-                  </a:tcPr>
-                </a:tc>
-                <a:tc>
-                  <a:txBody>
-                    <a:bodyPr wrap="square"/>
-                    <a:lstStyle/>
-                    <a:p>
-                      <a:pPr algn="l">
-                        <a:spcAft>
-                          <a:spcPts val="100"/>
-                        </a:spcAft>
-                      </a:pPr>
-                      <a:r>
-                        <a:rPr sz="950" b="0" i="0">
-                          <a:solidFill>
-                            <a:srgbClr val="262630"/>
-                          </a:solidFill>
-                          <a:latin typeface="Yu Gothic"/>
-                          <a:ea typeface="Yu Gothic"/>
-                          <a:cs typeface="Yu Gothic"/>
-                        </a:rPr>
-                        <a:t>ライセンス営業改革分科会に統合（案件リストや時間の記録などの道具はそのまま使います）</a:t>
-                      </a:r>
-                    </a:p>
-                  </a:txBody>
-                  <a:tcPr marL="54864" marR="54864" marT="18288" marB="18288" anchor="ctr">
-                    <a:solidFill>
-                      <a:srgbClr val="FFFFFF"/>
-                    </a:solidFill>
-                  </a:tcPr>
-                </a:tc>
-              </a:tr>
-              <a:tr h="566928">
-                <a:tc>
-                  <a:txBody>
-                    <a:bodyPr wrap="square"/>
-                    <a:lstStyle/>
-                    <a:p>
-                      <a:pPr algn="l">
-                        <a:spcAft>
-                          <a:spcPts val="100"/>
-                        </a:spcAft>
-                      </a:pPr>
-                      <a:r>
-                        <a:rPr sz="950" b="1" i="0">
-                          <a:solidFill>
-                            <a:srgbClr val="3A106E"/>
-                          </a:solidFill>
-                          <a:latin typeface="Yu Gothic"/>
-                          <a:ea typeface="Yu Gothic"/>
-                          <a:cs typeface="Yu Gothic"/>
-                        </a:rPr>
-                        <a:t>同じく「月例の案件会議（経営出席で、やめる案件などを決める場）」</a:t>
-                      </a:r>
-                    </a:p>
-                  </a:txBody>
-                  <a:tcPr marL="54864" marR="54864" marT="18288" marB="18288" anchor="ctr">
-                    <a:solidFill>
-                      <a:srgbClr val="F7F7F9"/>
-                    </a:solidFill>
-                  </a:tcPr>
-                </a:tc>
-                <a:tc>
-                  <a:txBody>
-                    <a:bodyPr wrap="square"/>
-                    <a:lstStyle/>
-                    <a:p>
-                      <a:pPr algn="l">
-                        <a:spcAft>
-                          <a:spcPts val="100"/>
-                        </a:spcAft>
-                      </a:pPr>
-                      <a:r>
-                        <a:rPr sz="950" b="0" i="0">
-                          <a:solidFill>
-                            <a:srgbClr val="262630"/>
-                          </a:solidFill>
-                          <a:latin typeface="Yu Gothic"/>
-                          <a:ea typeface="Yu Gothic"/>
-                          <a:cs typeface="Yu Gothic"/>
-                        </a:rPr>
-                        <a:t>戦略会議と点検会議に役割を分けて統合（人・時間の配分は戦略会議、大きな判断は点検会議）</a:t>
-                      </a:r>
-                    </a:p>
-                  </a:txBody>
-                  <a:tcPr marL="54864" marR="54864" marT="18288" marB="18288" anchor="ctr">
-                    <a:solidFill>
-                      <a:srgbClr val="F7F7F9"/>
-                    </a:solidFill>
-                  </a:tcPr>
-                </a:tc>
-              </a:tr>
-              <a:tr h="566928">
-                <a:tc>
-                  <a:txBody>
-                    <a:bodyPr wrap="square"/>
-                    <a:lstStyle/>
-                    <a:p>
-                      <a:pPr algn="l">
-                        <a:spcAft>
-                          <a:spcPts val="100"/>
-                        </a:spcAft>
-                      </a:pPr>
-                      <a:r>
-                        <a:rPr sz="950" b="1" i="0">
-                          <a:solidFill>
-                            <a:srgbClr val="3A106E"/>
-                          </a:solidFill>
-                          <a:latin typeface="Yu Gothic"/>
-                          <a:ea typeface="Yu Gothic"/>
-                          <a:cs typeface="Yu Gothic"/>
-                        </a:rPr>
-                        <a:t>営業改革の「専任の推進チーム」</a:t>
-                      </a:r>
-                    </a:p>
-                  </a:txBody>
-                  <a:tcPr marL="54864" marR="54864" marT="18288" marB="18288" anchor="ctr">
-                    <a:solidFill>
-                      <a:srgbClr val="FFFFFF"/>
-                    </a:solidFill>
-                  </a:tcPr>
-                </a:tc>
-                <a:tc>
-                  <a:txBody>
-                    <a:bodyPr wrap="square"/>
-                    <a:lstStyle/>
-                    <a:p>
-                      <a:pPr algn="l">
-                        <a:spcAft>
-                          <a:spcPts val="100"/>
-                        </a:spcAft>
-                      </a:pPr>
-                      <a:r>
-                        <a:rPr sz="950" b="0" i="0">
-                          <a:solidFill>
-                            <a:srgbClr val="262630"/>
-                          </a:solidFill>
-                          <a:latin typeface="Yu Gothic"/>
-                          <a:ea typeface="Yu Gothic"/>
-                          <a:cs typeface="Yu Gothic"/>
-                        </a:rPr>
-                        <a:t>事務局チーム（PMO）に一本化（機能はそのまま）</a:t>
-                      </a:r>
-                    </a:p>
-                  </a:txBody>
-                  <a:tcPr marL="54864" marR="54864" marT="18288" marB="18288" anchor="ctr">
-                    <a:solidFill>
-                      <a:srgbClr val="FFFFFF"/>
-                    </a:solidFill>
-                  </a:tcPr>
-                </a:tc>
-              </a:tr>
-              <a:tr h="566928">
-                <a:tc>
-                  <a:txBody>
-                    <a:bodyPr wrap="square"/>
-                    <a:lstStyle/>
-                    <a:p>
-                      <a:pPr algn="l">
-                        <a:spcAft>
-                          <a:spcPts val="100"/>
-                        </a:spcAft>
-                      </a:pPr>
-                      <a:r>
-                        <a:rPr sz="950" b="1" i="0">
-                          <a:solidFill>
-                            <a:srgbClr val="3A106E"/>
-                          </a:solidFill>
-                          <a:latin typeface="Yu Gothic"/>
-                          <a:ea typeface="Yu Gothic"/>
-                          <a:cs typeface="Yu Gothic"/>
-                        </a:rPr>
-                        <a:t>各部門の定例会議・朝会など</a:t>
-                      </a:r>
-                    </a:p>
-                  </a:txBody>
-                  <a:tcPr marL="54864" marR="54864" marT="18288" marB="18288" anchor="ctr">
-                    <a:solidFill>
-                      <a:srgbClr val="F7F7F9"/>
-                    </a:solidFill>
-                  </a:tcPr>
-                </a:tc>
-                <a:tc>
-                  <a:txBody>
-                    <a:bodyPr wrap="square"/>
-                    <a:lstStyle/>
-                    <a:p>
-                      <a:pPr algn="l">
-                        <a:spcAft>
-                          <a:spcPts val="100"/>
-                        </a:spcAft>
-                      </a:pPr>
-                      <a:r>
-                        <a:rPr sz="950" b="0" i="0">
-                          <a:solidFill>
-                            <a:srgbClr val="262630"/>
-                          </a:solidFill>
-                          <a:latin typeface="Yu Gothic"/>
-                          <a:ea typeface="Yu Gothic"/>
-                          <a:cs typeface="Yu Gothic"/>
-                        </a:rPr>
-                        <a:t>変更なし（ただし構造改革に関わる論点は、部門会議ではなく分科会に持ち込んでください）</a:t>
-                      </a:r>
-                    </a:p>
-                  </a:txBody>
-                  <a:tcPr marL="54864" marR="54864" marT="18288" marB="18288" anchor="ctr">
-                    <a:solidFill>
-                      <a:srgbClr val="F7F7F9"/>
-                    </a:solidFill>
-                  </a:tcPr>
-                </a:tc>
-              </a:tr>
-            </a:tbl>
-          </a:graphicData>
-        </a:graphic>
-      </p:graphicFrame>
-      <p:sp>
-        <p:nvSpPr>
-          <p:cNvPr id="7" name="TextBox 6"/>
-          <p:cNvSpPr txBox="1"/>
-          <p:nvPr/>
-        </p:nvSpPr>
-        <p:spPr>
-          <a:xfrm>
-            <a:off x="502920" y="4526280"/>
-            <a:ext cx="11155680" cy="1097280"/>
-          </a:xfrm>
-          <a:prstGeom prst="rect">
-            <a:avLst/>
-          </a:prstGeom>
-          <a:noFill/>
-        </p:spPr>
-        <p:txBody>
-          <a:bodyPr wrap="square" lIns="0" rIns="0" tIns="0" bIns="0">
-            <a:spAutoFit/>
-          </a:bodyPr>
-          <a:lstStyle/>
-          <a:p>
-            <a:pPr algn="l">
-              <a:spcAft>
-                <a:spcPts val="400"/>
-              </a:spcAft>
-            </a:pPr>
-            <a:r>
-              <a:rPr sz="1200" b="1" i="0">
-                <a:solidFill>
-                  <a:srgbClr val="3A106E"/>
-                </a:solidFill>
-                <a:latin typeface="Yu Gothic"/>
-                <a:ea typeface="Yu Gothic"/>
-                <a:cs typeface="Yu Gothic"/>
-              </a:rPr>
-              <a:t>原則：同じ話を2つの会議でしない・同じデータを2か所で管理しない</a:t>
-            </a:r>
-          </a:p>
-          <a:p>
-            <a:pPr algn="l">
-              <a:spcAft>
-                <a:spcPts val="400"/>
-              </a:spcAft>
-            </a:pPr>
-            <a:r>
-              <a:rPr sz="1050" b="0" i="0">
-                <a:solidFill>
-                  <a:srgbClr val="262630"/>
-                </a:solidFill>
-                <a:latin typeface="Yu Gothic"/>
-                <a:ea typeface="Yu Gothic"/>
-                <a:cs typeface="Yu Gothic"/>
-              </a:rPr>
-              <a:t>案件リスト・決定の台帳・進捗の数字は1か所で管理し、全部の会議が同じものを見ます。「あの会議用の資料」を別に作ることはありません</a:t>
-            </a:r>
-          </a:p>
-        </p:txBody>
-      </p:sp>
-      <p:sp>
-        <p:nvSpPr>
-          <p:cNvPr id="8" name="Rectangle 7"/>
+          <p:cNvPr id="5" name="Rounded Rectangle 4"/>
           <p:cNvSpPr/>
           <p:nvPr/>
         </p:nvSpPr>
         <p:spPr>
           <a:xfrm>
-            <a:off x="502920" y="5870448"/>
-            <a:ext cx="11183112" cy="566928"/>
-          </a:xfrm>
-          <a:prstGeom prst="rect">
+            <a:off x="640080" y="2011680"/>
+            <a:ext cx="3566160" cy="3108960"/>
+          </a:xfrm>
+          <a:prstGeom prst="roundRect">
             <a:avLst/>
           </a:prstGeom>
           <a:solidFill>
             <a:srgbClr val="F3EFFB"/>
+          </a:solidFill>
+          <a:ln w="12700">
+            <a:solidFill>
+              <a:srgbClr val="7823DC"/>
+            </a:solidFill>
+          </a:ln>
+          <a:effectLst/>
+        </p:spPr>
+        <p:style>
+          <a:lnRef idx="1">
+            <a:schemeClr val="accent1"/>
+          </a:lnRef>
+          <a:fillRef idx="3">
+            <a:schemeClr val="accent1"/>
+          </a:fillRef>
+          <a:effectRef idx="2">
+            <a:schemeClr val="accent1"/>
+          </a:effectRef>
+          <a:fontRef idx="minor">
+            <a:schemeClr val="lt1"/>
+          </a:fontRef>
+        </p:style>
+        <p:txBody>
+          <a:bodyPr rtlCol="0" anchor="ctr"/>
+          <a:lstStyle/>
+          <a:p>
+            <a:pPr algn="ctr"/>
+          </a:p>
+        </p:txBody>
+      </p:sp>
+      <p:sp>
+        <p:nvSpPr>
+          <p:cNvPr id="6" name="Oval 5"/>
+          <p:cNvSpPr/>
+          <p:nvPr/>
+        </p:nvSpPr>
+        <p:spPr>
+          <a:xfrm>
+            <a:off x="2057400" y="1691640"/>
+            <a:ext cx="731520" cy="731520"/>
+          </a:xfrm>
+          <a:prstGeom prst="ellipse">
+            <a:avLst/>
+          </a:prstGeom>
+          <a:solidFill>
+            <a:srgbClr val="3A106E"/>
           </a:solidFill>
           <a:ln>
             <a:noFill/>
@@ -8054,20 +8988,243 @@
       </p:sp>
       <p:sp>
         <p:nvSpPr>
-          <p:cNvPr id="9" name="Rectangle 8"/>
+          <p:cNvPr id="7" name="TextBox 6"/>
+          <p:cNvSpPr txBox="1"/>
+          <p:nvPr/>
+        </p:nvSpPr>
+        <p:spPr>
+          <a:xfrm>
+            <a:off x="2057400" y="1691640"/>
+            <a:ext cx="731520" cy="731520"/>
+          </a:xfrm>
+          <a:prstGeom prst="rect">
+            <a:avLst/>
+          </a:prstGeom>
+          <a:noFill/>
+        </p:spPr>
+        <p:txBody>
+          <a:bodyPr wrap="square" lIns="0" rIns="0" tIns="0" bIns="0" anchor="ctr">
+            <a:spAutoFit/>
+          </a:bodyPr>
+          <a:lstStyle/>
+          <a:p>
+            <a:pPr algn="ctr">
+              <a:spcAft>
+                <a:spcPts val="200"/>
+              </a:spcAft>
+            </a:pPr>
+            <a:r>
+              <a:rPr sz="2000" b="1" i="0">
+                <a:solidFill>
+                  <a:srgbClr val="FFFFFF"/>
+                </a:solidFill>
+                <a:latin typeface="Yu Gothic"/>
+                <a:ea typeface="Yu Gothic"/>
+                <a:cs typeface="Yu Gothic"/>
+              </a:rPr>
+              <a:t>1</a:t>
+            </a:r>
+          </a:p>
+        </p:txBody>
+      </p:sp>
+      <p:sp>
+        <p:nvSpPr>
+          <p:cNvPr id="8" name="TextBox 7"/>
+          <p:cNvSpPr txBox="1"/>
+          <p:nvPr/>
+        </p:nvSpPr>
+        <p:spPr>
+          <a:xfrm>
+            <a:off x="822960" y="2606040"/>
+            <a:ext cx="3200400" cy="548640"/>
+          </a:xfrm>
+          <a:prstGeom prst="rect">
+            <a:avLst/>
+          </a:prstGeom>
+          <a:noFill/>
+        </p:spPr>
+        <p:txBody>
+          <a:bodyPr wrap="square" lIns="0" rIns="0" tIns="0" bIns="0" anchor="ctr">
+            <a:spAutoFit/>
+          </a:bodyPr>
+          <a:lstStyle/>
+          <a:p>
+            <a:pPr algn="ctr">
+              <a:spcAft>
+                <a:spcPts val="200"/>
+              </a:spcAft>
+            </a:pPr>
+            <a:r>
+              <a:rPr sz="1600" b="1" i="0">
+                <a:solidFill>
+                  <a:srgbClr val="3A106E"/>
+                </a:solidFill>
+                <a:latin typeface="Yu Gothic"/>
+                <a:ea typeface="Yu Gothic"/>
+                <a:cs typeface="Yu Gothic"/>
+              </a:rPr>
+              <a:t>人を出してください</a:t>
+            </a:r>
+          </a:p>
+        </p:txBody>
+      </p:sp>
+      <p:sp>
+        <p:nvSpPr>
+          <p:cNvPr id="9" name="TextBox 8"/>
+          <p:cNvSpPr txBox="1"/>
+          <p:nvPr/>
+        </p:nvSpPr>
+        <p:spPr>
+          <a:xfrm>
+            <a:off x="960120" y="3246120"/>
+            <a:ext cx="2926080" cy="1737360"/>
+          </a:xfrm>
+          <a:prstGeom prst="rect">
+            <a:avLst/>
+          </a:prstGeom>
+          <a:noFill/>
+        </p:spPr>
+        <p:txBody>
+          <a:bodyPr wrap="square" lIns="0" rIns="0" tIns="0" bIns="0">
+            <a:spAutoFit/>
+          </a:bodyPr>
+          <a:lstStyle/>
+          <a:p>
+            <a:pPr algn="l">
+              <a:spcAft>
+                <a:spcPts val="400"/>
+              </a:spcAft>
+            </a:pPr>
+            <a:r>
+              <a:rPr sz="1100" b="0" i="0">
+                <a:solidFill>
+                  <a:srgbClr val="262630"/>
+                </a:solidFill>
+                <a:latin typeface="Yu Gothic"/>
+                <a:ea typeface="Yu Gothic"/>
+                <a:cs typeface="Yu Gothic"/>
+              </a:rPr>
+              <a:t>自部門から分科会に出るメンバーを</a:t>
+            </a:r>
+          </a:p>
+          <a:p>
+            <a:pPr algn="l">
+              <a:spcAft>
+                <a:spcPts val="400"/>
+              </a:spcAft>
+            </a:pPr>
+            <a:r>
+              <a:rPr sz="1100" b="0" i="0">
+                <a:solidFill>
+                  <a:srgbClr val="262630"/>
+                </a:solidFill>
+                <a:latin typeface="Yu Gothic"/>
+                <a:ea typeface="Yu Gothic"/>
+                <a:cs typeface="Yu Gothic"/>
+              </a:rPr>
+              <a:t>1〜2名選んでください。</a:t>
+            </a:r>
+          </a:p>
+          <a:p>
+            <a:pPr algn="l">
+              <a:spcAft>
+                <a:spcPts val="400"/>
+              </a:spcAft>
+            </a:pPr>
+            <a:r>
+              <a:rPr sz="1100" b="0" i="0">
+                <a:solidFill>
+                  <a:srgbClr val="262630"/>
+                </a:solidFill>
+                <a:latin typeface="Yu Gothic"/>
+                <a:ea typeface="Yu Gothic"/>
+                <a:cs typeface="Yu Gothic"/>
+              </a:rPr>
+              <a:t>負荷は週2〜4時間の想定。</a:t>
+            </a:r>
+          </a:p>
+          <a:p>
+            <a:pPr algn="l">
+              <a:spcAft>
+                <a:spcPts val="400"/>
+              </a:spcAft>
+            </a:pPr>
+            <a:r>
+              <a:rPr sz="1100" b="0" i="0">
+                <a:solidFill>
+                  <a:srgbClr val="262630"/>
+                </a:solidFill>
+                <a:latin typeface="Yu Gothic"/>
+                <a:ea typeface="Yu Gothic"/>
+                <a:cs typeface="Yu Gothic"/>
+              </a:rPr>
+              <a:t>今週中に個別にご相談します。</a:t>
+            </a:r>
+          </a:p>
+        </p:txBody>
+      </p:sp>
+      <p:sp>
+        <p:nvSpPr>
+          <p:cNvPr id="10" name="Rounded Rectangle 9"/>
           <p:cNvSpPr/>
           <p:nvPr/>
         </p:nvSpPr>
         <p:spPr>
           <a:xfrm>
-            <a:off x="502920" y="5870448"/>
-            <a:ext cx="38100" cy="566928"/>
-          </a:xfrm>
-          <a:prstGeom prst="rect">
+            <a:off x="4434840" y="2011680"/>
+            <a:ext cx="3566160" cy="3108960"/>
+          </a:xfrm>
+          <a:prstGeom prst="roundRect">
             <a:avLst/>
           </a:prstGeom>
           <a:solidFill>
-            <a:srgbClr val="7823DC"/>
+            <a:srgbClr val="F3EFFB"/>
+          </a:solidFill>
+          <a:ln w="12700">
+            <a:solidFill>
+              <a:srgbClr val="7823DC"/>
+            </a:solidFill>
+          </a:ln>
+          <a:effectLst/>
+        </p:spPr>
+        <p:style>
+          <a:lnRef idx="1">
+            <a:schemeClr val="accent1"/>
+          </a:lnRef>
+          <a:fillRef idx="3">
+            <a:schemeClr val="accent1"/>
+          </a:fillRef>
+          <a:effectRef idx="2">
+            <a:schemeClr val="accent1"/>
+          </a:effectRef>
+          <a:fontRef idx="minor">
+            <a:schemeClr val="lt1"/>
+          </a:fontRef>
+        </p:style>
+        <p:txBody>
+          <a:bodyPr rtlCol="0" anchor="ctr"/>
+          <a:lstStyle/>
+          <a:p>
+            <a:pPr algn="ctr"/>
+          </a:p>
+        </p:txBody>
+      </p:sp>
+      <p:sp>
+        <p:nvSpPr>
+          <p:cNvPr id="11" name="Oval 10"/>
+          <p:cNvSpPr/>
+          <p:nvPr/>
+        </p:nvSpPr>
+        <p:spPr>
+          <a:xfrm>
+            <a:off x="5852160" y="1691640"/>
+            <a:ext cx="731520" cy="731520"/>
+          </a:xfrm>
+          <a:prstGeom prst="ellipse">
+            <a:avLst/>
+          </a:prstGeom>
+          <a:solidFill>
+            <a:srgbClr val="3A106E"/>
           </a:solidFill>
           <a:ln>
             <a:noFill/>
@@ -8098,14 +9255,14 @@
       </p:sp>
       <p:sp>
         <p:nvSpPr>
-          <p:cNvPr id="10" name="TextBox 9"/>
+          <p:cNvPr id="12" name="TextBox 11"/>
           <p:cNvSpPr txBox="1"/>
           <p:nvPr/>
         </p:nvSpPr>
         <p:spPr>
           <a:xfrm>
-            <a:off x="685800" y="5934456"/>
-            <a:ext cx="10881360" cy="457200"/>
+            <a:off x="5852160" y="1691640"/>
+            <a:ext cx="731520" cy="731520"/>
           </a:xfrm>
           <a:prstGeom prst="rect">
             <a:avLst/>
@@ -8118,24 +9275,95 @@
           </a:bodyPr>
           <a:lstStyle/>
           <a:p>
+            <a:pPr algn="ctr">
+              <a:spcAft>
+                <a:spcPts val="200"/>
+              </a:spcAft>
+            </a:pPr>
+            <a:r>
+              <a:rPr sz="2000" b="1" i="0">
+                <a:solidFill>
+                  <a:srgbClr val="FFFFFF"/>
+                </a:solidFill>
+                <a:latin typeface="Yu Gothic"/>
+                <a:ea typeface="Yu Gothic"/>
+                <a:cs typeface="Yu Gothic"/>
+              </a:rPr>
+              <a:t>2</a:t>
+            </a:r>
+          </a:p>
+        </p:txBody>
+      </p:sp>
+      <p:sp>
+        <p:nvSpPr>
+          <p:cNvPr id="13" name="TextBox 12"/>
+          <p:cNvSpPr txBox="1"/>
+          <p:nvPr/>
+        </p:nvSpPr>
+        <p:spPr>
+          <a:xfrm>
+            <a:off x="4617720" y="2606040"/>
+            <a:ext cx="3200400" cy="548640"/>
+          </a:xfrm>
+          <a:prstGeom prst="rect">
+            <a:avLst/>
+          </a:prstGeom>
+          <a:noFill/>
+        </p:spPr>
+        <p:txBody>
+          <a:bodyPr wrap="square" lIns="0" rIns="0" tIns="0" bIns="0" anchor="ctr">
+            <a:spAutoFit/>
+          </a:bodyPr>
+          <a:lstStyle/>
+          <a:p>
+            <a:pPr algn="ctr">
+              <a:spcAft>
+                <a:spcPts val="200"/>
+              </a:spcAft>
+            </a:pPr>
+            <a:r>
+              <a:rPr sz="1600" b="1" i="0">
+                <a:solidFill>
+                  <a:srgbClr val="3A106E"/>
+                </a:solidFill>
+                <a:latin typeface="Yu Gothic"/>
+                <a:ea typeface="Yu Gothic"/>
+                <a:cs typeface="Yu Gothic"/>
+              </a:rPr>
+              <a:t>出てください</a:t>
+            </a:r>
+          </a:p>
+        </p:txBody>
+      </p:sp>
+      <p:sp>
+        <p:nvSpPr>
+          <p:cNvPr id="14" name="TextBox 13"/>
+          <p:cNvSpPr txBox="1"/>
+          <p:nvPr/>
+        </p:nvSpPr>
+        <p:spPr>
+          <a:xfrm>
+            <a:off x="4754880" y="3246120"/>
+            <a:ext cx="2926080" cy="1737360"/>
+          </a:xfrm>
+          <a:prstGeom prst="rect">
+            <a:avLst/>
+          </a:prstGeom>
+          <a:noFill/>
+        </p:spPr>
+        <p:txBody>
+          <a:bodyPr wrap="square" lIns="0" rIns="0" tIns="0" bIns="0">
+            <a:spAutoFit/>
+          </a:bodyPr>
+          <a:lstStyle/>
+          <a:p>
             <a:pPr algn="l">
               <a:spcAft>
                 <a:spcPts val="400"/>
               </a:spcAft>
             </a:pPr>
             <a:r>
-              <a:rPr sz="1000" b="1" i="0">
-                <a:solidFill>
-                  <a:srgbClr val="7823DC"/>
-                </a:solidFill>
-                <a:latin typeface="Yu Gothic"/>
-                <a:ea typeface="Yu Gothic"/>
-                <a:cs typeface="Yu Gothic"/>
-              </a:rPr>
-              <a:t>ここだけ覚えて帰ってください　</a:t>
-            </a:r>
-            <a:r>
-              <a:rPr sz="1000" b="0" i="0">
+              <a:rPr sz="1100" b="0" i="0">
                 <a:solidFill>
                   <a:srgbClr val="262630"/>
                 </a:solidFill>
@@ -8143,27 +9371,127 @@
                 <a:ea typeface="Yu Gothic"/>
                 <a:cs typeface="Yu Gothic"/>
               </a:rPr>
-              <a:t>「これも統合できるのでは」という会議があれば、質疑で挙げてください</a:t>
-            </a:r>
-          </a:p>
-        </p:txBody>
-      </p:sp>
-      <p:sp>
-        <p:nvSpPr>
-          <p:cNvPr id="11" name="Rectangle 10"/>
+              <a:t>自部門に関係する分科会に、</a:t>
+            </a:r>
+          </a:p>
+          <a:p>
+            <a:pPr algn="l">
+              <a:spcAft>
+                <a:spcPts val="400"/>
+              </a:spcAft>
+            </a:pPr>
+            <a:r>
+              <a:rPr sz="1100" b="0" i="0">
+                <a:solidFill>
+                  <a:srgbClr val="262630"/>
+                </a:solidFill>
+                <a:latin typeface="Yu Gothic"/>
+                <a:ea typeface="Yu Gothic"/>
+                <a:cs typeface="Yu Gothic"/>
+              </a:rPr>
+              <a:t>部長ご自身も出席してください。</a:t>
+            </a:r>
+          </a:p>
+          <a:p>
+            <a:pPr algn="l">
+              <a:spcAft>
+                <a:spcPts val="400"/>
+              </a:spcAft>
+            </a:pPr>
+            <a:r>
+              <a:rPr sz="1100" b="0" i="0">
+                <a:solidFill>
+                  <a:srgbClr val="262630"/>
+                </a:solidFill>
+                <a:latin typeface="Yu Gothic"/>
+                <a:ea typeface="Yu Gothic"/>
+                <a:cs typeface="Yu Gothic"/>
+              </a:rPr>
+              <a:t>週1回・60〜90分。</a:t>
+            </a:r>
+          </a:p>
+          <a:p>
+            <a:pPr algn="l">
+              <a:spcAft>
+                <a:spcPts val="400"/>
+              </a:spcAft>
+            </a:pPr>
+            <a:r>
+              <a:rPr sz="1100" b="0" i="0">
+                <a:solidFill>
+                  <a:srgbClr val="262630"/>
+                </a:solidFill>
+                <a:latin typeface="Yu Gothic"/>
+                <a:ea typeface="Yu Gothic"/>
+                <a:cs typeface="Yu Gothic"/>
+              </a:rPr>
+              <a:t>部門の意見を「決定」に反映する場です。</a:t>
+            </a:r>
+          </a:p>
+        </p:txBody>
+      </p:sp>
+      <p:sp>
+        <p:nvSpPr>
+          <p:cNvPr id="15" name="Rounded Rectangle 14"/>
           <p:cNvSpPr/>
           <p:nvPr/>
         </p:nvSpPr>
         <p:spPr>
           <a:xfrm>
-            <a:off x="502920" y="6510528"/>
-            <a:ext cx="11183112" cy="15240"/>
-          </a:xfrm>
-          <a:prstGeom prst="rect">
+            <a:off x="8229600" y="2011680"/>
+            <a:ext cx="3566160" cy="3108960"/>
+          </a:xfrm>
+          <a:prstGeom prst="roundRect">
             <a:avLst/>
           </a:prstGeom>
           <a:solidFill>
-            <a:srgbClr val="D9D9E0"/>
+            <a:srgbClr val="F3EFFB"/>
+          </a:solidFill>
+          <a:ln w="12700">
+            <a:solidFill>
+              <a:srgbClr val="7823DC"/>
+            </a:solidFill>
+          </a:ln>
+          <a:effectLst/>
+        </p:spPr>
+        <p:style>
+          <a:lnRef idx="1">
+            <a:schemeClr val="accent1"/>
+          </a:lnRef>
+          <a:fillRef idx="3">
+            <a:schemeClr val="accent1"/>
+          </a:fillRef>
+          <a:effectRef idx="2">
+            <a:schemeClr val="accent1"/>
+          </a:effectRef>
+          <a:fontRef idx="minor">
+            <a:schemeClr val="lt1"/>
+          </a:fontRef>
+        </p:style>
+        <p:txBody>
+          <a:bodyPr rtlCol="0" anchor="ctr"/>
+          <a:lstStyle/>
+          <a:p>
+            <a:pPr algn="ctr"/>
+          </a:p>
+        </p:txBody>
+      </p:sp>
+      <p:sp>
+        <p:nvSpPr>
+          <p:cNvPr id="16" name="Oval 15"/>
+          <p:cNvSpPr/>
+          <p:nvPr/>
+        </p:nvSpPr>
+        <p:spPr>
+          <a:xfrm>
+            <a:off x="9646920" y="1691640"/>
+            <a:ext cx="731520" cy="731520"/>
+          </a:xfrm>
+          <a:prstGeom prst="ellipse">
+            <a:avLst/>
+          </a:prstGeom>
+          <a:solidFill>
+            <a:srgbClr val="3A106E"/>
           </a:solidFill>
           <a:ln>
             <a:noFill/>
@@ -8194,14 +9522,96 @@
       </p:sp>
       <p:sp>
         <p:nvSpPr>
-          <p:cNvPr id="12" name="TextBox 11"/>
+          <p:cNvPr id="17" name="TextBox 16"/>
           <p:cNvSpPr txBox="1"/>
           <p:nvPr/>
         </p:nvSpPr>
         <p:spPr>
           <a:xfrm>
-            <a:off x="502920" y="6565392"/>
-            <a:ext cx="8229600" cy="274320"/>
+            <a:off x="9646920" y="1691640"/>
+            <a:ext cx="731520" cy="731520"/>
+          </a:xfrm>
+          <a:prstGeom prst="rect">
+            <a:avLst/>
+          </a:prstGeom>
+          <a:noFill/>
+        </p:spPr>
+        <p:txBody>
+          <a:bodyPr wrap="square" lIns="0" rIns="0" tIns="0" bIns="0" anchor="ctr">
+            <a:spAutoFit/>
+          </a:bodyPr>
+          <a:lstStyle/>
+          <a:p>
+            <a:pPr algn="ctr">
+              <a:spcAft>
+                <a:spcPts val="200"/>
+              </a:spcAft>
+            </a:pPr>
+            <a:r>
+              <a:rPr sz="2000" b="1" i="0">
+                <a:solidFill>
+                  <a:srgbClr val="FFFFFF"/>
+                </a:solidFill>
+                <a:latin typeface="Yu Gothic"/>
+                <a:ea typeface="Yu Gothic"/>
+                <a:cs typeface="Yu Gothic"/>
+              </a:rPr>
+              <a:t>3</a:t>
+            </a:r>
+          </a:p>
+        </p:txBody>
+      </p:sp>
+      <p:sp>
+        <p:nvSpPr>
+          <p:cNvPr id="18" name="TextBox 17"/>
+          <p:cNvSpPr txBox="1"/>
+          <p:nvPr/>
+        </p:nvSpPr>
+        <p:spPr>
+          <a:xfrm>
+            <a:off x="8412480" y="2606040"/>
+            <a:ext cx="3200400" cy="548640"/>
+          </a:xfrm>
+          <a:prstGeom prst="rect">
+            <a:avLst/>
+          </a:prstGeom>
+          <a:noFill/>
+        </p:spPr>
+        <p:txBody>
+          <a:bodyPr wrap="square" lIns="0" rIns="0" tIns="0" bIns="0" anchor="ctr">
+            <a:spAutoFit/>
+          </a:bodyPr>
+          <a:lstStyle/>
+          <a:p>
+            <a:pPr algn="ctr">
+              <a:spcAft>
+                <a:spcPts val="200"/>
+              </a:spcAft>
+            </a:pPr>
+            <a:r>
+              <a:rPr sz="1600" b="1" i="0">
+                <a:solidFill>
+                  <a:srgbClr val="3A106E"/>
+                </a:solidFill>
+                <a:latin typeface="Yu Gothic"/>
+                <a:ea typeface="Yu Gothic"/>
+                <a:cs typeface="Yu Gothic"/>
+              </a:rPr>
+              <a:t>伝えてください</a:t>
+            </a:r>
+          </a:p>
+        </p:txBody>
+      </p:sp>
+      <p:sp>
+        <p:nvSpPr>
+          <p:cNvPr id="19" name="TextBox 18"/>
+          <p:cNvSpPr txBox="1"/>
+          <p:nvPr/>
+        </p:nvSpPr>
+        <p:spPr>
+          <a:xfrm>
+            <a:off x="8549640" y="3246120"/>
+            <a:ext cx="2926080" cy="1737360"/>
           </a:xfrm>
           <a:prstGeom prst="rect">
             <a:avLst/>
@@ -8220,6 +9630,142 @@
               </a:spcAft>
             </a:pPr>
             <a:r>
+              <a:rPr sz="1100" b="0" i="0">
+                <a:solidFill>
+                  <a:srgbClr val="262630"/>
+                </a:solidFill>
+                <a:latin typeface="Yu Gothic"/>
+                <a:ea typeface="Yu Gothic"/>
+                <a:cs typeface="Yu Gothic"/>
+              </a:rPr>
+              <a:t>会議で決まったことを、</a:t>
+            </a:r>
+          </a:p>
+          <a:p>
+            <a:pPr algn="l">
+              <a:spcAft>
+                <a:spcPts val="400"/>
+              </a:spcAft>
+            </a:pPr>
+            <a:r>
+              <a:rPr sz="1100" b="0" i="0">
+                <a:solidFill>
+                  <a:srgbClr val="262630"/>
+                </a:solidFill>
+                <a:latin typeface="Yu Gothic"/>
+                <a:ea typeface="Yu Gothic"/>
+                <a:cs typeface="Yu Gothic"/>
+              </a:rPr>
+              <a:t>部門のメンバーに伝えて動かしてください。</a:t>
+            </a:r>
+          </a:p>
+          <a:p>
+            <a:pPr algn="l">
+              <a:spcAft>
+                <a:spcPts val="400"/>
+              </a:spcAft>
+            </a:pPr>
+            <a:r>
+              <a:rPr sz="1100" b="0" i="0">
+                <a:solidFill>
+                  <a:srgbClr val="262630"/>
+                </a:solidFill>
+                <a:latin typeface="Yu Gothic"/>
+                <a:ea typeface="Yu Gothic"/>
+                <a:cs typeface="Yu Gothic"/>
+              </a:rPr>
+              <a:t>決定の台帳は毎回、全部長に</a:t>
+            </a:r>
+          </a:p>
+          <a:p>
+            <a:pPr algn="l">
+              <a:spcAft>
+                <a:spcPts val="400"/>
+              </a:spcAft>
+            </a:pPr>
+            <a:r>
+              <a:rPr sz="1100" b="0" i="0">
+                <a:solidFill>
+                  <a:srgbClr val="262630"/>
+                </a:solidFill>
+                <a:latin typeface="Yu Gothic"/>
+                <a:ea typeface="Yu Gothic"/>
+                <a:cs typeface="Yu Gothic"/>
+              </a:rPr>
+              <a:t>共有されます。</a:t>
+            </a:r>
+          </a:p>
+        </p:txBody>
+      </p:sp>
+      <p:sp>
+        <p:nvSpPr>
+          <p:cNvPr id="20" name="TextBox 19"/>
+          <p:cNvSpPr txBox="1"/>
+          <p:nvPr/>
+        </p:nvSpPr>
+        <p:spPr>
+          <a:xfrm>
+            <a:off x="640080" y="5486400"/>
+            <a:ext cx="10972800" cy="457200"/>
+          </a:xfrm>
+          <a:prstGeom prst="rect">
+            <a:avLst/>
+          </a:prstGeom>
+          <a:noFill/>
+        </p:spPr>
+        <p:txBody>
+          <a:bodyPr wrap="square" lIns="0" rIns="0" tIns="0" bIns="0">
+            <a:spAutoFit/>
+          </a:bodyPr>
+          <a:lstStyle/>
+          <a:p>
+            <a:pPr algn="l">
+              <a:spcAft>
+                <a:spcPts val="400"/>
+              </a:spcAft>
+            </a:pPr>
+            <a:r>
+              <a:rPr sz="1300" b="1" i="0">
+                <a:solidFill>
+                  <a:srgbClr val="7823DC"/>
+                </a:solidFill>
+                <a:latin typeface="Yu Gothic"/>
+                <a:ea typeface="Yu Gothic"/>
+                <a:cs typeface="Yu Gothic"/>
+              </a:rPr>
+              <a:t>議事録づくり・資料づくり・進捗の取りまとめは、すべて事務局がやります。皆さんにはお願いしません</a:t>
+            </a:r>
+          </a:p>
+        </p:txBody>
+      </p:sp>
+      <p:sp>
+        <p:nvSpPr>
+          <p:cNvPr id="21" name="TextBox 20"/>
+          <p:cNvSpPr txBox="1"/>
+          <p:nvPr/>
+        </p:nvSpPr>
+        <p:spPr>
+          <a:xfrm>
+            <a:off x="502920" y="6565392"/>
+            <a:ext cx="8229600" cy="274320"/>
+          </a:xfrm>
+          <a:prstGeom prst="rect">
+            <a:avLst/>
+          </a:prstGeom>
+          <a:noFill/>
+        </p:spPr>
+        <p:txBody>
+          <a:bodyPr wrap="square" lIns="0" rIns="0" tIns="0" bIns="0">
+            <a:spAutoFit/>
+          </a:bodyPr>
+          <a:lstStyle/>
+          <a:p>
+            <a:pPr algn="l">
+              <a:spcAft>
+                <a:spcPts val="400"/>
+              </a:spcAft>
+            </a:pPr>
+            <a:r>
               <a:rPr sz="750" b="0" i="0">
                 <a:solidFill>
                   <a:srgbClr val="8A8A99"/>
@@ -8228,14 +9774,14 @@
                 <a:ea typeface="Yu Gothic"/>
                 <a:cs typeface="Yu Gothic"/>
               </a:rPr>
-              <a:t>円谷プロダクション｜構造改革の新しい会議の仕組み 部長会共有資料（社外秘）</a:t>
-            </a:r>
-          </a:p>
-        </p:txBody>
-      </p:sp>
-      <p:sp>
-        <p:nvSpPr>
-          <p:cNvPr id="13" name="TextBox 12"/>
+              <a:t>円谷プロダクション｜新しい会議の仕組み（部長会・社外秘）</a:t>
+            </a:r>
+          </a:p>
+        </p:txBody>
+      </p:sp>
+      <p:sp>
+        <p:nvSpPr>
+          <p:cNvPr id="22" name="TextBox 21"/>
           <p:cNvSpPr txBox="1"/>
           <p:nvPr/>
         </p:nvSpPr>
@@ -8300,8 +9846,8 @@
         </p:nvSpPr>
         <p:spPr>
           <a:xfrm>
-            <a:off x="502920" y="256032"/>
-            <a:ext cx="11155680" cy="256032"/>
+            <a:off x="502920" y="320040"/>
+            <a:ext cx="11155680" cy="274320"/>
           </a:xfrm>
           <a:prstGeom prst="rect">
             <a:avLst/>
@@ -8320,7 +9866,7 @@
               </a:spcAft>
             </a:pPr>
             <a:r>
-              <a:rPr sz="1000" b="1" i="0">
+              <a:rPr sz="1100" b="1" i="0">
                 <a:solidFill>
                   <a:srgbClr val="7823DC"/>
                 </a:solidFill>
@@ -8328,7 +9874,7 @@
                 <a:ea typeface="Yu Gothic"/>
                 <a:cs typeface="Yu Gothic"/>
               </a:rPr>
-              <a:t>皆さんへのお願い（2分）</a:t>
+              <a:t>最後に</a:t>
             </a:r>
           </a:p>
         </p:txBody>
@@ -8341,8 +9887,8 @@
         </p:nvSpPr>
         <p:spPr>
           <a:xfrm>
-            <a:off x="502920" y="512064"/>
-            <a:ext cx="11155680" cy="868680"/>
+            <a:off x="502920" y="621792"/>
+            <a:ext cx="11155680" cy="685800"/>
           </a:xfrm>
           <a:prstGeom prst="rect">
             <a:avLst/>
@@ -8357,11 +9903,11 @@
           <a:p>
             <a:pPr algn="l">
               <a:spcAft>
-                <a:spcPts val="0"/>
-              </a:spcAft>
-            </a:pPr>
-            <a:r>
-              <a:rPr sz="1900" b="1" i="0">
+                <a:spcPts val="400"/>
+              </a:spcAft>
+            </a:pPr>
+            <a:r>
+              <a:rPr sz="2400" b="1" i="0">
                 <a:solidFill>
                   <a:srgbClr val="262630"/>
                 </a:solidFill>
@@ -8369,7 +9915,7 @@
                 <a:ea typeface="Yu Gothic"/>
                 <a:cs typeface="Yu Gothic"/>
               </a:rPr>
-              <a:t>部長の皆さんにお願いしたいことは4つ</a:t>
+              <a:t>会議は増やしません——重なるものは、この仕組みに統合します</a:t>
             </a:r>
           </a:p>
         </p:txBody>
@@ -8382,8 +9928,8 @@
         </p:nvSpPr>
         <p:spPr>
           <a:xfrm>
-            <a:off x="502920" y="1389888"/>
-            <a:ext cx="1463040" cy="33020"/>
+            <a:off x="502920" y="1371600"/>
+            <a:ext cx="1645920" cy="38100"/>
           </a:xfrm>
           <a:prstGeom prst="rect">
             <a:avLst/>
@@ -8420,14 +9966,58 @@
       </p:sp>
       <p:sp>
         <p:nvSpPr>
-          <p:cNvPr id="5" name="TextBox 4"/>
+          <p:cNvPr id="5" name="Rectangle 4"/>
+          <p:cNvSpPr/>
+          <p:nvPr/>
+        </p:nvSpPr>
+        <p:spPr>
+          <a:xfrm>
+            <a:off x="640080" y="1965960"/>
+            <a:ext cx="5760720" cy="640080"/>
+          </a:xfrm>
+          <a:prstGeom prst="rect">
+            <a:avLst/>
+          </a:prstGeom>
+          <a:solidFill>
+            <a:srgbClr val="F7F7F9"/>
+          </a:solidFill>
+          <a:ln>
+            <a:noFill/>
+          </a:ln>
+          <a:effectLst/>
+        </p:spPr>
+        <p:style>
+          <a:lnRef idx="1">
+            <a:schemeClr val="accent1"/>
+          </a:lnRef>
+          <a:fillRef idx="3">
+            <a:schemeClr val="accent1"/>
+          </a:fillRef>
+          <a:effectRef idx="2">
+            <a:schemeClr val="accent1"/>
+          </a:effectRef>
+          <a:fontRef idx="minor">
+            <a:schemeClr val="lt1"/>
+          </a:fontRef>
+        </p:style>
+        <p:txBody>
+          <a:bodyPr rtlCol="0" anchor="ctr"/>
+          <a:lstStyle/>
+          <a:p>
+            <a:pPr algn="ctr"/>
+          </a:p>
+        </p:txBody>
+      </p:sp>
+      <p:sp>
+        <p:nvSpPr>
+          <p:cNvPr id="6" name="TextBox 5"/>
           <p:cNvSpPr txBox="1"/>
           <p:nvPr/>
         </p:nvSpPr>
         <p:spPr>
           <a:xfrm>
-            <a:off x="502920" y="1517904"/>
-            <a:ext cx="11155680" cy="310896"/>
+            <a:off x="822960" y="1965960"/>
+            <a:ext cx="5486400" cy="640080"/>
           </a:xfrm>
           <a:prstGeom prst="rect">
             <a:avLst/>
@@ -8435,73 +10025,14 @@
           <a:noFill/>
         </p:spPr>
         <p:txBody>
-          <a:bodyPr wrap="square" lIns="0" rIns="0" tIns="0" bIns="0">
+          <a:bodyPr wrap="square" lIns="0" rIns="0" tIns="0" bIns="0" anchor="ctr">
             <a:spAutoFit/>
           </a:bodyPr>
           <a:lstStyle/>
           <a:p>
             <a:pPr algn="l">
               <a:spcAft>
-                <a:spcPts val="400"/>
-              </a:spcAft>
-            </a:pPr>
-            <a:r>
-              <a:rPr sz="1150" b="1" i="0">
-                <a:solidFill>
-                  <a:srgbClr val="3A106E"/>
-                </a:solidFill>
-                <a:latin typeface="Yu Gothic"/>
-                <a:ea typeface="Yu Gothic"/>
-                <a:cs typeface="Yu Gothic"/>
-              </a:rPr>
-              <a:t>いずれも詳細は個別にご相談します。本日は全体像だけ頭に入れてください</a:t>
-            </a:r>
-          </a:p>
-        </p:txBody>
-      </p:sp>
-      <p:sp>
-        <p:nvSpPr>
-          <p:cNvPr id="6" name="TextBox 5"/>
-          <p:cNvSpPr txBox="1"/>
-          <p:nvPr/>
-        </p:nvSpPr>
-        <p:spPr>
-          <a:xfrm>
-            <a:off x="502920" y="1865376"/>
-            <a:ext cx="11155680" cy="3931920"/>
-          </a:xfrm>
-          <a:prstGeom prst="rect">
-            <a:avLst/>
-          </a:prstGeom>
-          <a:noFill/>
-        </p:spPr>
-        <p:txBody>
-          <a:bodyPr wrap="square" lIns="0" rIns="0" tIns="0" bIns="0">
-            <a:spAutoFit/>
-          </a:bodyPr>
-          <a:lstStyle/>
-          <a:p>
-            <a:pPr algn="l">
-              <a:spcAft>
-                <a:spcPts val="300"/>
-              </a:spcAft>
-            </a:pPr>
-            <a:r>
-              <a:rPr sz="1200" b="1" i="0">
-                <a:solidFill>
-                  <a:srgbClr val="3A106E"/>
-                </a:solidFill>
-                <a:latin typeface="Yu Gothic"/>
-                <a:ea typeface="Yu Gothic"/>
-                <a:cs typeface="Yu Gothic"/>
-              </a:rPr>
-              <a:t>① 分科会メンバーの人選への協力</a:t>
-            </a:r>
-          </a:p>
-          <a:p>
-            <a:pPr algn="l">
-              <a:spcAft>
-                <a:spcPts val="600"/>
+                <a:spcPts val="200"/>
               </a:spcAft>
             </a:pPr>
             <a:r>
@@ -8513,115 +10044,7 @@
                 <a:ea typeface="Yu Gothic"/>
                 <a:cs typeface="Yu Gothic"/>
               </a:rPr>
-              <a:t>■ 自部門から分科会に参加するメンバーの選出。実務が分かり、部門を代表して発言できる方を。兼務前提で、負荷は週2〜4時間想定</a:t>
-            </a:r>
-          </a:p>
-          <a:p>
-            <a:pPr algn="l">
-              <a:spcAft>
-                <a:spcPts val="300"/>
-              </a:spcAft>
-            </a:pPr>
-            <a:r>
-              <a:rPr sz="1200" b="1" i="0">
-                <a:solidFill>
-                  <a:srgbClr val="3A106E"/>
-                </a:solidFill>
-                <a:latin typeface="Yu Gothic"/>
-                <a:ea typeface="Yu Gothic"/>
-                <a:cs typeface="Yu Gothic"/>
-              </a:rPr>
-              <a:t>② 関係する分科会への出席</a:t>
-            </a:r>
-          </a:p>
-          <a:p>
-            <a:pPr algn="l">
-              <a:spcAft>
-                <a:spcPts val="600"/>
-              </a:spcAft>
-            </a:pPr>
-            <a:r>
-              <a:rPr sz="1150" b="0" i="0">
-                <a:solidFill>
-                  <a:srgbClr val="262630"/>
-                </a:solidFill>
-                <a:latin typeface="Yu Gothic"/>
-                <a:ea typeface="Yu Gothic"/>
-                <a:cs typeface="Yu Gothic"/>
-              </a:rPr>
-              <a:t>■ 自部門に関係が深い分科会には、部長ご自身にも出ていただきます（毎週60〜90分）。「決定」に部門の声を反映する場です</a:t>
-            </a:r>
-          </a:p>
-          <a:p>
-            <a:pPr algn="l">
-              <a:spcAft>
-                <a:spcPts val="300"/>
-              </a:spcAft>
-            </a:pPr>
-            <a:r>
-              <a:rPr sz="1200" b="1" i="0">
-                <a:solidFill>
-                  <a:srgbClr val="3A106E"/>
-                </a:solidFill>
-                <a:latin typeface="Yu Gothic"/>
-                <a:ea typeface="Yu Gothic"/>
-                <a:cs typeface="Yu Gothic"/>
-              </a:rPr>
-              <a:t>③ 決まったことの部内への展開</a:t>
-            </a:r>
-          </a:p>
-          <a:p>
-            <a:pPr algn="l">
-              <a:spcAft>
-                <a:spcPts val="600"/>
-              </a:spcAft>
-            </a:pPr>
-            <a:r>
-              <a:rPr sz="1150" b="0" i="0">
-                <a:solidFill>
-                  <a:srgbClr val="262630"/>
-                </a:solidFill>
-                <a:latin typeface="Yu Gothic"/>
-                <a:ea typeface="Yu Gothic"/>
-                <a:cs typeface="Yu Gothic"/>
-              </a:rPr>
-              <a:t>■ 分科会・戦略会議・点検会議で決まったことを、自部門のメンバーに伝えて動かす。決定の台帳は全部長に共有されます</a:t>
-            </a:r>
-          </a:p>
-          <a:p>
-            <a:pPr algn="l">
-              <a:spcAft>
-                <a:spcPts val="300"/>
-              </a:spcAft>
-            </a:pPr>
-            <a:r>
-              <a:rPr sz="1200" b="1" i="0">
-                <a:solidFill>
-                  <a:srgbClr val="3A106E"/>
-                </a:solidFill>
-                <a:latin typeface="Yu Gothic"/>
-                <a:ea typeface="Yu Gothic"/>
-                <a:cs typeface="Yu Gothic"/>
-              </a:rPr>
-              <a:t>④ 論点を「上げる」習慣づけ</a:t>
-            </a:r>
-          </a:p>
-          <a:p>
-            <a:pPr algn="l">
-              <a:spcAft>
-                <a:spcPts val="600"/>
-              </a:spcAft>
-            </a:pPr>
-            <a:r>
-              <a:rPr sz="1150" b="0" i="0">
-                <a:solidFill>
-                  <a:srgbClr val="262630"/>
-                </a:solidFill>
-                <a:latin typeface="Yu Gothic"/>
-                <a:ea typeface="Yu Gothic"/>
-                <a:cs typeface="Yu Gothic"/>
-              </a:rPr>
-              <a:t>■ 部門で抱えて止まっている構造改革関連の課題は、分科会に持ち込んでください。上げることは失点ではなく、この仕組みの正しい使い方です</a:t>
+              <a:t>営業の案件を確認する週次の会議（構想中だったもの）</a:t>
             </a:r>
           </a:p>
         </p:txBody>
@@ -8634,8 +10057,8 @@
         </p:nvSpPr>
         <p:spPr>
           <a:xfrm>
-            <a:off x="502920" y="5870448"/>
-            <a:ext cx="11183112" cy="566928"/>
+            <a:off x="6537960" y="1965960"/>
+            <a:ext cx="5120640" cy="640080"/>
           </a:xfrm>
           <a:prstGeom prst="rect">
             <a:avLst/>
@@ -8672,14 +10095,534 @@
       </p:sp>
       <p:sp>
         <p:nvSpPr>
-          <p:cNvPr id="8" name="Rectangle 7"/>
+          <p:cNvPr id="8" name="TextBox 7"/>
+          <p:cNvSpPr txBox="1"/>
+          <p:nvPr/>
+        </p:nvSpPr>
+        <p:spPr>
+          <a:xfrm>
+            <a:off x="6675120" y="1965960"/>
+            <a:ext cx="4892040" cy="640080"/>
+          </a:xfrm>
+          <a:prstGeom prst="rect">
+            <a:avLst/>
+          </a:prstGeom>
+          <a:noFill/>
+        </p:spPr>
+        <p:txBody>
+          <a:bodyPr wrap="square" lIns="0" rIns="0" tIns="0" bIns="0" anchor="ctr">
+            <a:spAutoFit/>
+          </a:bodyPr>
+          <a:lstStyle/>
+          <a:p>
+            <a:pPr algn="l">
+              <a:spcAft>
+                <a:spcPts val="200"/>
+              </a:spcAft>
+            </a:pPr>
+            <a:r>
+              <a:rPr sz="1150" b="1" i="0">
+                <a:solidFill>
+                  <a:srgbClr val="3A106E"/>
+                </a:solidFill>
+                <a:latin typeface="Yu Gothic"/>
+                <a:ea typeface="Yu Gothic"/>
+                <a:cs typeface="Yu Gothic"/>
+              </a:rPr>
+              <a:t>→ ライセンス営業改革分科会がその役割を持ちます</a:t>
+            </a:r>
+          </a:p>
+        </p:txBody>
+      </p:sp>
+      <p:sp>
+        <p:nvSpPr>
+          <p:cNvPr id="9" name="Rectangle 8"/>
           <p:cNvSpPr/>
           <p:nvPr/>
         </p:nvSpPr>
         <p:spPr>
           <a:xfrm>
-            <a:off x="502920" y="5870448"/>
-            <a:ext cx="38100" cy="566928"/>
+            <a:off x="640080" y="2743200"/>
+            <a:ext cx="5760720" cy="640080"/>
+          </a:xfrm>
+          <a:prstGeom prst="rect">
+            <a:avLst/>
+          </a:prstGeom>
+          <a:solidFill>
+            <a:srgbClr val="F7F7F9"/>
+          </a:solidFill>
+          <a:ln>
+            <a:noFill/>
+          </a:ln>
+          <a:effectLst/>
+        </p:spPr>
+        <p:style>
+          <a:lnRef idx="1">
+            <a:schemeClr val="accent1"/>
+          </a:lnRef>
+          <a:fillRef idx="3">
+            <a:schemeClr val="accent1"/>
+          </a:fillRef>
+          <a:effectRef idx="2">
+            <a:schemeClr val="accent1"/>
+          </a:effectRef>
+          <a:fontRef idx="minor">
+            <a:schemeClr val="lt1"/>
+          </a:fontRef>
+        </p:style>
+        <p:txBody>
+          <a:bodyPr rtlCol="0" anchor="ctr"/>
+          <a:lstStyle/>
+          <a:p>
+            <a:pPr algn="ctr"/>
+          </a:p>
+        </p:txBody>
+      </p:sp>
+      <p:sp>
+        <p:nvSpPr>
+          <p:cNvPr id="10" name="TextBox 9"/>
+          <p:cNvSpPr txBox="1"/>
+          <p:nvPr/>
+        </p:nvSpPr>
+        <p:spPr>
+          <a:xfrm>
+            <a:off x="822960" y="2743200"/>
+            <a:ext cx="5486400" cy="640080"/>
+          </a:xfrm>
+          <a:prstGeom prst="rect">
+            <a:avLst/>
+          </a:prstGeom>
+          <a:noFill/>
+        </p:spPr>
+        <p:txBody>
+          <a:bodyPr wrap="square" lIns="0" rIns="0" tIns="0" bIns="0" anchor="ctr">
+            <a:spAutoFit/>
+          </a:bodyPr>
+          <a:lstStyle/>
+          <a:p>
+            <a:pPr algn="l">
+              <a:spcAft>
+                <a:spcPts val="200"/>
+              </a:spcAft>
+            </a:pPr>
+            <a:r>
+              <a:rPr sz="1150" b="0" i="0">
+                <a:solidFill>
+                  <a:srgbClr val="262630"/>
+                </a:solidFill>
+                <a:latin typeface="Yu Gothic"/>
+                <a:ea typeface="Yu Gothic"/>
+                <a:cs typeface="Yu Gothic"/>
+              </a:rPr>
+              <a:t>経営が出席して案件の続け方を決める月例会議（構想中だったもの）</a:t>
+            </a:r>
+          </a:p>
+        </p:txBody>
+      </p:sp>
+      <p:sp>
+        <p:nvSpPr>
+          <p:cNvPr id="11" name="Rectangle 10"/>
+          <p:cNvSpPr/>
+          <p:nvPr/>
+        </p:nvSpPr>
+        <p:spPr>
+          <a:xfrm>
+            <a:off x="6537960" y="2743200"/>
+            <a:ext cx="5120640" cy="640080"/>
+          </a:xfrm>
+          <a:prstGeom prst="rect">
+            <a:avLst/>
+          </a:prstGeom>
+          <a:solidFill>
+            <a:srgbClr val="F3EFFB"/>
+          </a:solidFill>
+          <a:ln>
+            <a:noFill/>
+          </a:ln>
+          <a:effectLst/>
+        </p:spPr>
+        <p:style>
+          <a:lnRef idx="1">
+            <a:schemeClr val="accent1"/>
+          </a:lnRef>
+          <a:fillRef idx="3">
+            <a:schemeClr val="accent1"/>
+          </a:fillRef>
+          <a:effectRef idx="2">
+            <a:schemeClr val="accent1"/>
+          </a:effectRef>
+          <a:fontRef idx="minor">
+            <a:schemeClr val="lt1"/>
+          </a:fontRef>
+        </p:style>
+        <p:txBody>
+          <a:bodyPr rtlCol="0" anchor="ctr"/>
+          <a:lstStyle/>
+          <a:p>
+            <a:pPr algn="ctr"/>
+          </a:p>
+        </p:txBody>
+      </p:sp>
+      <p:sp>
+        <p:nvSpPr>
+          <p:cNvPr id="12" name="TextBox 11"/>
+          <p:cNvSpPr txBox="1"/>
+          <p:nvPr/>
+        </p:nvSpPr>
+        <p:spPr>
+          <a:xfrm>
+            <a:off x="6675120" y="2743200"/>
+            <a:ext cx="4892040" cy="640080"/>
+          </a:xfrm>
+          <a:prstGeom prst="rect">
+            <a:avLst/>
+          </a:prstGeom>
+          <a:noFill/>
+        </p:spPr>
+        <p:txBody>
+          <a:bodyPr wrap="square" lIns="0" rIns="0" tIns="0" bIns="0" anchor="ctr">
+            <a:spAutoFit/>
+          </a:bodyPr>
+          <a:lstStyle/>
+          <a:p>
+            <a:pPr algn="l">
+              <a:spcAft>
+                <a:spcPts val="200"/>
+              </a:spcAft>
+            </a:pPr>
+            <a:r>
+              <a:rPr sz="1150" b="1" i="0">
+                <a:solidFill>
+                  <a:srgbClr val="3A106E"/>
+                </a:solidFill>
+                <a:latin typeface="Yu Gothic"/>
+                <a:ea typeface="Yu Gothic"/>
+                <a:cs typeface="Yu Gothic"/>
+              </a:rPr>
+              <a:t>→ 戦略会議と点検会議がその役割を持ちます</a:t>
+            </a:r>
+          </a:p>
+        </p:txBody>
+      </p:sp>
+      <p:sp>
+        <p:nvSpPr>
+          <p:cNvPr id="13" name="Rectangle 12"/>
+          <p:cNvSpPr/>
+          <p:nvPr/>
+        </p:nvSpPr>
+        <p:spPr>
+          <a:xfrm>
+            <a:off x="640080" y="3520439"/>
+            <a:ext cx="5760720" cy="640080"/>
+          </a:xfrm>
+          <a:prstGeom prst="rect">
+            <a:avLst/>
+          </a:prstGeom>
+          <a:solidFill>
+            <a:srgbClr val="F7F7F9"/>
+          </a:solidFill>
+          <a:ln>
+            <a:noFill/>
+          </a:ln>
+          <a:effectLst/>
+        </p:spPr>
+        <p:style>
+          <a:lnRef idx="1">
+            <a:schemeClr val="accent1"/>
+          </a:lnRef>
+          <a:fillRef idx="3">
+            <a:schemeClr val="accent1"/>
+          </a:fillRef>
+          <a:effectRef idx="2">
+            <a:schemeClr val="accent1"/>
+          </a:effectRef>
+          <a:fontRef idx="minor">
+            <a:schemeClr val="lt1"/>
+          </a:fontRef>
+        </p:style>
+        <p:txBody>
+          <a:bodyPr rtlCol="0" anchor="ctr"/>
+          <a:lstStyle/>
+          <a:p>
+            <a:pPr algn="ctr"/>
+          </a:p>
+        </p:txBody>
+      </p:sp>
+      <p:sp>
+        <p:nvSpPr>
+          <p:cNvPr id="14" name="TextBox 13"/>
+          <p:cNvSpPr txBox="1"/>
+          <p:nvPr/>
+        </p:nvSpPr>
+        <p:spPr>
+          <a:xfrm>
+            <a:off x="822960" y="3520439"/>
+            <a:ext cx="5486400" cy="640080"/>
+          </a:xfrm>
+          <a:prstGeom prst="rect">
+            <a:avLst/>
+          </a:prstGeom>
+          <a:noFill/>
+        </p:spPr>
+        <p:txBody>
+          <a:bodyPr wrap="square" lIns="0" rIns="0" tIns="0" bIns="0" anchor="ctr">
+            <a:spAutoFit/>
+          </a:bodyPr>
+          <a:lstStyle/>
+          <a:p>
+            <a:pPr algn="l">
+              <a:spcAft>
+                <a:spcPts val="200"/>
+              </a:spcAft>
+            </a:pPr>
+            <a:r>
+              <a:rPr sz="1150" b="0" i="0">
+                <a:solidFill>
+                  <a:srgbClr val="262630"/>
+                </a:solidFill>
+                <a:latin typeface="Yu Gothic"/>
+                <a:ea typeface="Yu Gothic"/>
+                <a:cs typeface="Yu Gothic"/>
+              </a:rPr>
+              <a:t>各部門の定例会議・朝会</a:t>
+            </a:r>
+          </a:p>
+        </p:txBody>
+      </p:sp>
+      <p:sp>
+        <p:nvSpPr>
+          <p:cNvPr id="15" name="Rectangle 14"/>
+          <p:cNvSpPr/>
+          <p:nvPr/>
+        </p:nvSpPr>
+        <p:spPr>
+          <a:xfrm>
+            <a:off x="6537960" y="3520439"/>
+            <a:ext cx="5120640" cy="640080"/>
+          </a:xfrm>
+          <a:prstGeom prst="rect">
+            <a:avLst/>
+          </a:prstGeom>
+          <a:solidFill>
+            <a:srgbClr val="F3EFFB"/>
+          </a:solidFill>
+          <a:ln>
+            <a:noFill/>
+          </a:ln>
+          <a:effectLst/>
+        </p:spPr>
+        <p:style>
+          <a:lnRef idx="1">
+            <a:schemeClr val="accent1"/>
+          </a:lnRef>
+          <a:fillRef idx="3">
+            <a:schemeClr val="accent1"/>
+          </a:fillRef>
+          <a:effectRef idx="2">
+            <a:schemeClr val="accent1"/>
+          </a:effectRef>
+          <a:fontRef idx="minor">
+            <a:schemeClr val="lt1"/>
+          </a:fontRef>
+        </p:style>
+        <p:txBody>
+          <a:bodyPr rtlCol="0" anchor="ctr"/>
+          <a:lstStyle/>
+          <a:p>
+            <a:pPr algn="ctr"/>
+          </a:p>
+        </p:txBody>
+      </p:sp>
+      <p:sp>
+        <p:nvSpPr>
+          <p:cNvPr id="16" name="TextBox 15"/>
+          <p:cNvSpPr txBox="1"/>
+          <p:nvPr/>
+        </p:nvSpPr>
+        <p:spPr>
+          <a:xfrm>
+            <a:off x="6675120" y="3520439"/>
+            <a:ext cx="4892040" cy="640080"/>
+          </a:xfrm>
+          <a:prstGeom prst="rect">
+            <a:avLst/>
+          </a:prstGeom>
+          <a:noFill/>
+        </p:spPr>
+        <p:txBody>
+          <a:bodyPr wrap="square" lIns="0" rIns="0" tIns="0" bIns="0" anchor="ctr">
+            <a:spAutoFit/>
+          </a:bodyPr>
+          <a:lstStyle/>
+          <a:p>
+            <a:pPr algn="l">
+              <a:spcAft>
+                <a:spcPts val="200"/>
+              </a:spcAft>
+            </a:pPr>
+            <a:r>
+              <a:rPr sz="1150" b="1" i="0">
+                <a:solidFill>
+                  <a:srgbClr val="3A106E"/>
+                </a:solidFill>
+                <a:latin typeface="Yu Gothic"/>
+                <a:ea typeface="Yu Gothic"/>
+                <a:cs typeface="Yu Gothic"/>
+              </a:rPr>
+              <a:t>→ 変わりません（改革に関わる話だけ、分科会に持ち込んでください）</a:t>
+            </a:r>
+          </a:p>
+        </p:txBody>
+      </p:sp>
+      <p:sp>
+        <p:nvSpPr>
+          <p:cNvPr id="17" name="TextBox 16"/>
+          <p:cNvSpPr txBox="1"/>
+          <p:nvPr/>
+        </p:nvSpPr>
+        <p:spPr>
+          <a:xfrm>
+            <a:off x="640080" y="4572000"/>
+            <a:ext cx="10972800" cy="1280160"/>
+          </a:xfrm>
+          <a:prstGeom prst="rect">
+            <a:avLst/>
+          </a:prstGeom>
+          <a:noFill/>
+        </p:spPr>
+        <p:txBody>
+          <a:bodyPr wrap="square" lIns="0" rIns="0" tIns="0" bIns="0">
+            <a:spAutoFit/>
+          </a:bodyPr>
+          <a:lstStyle/>
+          <a:p>
+            <a:pPr algn="l">
+              <a:spcAft>
+                <a:spcPts val="800"/>
+              </a:spcAft>
+            </a:pPr>
+            <a:r>
+              <a:rPr sz="1400" b="1" i="0">
+                <a:solidFill>
+                  <a:srgbClr val="262630"/>
+                </a:solidFill>
+                <a:latin typeface="Yu Gothic"/>
+                <a:ea typeface="Yu Gothic"/>
+                <a:cs typeface="Yu Gothic"/>
+              </a:rPr>
+              <a:t>ここから15分、質疑の時間です。特に聞かせてください：</a:t>
+            </a:r>
+          </a:p>
+          <a:p>
+            <a:pPr algn="l">
+              <a:spcAft>
+                <a:spcPts val="400"/>
+              </a:spcAft>
+            </a:pPr>
+            <a:r>
+              <a:rPr sz="1300" b="0" i="0">
+                <a:solidFill>
+                  <a:srgbClr val="262630"/>
+                </a:solidFill>
+                <a:latin typeface="Yu Gothic"/>
+                <a:ea typeface="Yu Gothic"/>
+                <a:cs typeface="Yu Gothic"/>
+              </a:rPr>
+              <a:t>・自部門は、どの分科会にどう関わるのか（不明な点）</a:t>
+            </a:r>
+          </a:p>
+          <a:p>
+            <a:pPr algn="l">
+              <a:spcAft>
+                <a:spcPts val="400"/>
+              </a:spcAft>
+            </a:pPr>
+            <a:r>
+              <a:rPr sz="1300" b="0" i="0">
+                <a:solidFill>
+                  <a:srgbClr val="262630"/>
+                </a:solidFill>
+                <a:latin typeface="Yu Gothic"/>
+                <a:ea typeface="Yu Gothic"/>
+                <a:cs typeface="Yu Gothic"/>
+              </a:rPr>
+              <a:t>・「これも統合できるのでは」という既存の会議</a:t>
+            </a:r>
+          </a:p>
+          <a:p>
+            <a:pPr algn="l">
+              <a:spcAft>
+                <a:spcPts val="400"/>
+              </a:spcAft>
+            </a:pPr>
+            <a:r>
+              <a:rPr sz="1300" b="0" i="0">
+                <a:solidFill>
+                  <a:srgbClr val="262630"/>
+                </a:solidFill>
+                <a:latin typeface="Yu Gothic"/>
+                <a:ea typeface="Yu Gothic"/>
+                <a:cs typeface="Yu Gothic"/>
+              </a:rPr>
+              <a:t>・この仕組みで回らなくなりそうなところ</a:t>
+            </a:r>
+          </a:p>
+        </p:txBody>
+      </p:sp>
+      <p:sp>
+        <p:nvSpPr>
+          <p:cNvPr id="18" name="Rectangle 17"/>
+          <p:cNvSpPr/>
+          <p:nvPr/>
+        </p:nvSpPr>
+        <p:spPr>
+          <a:xfrm>
+            <a:off x="640080" y="5943600"/>
+            <a:ext cx="11064240" cy="502920"/>
+          </a:xfrm>
+          <a:prstGeom prst="rect">
+            <a:avLst/>
+          </a:prstGeom>
+          <a:solidFill>
+            <a:srgbClr val="F3EFFB"/>
+          </a:solidFill>
+          <a:ln>
+            <a:noFill/>
+          </a:ln>
+          <a:effectLst/>
+        </p:spPr>
+        <p:style>
+          <a:lnRef idx="1">
+            <a:schemeClr val="accent1"/>
+          </a:lnRef>
+          <a:fillRef idx="3">
+            <a:schemeClr val="accent1"/>
+          </a:fillRef>
+          <a:effectRef idx="2">
+            <a:schemeClr val="accent1"/>
+          </a:effectRef>
+          <a:fontRef idx="minor">
+            <a:schemeClr val="lt1"/>
+          </a:fontRef>
+        </p:style>
+        <p:txBody>
+          <a:bodyPr rtlCol="0" anchor="ctr"/>
+          <a:lstStyle/>
+          <a:p>
+            <a:pPr algn="ctr"/>
+          </a:p>
+        </p:txBody>
+      </p:sp>
+      <p:sp>
+        <p:nvSpPr>
+          <p:cNvPr id="19" name="Rectangle 18"/>
+          <p:cNvSpPr/>
+          <p:nvPr/>
+        </p:nvSpPr>
+        <p:spPr>
+          <a:xfrm>
+            <a:off x="640080" y="5943600"/>
+            <a:ext cx="38100" cy="502920"/>
           </a:xfrm>
           <a:prstGeom prst="rect">
             <a:avLst/>
@@ -8716,14 +10659,14 @@
       </p:sp>
       <p:sp>
         <p:nvSpPr>
-          <p:cNvPr id="9" name="TextBox 8"/>
+          <p:cNvPr id="20" name="TextBox 19"/>
           <p:cNvSpPr txBox="1"/>
           <p:nvPr/>
         </p:nvSpPr>
         <p:spPr>
           <a:xfrm>
-            <a:off x="685800" y="5934456"/>
-            <a:ext cx="10881360" cy="457200"/>
+            <a:off x="868680" y="5943600"/>
+            <a:ext cx="10607040" cy="502920"/>
           </a:xfrm>
           <a:prstGeom prst="rect">
             <a:avLst/>
@@ -8738,22 +10681,11 @@
           <a:p>
             <a:pPr algn="l">
               <a:spcAft>
-                <a:spcPts val="400"/>
-              </a:spcAft>
-            </a:pPr>
-            <a:r>
-              <a:rPr sz="1000" b="1" i="0">
-                <a:solidFill>
-                  <a:srgbClr val="7823DC"/>
-                </a:solidFill>
-                <a:latin typeface="Yu Gothic"/>
-                <a:ea typeface="Yu Gothic"/>
-                <a:cs typeface="Yu Gothic"/>
-              </a:rPr>
-              <a:t>ここだけ覚えて帰ってください　</a:t>
-            </a:r>
-            <a:r>
-              <a:rPr sz="1000" b="0" i="0">
+                <a:spcPts val="200"/>
+              </a:spcAft>
+            </a:pPr>
+            <a:r>
+              <a:rPr sz="1200" b="1" i="0">
                 <a:solidFill>
                   <a:srgbClr val="262630"/>
                 </a:solidFill>
@@ -8761,58 +10693,14 @@
                 <a:ea typeface="Yu Gothic"/>
                 <a:cs typeface="Yu Gothic"/>
               </a:rPr>
-              <a:t>特に①の人選は今週中にご相談します。候補者のイメージを持ち帰ってください</a:t>
-            </a:r>
-          </a:p>
-        </p:txBody>
-      </p:sp>
-      <p:sp>
-        <p:nvSpPr>
-          <p:cNvPr id="10" name="Rectangle 9"/>
-          <p:cNvSpPr/>
-          <p:nvPr/>
-        </p:nvSpPr>
-        <p:spPr>
-          <a:xfrm>
-            <a:off x="502920" y="6510528"/>
-            <a:ext cx="11183112" cy="15240"/>
-          </a:xfrm>
-          <a:prstGeom prst="rect">
-            <a:avLst/>
-          </a:prstGeom>
-          <a:solidFill>
-            <a:srgbClr val="D9D9E0"/>
-          </a:solidFill>
-          <a:ln>
-            <a:noFill/>
-          </a:ln>
-          <a:effectLst/>
-        </p:spPr>
-        <p:style>
-          <a:lnRef idx="1">
-            <a:schemeClr val="accent1"/>
-          </a:lnRef>
-          <a:fillRef idx="3">
-            <a:schemeClr val="accent1"/>
-          </a:fillRef>
-          <a:effectRef idx="2">
-            <a:schemeClr val="accent1"/>
-          </a:effectRef>
-          <a:fontRef idx="minor">
-            <a:schemeClr val="lt1"/>
-          </a:fontRef>
-        </p:style>
-        <p:txBody>
-          <a:bodyPr rtlCol="0" anchor="ctr"/>
-          <a:lstStyle/>
-          <a:p>
-            <a:pPr algn="ctr"/>
-          </a:p>
-        </p:txBody>
-      </p:sp>
-      <p:sp>
-        <p:nvSpPr>
-          <p:cNvPr id="11" name="TextBox 10"/>
+              <a:t>言いそびれた意見は、今後1週間、新谷まで直接どうぞ（メール・口頭どちらでも）</a:t>
+            </a:r>
+          </a:p>
+        </p:txBody>
+      </p:sp>
+      <p:sp>
+        <p:nvSpPr>
+          <p:cNvPr id="21" name="TextBox 20"/>
           <p:cNvSpPr txBox="1"/>
           <p:nvPr/>
         </p:nvSpPr>
@@ -8846,14 +10734,14 @@
                 <a:ea typeface="Yu Gothic"/>
                 <a:cs typeface="Yu Gothic"/>
               </a:rPr>
-              <a:t>円谷プロダクション｜構造改革の新しい会議の仕組み 部長会共有資料（社外秘）</a:t>
-            </a:r>
-          </a:p>
-        </p:txBody>
-      </p:sp>
-      <p:sp>
-        <p:nvSpPr>
-          <p:cNvPr id="12" name="TextBox 11"/>
+              <a:t>円谷プロダクション｜新しい会議の仕組み（部長会・社外秘）</a:t>
+            </a:r>
+          </a:p>
+        </p:txBody>
+      </p:sp>
+      <p:sp>
+        <p:nvSpPr>
+          <p:cNvPr id="22" name="TextBox 21"/>
           <p:cNvSpPr txBox="1"/>
           <p:nvPr/>
         </p:nvSpPr>
@@ -8888,520 +10776,6 @@
                 <a:cs typeface="Yu Gothic"/>
               </a:rPr>
               <a:t>8</a:t>
-            </a:r>
-          </a:p>
-        </p:txBody>
-      </p:sp>
-    </p:spTree>
-  </p:cSld>
-  <p:clrMapOvr>
-    <a:masterClrMapping/>
-  </p:clrMapOvr>
-</p:sld>
-</file>
-
-<file path=ppt/slides/slide9.xml><?xml version="1.0" encoding="utf-8"?>
-<p:sld xmlns:a="http://schemas.openxmlformats.org/drawingml/2006/main" xmlns:p="http://schemas.openxmlformats.org/presentationml/2006/main" xmlns:r="http://schemas.openxmlformats.org/officeDocument/2006/relationships">
-  <p:cSld>
-    <p:spTree>
-      <p:nvGrpSpPr>
-        <p:cNvPr id="1" name=""/>
-        <p:cNvGrpSpPr/>
-        <p:nvPr/>
-      </p:nvGrpSpPr>
-      <p:grpSpPr/>
-      <p:sp>
-        <p:nvSpPr>
-          <p:cNvPr id="2" name="TextBox 1"/>
-          <p:cNvSpPr txBox="1"/>
-          <p:nvPr/>
-        </p:nvSpPr>
-        <p:spPr>
-          <a:xfrm>
-            <a:off x="502920" y="256032"/>
-            <a:ext cx="11155680" cy="256032"/>
-          </a:xfrm>
-          <a:prstGeom prst="rect">
-            <a:avLst/>
-          </a:prstGeom>
-          <a:noFill/>
-        </p:spPr>
-        <p:txBody>
-          <a:bodyPr wrap="square" lIns="0" rIns="0" tIns="0" bIns="0">
-            <a:spAutoFit/>
-          </a:bodyPr>
-          <a:lstStyle/>
-          <a:p>
-            <a:pPr algn="l">
-              <a:spcAft>
-                <a:spcPts val="400"/>
-              </a:spcAft>
-            </a:pPr>
-            <a:r>
-              <a:rPr sz="1000" b="1" i="0">
-                <a:solidFill>
-                  <a:srgbClr val="7823DC"/>
-                </a:solidFill>
-                <a:latin typeface="Yu Gothic"/>
-                <a:ea typeface="Yu Gothic"/>
-                <a:cs typeface="Yu Gothic"/>
-              </a:rPr>
-              <a:t>スケジュールと質疑（10分）</a:t>
-            </a:r>
-          </a:p>
-        </p:txBody>
-      </p:sp>
-      <p:sp>
-        <p:nvSpPr>
-          <p:cNvPr id="3" name="TextBox 2"/>
-          <p:cNvSpPr txBox="1"/>
-          <p:nvPr/>
-        </p:nvSpPr>
-        <p:spPr>
-          <a:xfrm>
-            <a:off x="502920" y="512064"/>
-            <a:ext cx="11155680" cy="868680"/>
-          </a:xfrm>
-          <a:prstGeom prst="rect">
-            <a:avLst/>
-          </a:prstGeom>
-          <a:noFill/>
-        </p:spPr>
-        <p:txBody>
-          <a:bodyPr wrap="square" lIns="0" rIns="0" tIns="0" bIns="0">
-            <a:spAutoFit/>
-          </a:bodyPr>
-          <a:lstStyle/>
-          <a:p>
-            <a:pPr algn="l">
-              <a:spcAft>
-                <a:spcPts val="0"/>
-              </a:spcAft>
-            </a:pPr>
-            <a:r>
-              <a:rPr sz="1900" b="1" i="0">
-                <a:solidFill>
-                  <a:srgbClr val="262630"/>
-                </a:solidFill>
-                <a:latin typeface="Yu Gothic"/>
-                <a:ea typeface="Yu Gothic"/>
-                <a:cs typeface="Yu Gothic"/>
-              </a:rPr>
-              <a:t>直近の動きと、本日の質疑</a:t>
-            </a:r>
-          </a:p>
-        </p:txBody>
-      </p:sp>
-      <p:sp>
-        <p:nvSpPr>
-          <p:cNvPr id="4" name="Rectangle 3"/>
-          <p:cNvSpPr/>
-          <p:nvPr/>
-        </p:nvSpPr>
-        <p:spPr>
-          <a:xfrm>
-            <a:off x="502920" y="1389888"/>
-            <a:ext cx="1463040" cy="33020"/>
-          </a:xfrm>
-          <a:prstGeom prst="rect">
-            <a:avLst/>
-          </a:prstGeom>
-          <a:solidFill>
-            <a:srgbClr val="7823DC"/>
-          </a:solidFill>
-          <a:ln>
-            <a:noFill/>
-          </a:ln>
-          <a:effectLst/>
-        </p:spPr>
-        <p:style>
-          <a:lnRef idx="1">
-            <a:schemeClr val="accent1"/>
-          </a:lnRef>
-          <a:fillRef idx="3">
-            <a:schemeClr val="accent1"/>
-          </a:fillRef>
-          <a:effectRef idx="2">
-            <a:schemeClr val="accent1"/>
-          </a:effectRef>
-          <a:fontRef idx="minor">
-            <a:schemeClr val="lt1"/>
-          </a:fontRef>
-        </p:style>
-        <p:txBody>
-          <a:bodyPr rtlCol="0" anchor="ctr"/>
-          <a:lstStyle/>
-          <a:p>
-            <a:pPr algn="ctr"/>
-          </a:p>
-        </p:txBody>
-      </p:sp>
-      <p:sp>
-        <p:nvSpPr>
-          <p:cNvPr id="5" name="TextBox 4"/>
-          <p:cNvSpPr txBox="1"/>
-          <p:nvPr/>
-        </p:nvSpPr>
-        <p:spPr>
-          <a:xfrm>
-            <a:off x="502920" y="1517904"/>
-            <a:ext cx="11155680" cy="310896"/>
-          </a:xfrm>
-          <a:prstGeom prst="rect">
-            <a:avLst/>
-          </a:prstGeom>
-          <a:noFill/>
-        </p:spPr>
-        <p:txBody>
-          <a:bodyPr wrap="square" lIns="0" rIns="0" tIns="0" bIns="0">
-            <a:spAutoFit/>
-          </a:bodyPr>
-          <a:lstStyle/>
-          <a:p>
-            <a:pPr algn="l">
-              <a:spcAft>
-                <a:spcPts val="400"/>
-              </a:spcAft>
-            </a:pPr>
-            <a:r>
-              <a:rPr sz="1150" b="1" i="0">
-                <a:solidFill>
-                  <a:srgbClr val="3A106E"/>
-                </a:solidFill>
-                <a:latin typeface="Yu Gothic"/>
-                <a:ea typeface="Yu Gothic"/>
-                <a:cs typeface="Yu Gothic"/>
-              </a:rPr>
-              <a:t>ご質問・ご懸念は本日と、今後1週間（新谷まで直接）で受け付けます</a:t>
-            </a:r>
-          </a:p>
-        </p:txBody>
-      </p:sp>
-      <p:sp>
-        <p:nvSpPr>
-          <p:cNvPr id="6" name="TextBox 5"/>
-          <p:cNvSpPr txBox="1"/>
-          <p:nvPr/>
-        </p:nvSpPr>
-        <p:spPr>
-          <a:xfrm>
-            <a:off x="502920" y="1865376"/>
-            <a:ext cx="11155680" cy="3931920"/>
-          </a:xfrm>
-          <a:prstGeom prst="rect">
-            <a:avLst/>
-          </a:prstGeom>
-          <a:noFill/>
-        </p:spPr>
-        <p:txBody>
-          <a:bodyPr wrap="square" lIns="0" rIns="0" tIns="0" bIns="0">
-            <a:spAutoFit/>
-          </a:bodyPr>
-          <a:lstStyle/>
-          <a:p>
-            <a:pPr algn="l">
-              <a:spcAft>
-                <a:spcPts val="300"/>
-              </a:spcAft>
-            </a:pPr>
-            <a:r>
-              <a:rPr sz="1200" b="1" i="0">
-                <a:solidFill>
-                  <a:srgbClr val="3A106E"/>
-                </a:solidFill>
-                <a:latin typeface="Yu Gothic"/>
-                <a:ea typeface="Yu Gothic"/>
-                <a:cs typeface="Yu Gothic"/>
-              </a:rPr>
-              <a:t>直近のスケジュール（予定）</a:t>
-            </a:r>
-          </a:p>
-          <a:p>
-            <a:pPr algn="l">
-              <a:spcAft>
-                <a:spcPts val="600"/>
-              </a:spcAft>
-            </a:pPr>
-            <a:r>
-              <a:rPr sz="1150" b="0" i="0">
-                <a:solidFill>
-                  <a:srgbClr val="262630"/>
-                </a:solidFill>
-                <a:latin typeface="Yu Gothic"/>
-                <a:ea typeface="Yu Gothic"/>
-                <a:cs typeface="Yu Gothic"/>
-              </a:rPr>
-              <a:t>■ 今週〜来週：分科会メンバーの人選（各部長にご相談）／会議の曜日・時間の確定／事務局（PMO）の立ち上げ</a:t>
-            </a:r>
-          </a:p>
-          <a:p>
-            <a:pPr algn="l">
-              <a:spcAft>
-                <a:spcPts val="600"/>
-              </a:spcAft>
-            </a:pPr>
-            <a:r>
-              <a:rPr sz="1150" b="0" i="0">
-                <a:solidFill>
-                  <a:srgbClr val="262630"/>
-                </a:solidFill>
-                <a:latin typeface="Yu Gothic"/>
-                <a:ea typeface="Yu Gothic"/>
-                <a:cs typeface="Yu Gothic"/>
-              </a:rPr>
-              <a:t>■ その後：分科会の初回開催 → 2週間サイクルの開始（15週間の計画で運営）</a:t>
-            </a:r>
-          </a:p>
-          <a:p>
-            <a:pPr algn="l">
-              <a:spcAft>
-                <a:spcPts val="600"/>
-              </a:spcAft>
-            </a:pPr>
-            <a:r>
-              <a:rPr sz="1150" b="0" i="0">
-                <a:solidFill>
-                  <a:srgbClr val="262630"/>
-                </a:solidFill>
-                <a:latin typeface="Yu Gothic"/>
-                <a:ea typeface="Yu Gothic"/>
-                <a:cs typeface="Yu Gothic"/>
-              </a:rPr>
-              <a:t>■ 各会議の進め方の型（アジェンダの様式・議事メモの様式）は事務局から配布します。ゼロから作る必要はありません</a:t>
-            </a:r>
-          </a:p>
-          <a:p>
-            <a:pPr algn="l">
-              <a:spcAft>
-                <a:spcPts val="300"/>
-              </a:spcAft>
-            </a:pPr>
-            <a:r>
-              <a:rPr sz="1200" b="1" i="0">
-                <a:solidFill>
-                  <a:srgbClr val="3A106E"/>
-                </a:solidFill>
-                <a:latin typeface="Yu Gothic"/>
-                <a:ea typeface="Yu Gothic"/>
-                <a:cs typeface="Yu Gothic"/>
-              </a:rPr>
-              <a:t>本日の質疑で特に伺いたいこと</a:t>
-            </a:r>
-          </a:p>
-          <a:p>
-            <a:pPr algn="l">
-              <a:spcAft>
-                <a:spcPts val="600"/>
-              </a:spcAft>
-            </a:pPr>
-            <a:r>
-              <a:rPr sz="1150" b="0" i="0">
-                <a:solidFill>
-                  <a:srgbClr val="262630"/>
-                </a:solidFill>
-                <a:latin typeface="Yu Gothic"/>
-                <a:ea typeface="Yu Gothic"/>
-                <a:cs typeface="Yu Gothic"/>
-              </a:rPr>
-              <a:t>■ ① 自部門との関わりで不明な点（どの分科会に誰が出るべきか等）</a:t>
-            </a:r>
-          </a:p>
-          <a:p>
-            <a:pPr algn="l">
-              <a:spcAft>
-                <a:spcPts val="600"/>
-              </a:spcAft>
-            </a:pPr>
-            <a:r>
-              <a:rPr sz="1150" b="0" i="0">
-                <a:solidFill>
-                  <a:srgbClr val="262630"/>
-                </a:solidFill>
-                <a:latin typeface="Yu Gothic"/>
-                <a:ea typeface="Yu Gothic"/>
-                <a:cs typeface="Yu Gothic"/>
-              </a:rPr>
-              <a:t>■ ② 既存の会議との重なりで整理すべきもの</a:t>
-            </a:r>
-          </a:p>
-          <a:p>
-            <a:pPr algn="l">
-              <a:spcAft>
-                <a:spcPts val="600"/>
-              </a:spcAft>
-            </a:pPr>
-            <a:r>
-              <a:rPr sz="1150" b="0" i="0">
-                <a:solidFill>
-                  <a:srgbClr val="262630"/>
-                </a:solidFill>
-                <a:latin typeface="Yu Gothic"/>
-                <a:ea typeface="Yu Gothic"/>
-                <a:cs typeface="Yu Gothic"/>
-              </a:rPr>
-              <a:t>■ ③ この仕組みで「ここが回らなくなりそう」という予感</a:t>
-            </a:r>
-          </a:p>
-          <a:p>
-            <a:pPr algn="l">
-              <a:spcAft>
-                <a:spcPts val="300"/>
-              </a:spcAft>
-            </a:pPr>
-            <a:r>
-              <a:rPr sz="1000" b="0" i="0">
-                <a:solidFill>
-                  <a:srgbClr val="8A8A99"/>
-                </a:solidFill>
-                <a:latin typeface="Yu Gothic"/>
-                <a:ea typeface="Yu Gothic"/>
-                <a:cs typeface="Yu Gothic"/>
-              </a:rPr>
-              <a:t/>
-            </a:r>
-          </a:p>
-          <a:p>
-            <a:pPr algn="l">
-              <a:spcAft>
-                <a:spcPts val="300"/>
-              </a:spcAft>
-            </a:pPr>
-            <a:r>
-              <a:rPr sz="1200" b="1" i="0">
-                <a:solidFill>
-                  <a:srgbClr val="3A106E"/>
-                </a:solidFill>
-                <a:latin typeface="Yu Gothic"/>
-                <a:ea typeface="Yu Gothic"/>
-                <a:cs typeface="Yu Gothic"/>
-              </a:rPr>
-              <a:t>会議を変えることは、仕事の進み方を変えることです。ご協力をお願いします。——新谷</a:t>
-            </a:r>
-          </a:p>
-        </p:txBody>
-      </p:sp>
-      <p:sp>
-        <p:nvSpPr>
-          <p:cNvPr id="7" name="Rectangle 6"/>
-          <p:cNvSpPr/>
-          <p:nvPr/>
-        </p:nvSpPr>
-        <p:spPr>
-          <a:xfrm>
-            <a:off x="502920" y="6510528"/>
-            <a:ext cx="11183112" cy="15240"/>
-          </a:xfrm>
-          <a:prstGeom prst="rect">
-            <a:avLst/>
-          </a:prstGeom>
-          <a:solidFill>
-            <a:srgbClr val="D9D9E0"/>
-          </a:solidFill>
-          <a:ln>
-            <a:noFill/>
-          </a:ln>
-          <a:effectLst/>
-        </p:spPr>
-        <p:style>
-          <a:lnRef idx="1">
-            <a:schemeClr val="accent1"/>
-          </a:lnRef>
-          <a:fillRef idx="3">
-            <a:schemeClr val="accent1"/>
-          </a:fillRef>
-          <a:effectRef idx="2">
-            <a:schemeClr val="accent1"/>
-          </a:effectRef>
-          <a:fontRef idx="minor">
-            <a:schemeClr val="lt1"/>
-          </a:fontRef>
-        </p:style>
-        <p:txBody>
-          <a:bodyPr rtlCol="0" anchor="ctr"/>
-          <a:lstStyle/>
-          <a:p>
-            <a:pPr algn="ctr"/>
-          </a:p>
-        </p:txBody>
-      </p:sp>
-      <p:sp>
-        <p:nvSpPr>
-          <p:cNvPr id="8" name="TextBox 7"/>
-          <p:cNvSpPr txBox="1"/>
-          <p:nvPr/>
-        </p:nvSpPr>
-        <p:spPr>
-          <a:xfrm>
-            <a:off x="502920" y="6565392"/>
-            <a:ext cx="8229600" cy="274320"/>
-          </a:xfrm>
-          <a:prstGeom prst="rect">
-            <a:avLst/>
-          </a:prstGeom>
-          <a:noFill/>
-        </p:spPr>
-        <p:txBody>
-          <a:bodyPr wrap="square" lIns="0" rIns="0" tIns="0" bIns="0">
-            <a:spAutoFit/>
-          </a:bodyPr>
-          <a:lstStyle/>
-          <a:p>
-            <a:pPr algn="l">
-              <a:spcAft>
-                <a:spcPts val="400"/>
-              </a:spcAft>
-            </a:pPr>
-            <a:r>
-              <a:rPr sz="750" b="0" i="0">
-                <a:solidFill>
-                  <a:srgbClr val="8A8A99"/>
-                </a:solidFill>
-                <a:latin typeface="Yu Gothic"/>
-                <a:ea typeface="Yu Gothic"/>
-                <a:cs typeface="Yu Gothic"/>
-              </a:rPr>
-              <a:t>円谷プロダクション｜構造改革の新しい会議の仕組み 部長会共有資料（社外秘）</a:t>
-            </a:r>
-          </a:p>
-        </p:txBody>
-      </p:sp>
-      <p:sp>
-        <p:nvSpPr>
-          <p:cNvPr id="9" name="TextBox 8"/>
-          <p:cNvSpPr txBox="1"/>
-          <p:nvPr/>
-        </p:nvSpPr>
-        <p:spPr>
-          <a:xfrm>
-            <a:off x="11247120" y="6565392"/>
-            <a:ext cx="457200" cy="274320"/>
-          </a:xfrm>
-          <a:prstGeom prst="rect">
-            <a:avLst/>
-          </a:prstGeom>
-          <a:noFill/>
-        </p:spPr>
-        <p:txBody>
-          <a:bodyPr wrap="square" lIns="0" rIns="0" tIns="0" bIns="0">
-            <a:spAutoFit/>
-          </a:bodyPr>
-          <a:lstStyle/>
-          <a:p>
-            <a:pPr algn="r">
-              <a:spcAft>
-                <a:spcPts val="400"/>
-              </a:spcAft>
-            </a:pPr>
-            <a:r>
-              <a:rPr sz="900" b="0" i="0">
-                <a:solidFill>
-                  <a:srgbClr val="5F5F6E"/>
-                </a:solidFill>
-                <a:latin typeface="Yu Gothic"/>
-                <a:ea typeface="Yu Gothic"/>
-                <a:cs typeface="Yu Gothic"/>
-              </a:rPr>
-              <a:t>9</a:t>
             </a:r>
           </a:p>
         </p:txBody>
